--- a/docs/ComfyUI-AccelDiff_Promo_EN.pptx
+++ b/docs/ComfyUI-AccelDiff_Promo_EN.pptx
@@ -934,7 +934,7 @@
                 <a:ea typeface="思源黑体 CN Bold" panose="020B0800000000000000" pitchFamily="34" charset="-122"/>
                 <a:cs typeface="Microsoft YaHei UI"/>
               </a:rPr>
-              <a:t>Many</a:t>
+              <a:t>Two</a:t>
             </a:r>
             <a:r>
               <a:rPr lang="zh-CN" altLang="en-US" sz="4350" b="1" dirty="0">
@@ -945,7 +945,7 @@
                 <a:ea typeface="思源黑体 CN Bold" panose="020B0800000000000000" pitchFamily="34" charset="-122"/>
                 <a:cs typeface="Microsoft YaHei UI"/>
               </a:rPr>
-              <a:t> Speedups</a:t>
+              <a:t> Layers</a:t>
             </a:r>
           </a:p>
         </ns0:txBody>
@@ -1030,7 +1030,7 @@
                 <a:ea typeface="Microsoft YaHei UI"/>
                 <a:cs typeface="Microsoft YaHei UI"/>
               </a:rPr>
-              <a:t> acceleration framework</a:t>
+              <a:t> acceleration stack</a:t>
             </a:r>
           </a:p>
         </ns0:txBody>
@@ -1339,7 +1339,7 @@
                   <a:ea typeface="思源黑体 CN Bold" panose="020B0800000000000000" pitchFamily="34" charset="-122"/>
                   <a:cs typeface="Microsoft YaHei UI"/>
                 </a:rPr>
-                <a:t>Pick method + model</a:t>
+                <a:t>Pick sampler + model</a:t>
               </a:r>
             </a:p>
           </ns0:txBody>
@@ -1539,7 +1539,7 @@
                   <a:ea typeface="思源黑体 CN Bold" panose="020B0800000000000000" pitchFamily="34" charset="-122"/>
                   <a:cs typeface="Microsoft YaHei UI"/>
                 </a:rPr>
-                <a:t>Auto-wires inference</a:t>
+                <a:t>Use one or both</a:t>
               </a:r>
             </a:p>
           </ns0:txBody>
@@ -3283,7 +3283,7 @@
                 <a:ea typeface="思源黑体 CN Bold" panose="020B0800000000000000" pitchFamily="34" charset="-122"/>
                 <a:cs typeface="Microsoft YaHei UI"/>
               </a:rPr>
-              <a:t>Now: one unified node</a:t>
+              <a:t>Now: one dual-layer node</a:t>
             </a:r>
             <a:endParaRPr sz="2100" dirty="0">
               <a:solidFill>
@@ -3411,7 +3411,7 @@
                 <a:ea typeface="思源黑体 CN Bold" panose="020B0800000000000000" pitchFamily="34" charset="-122"/>
                 <a:cs typeface="Microsoft YaHei UI"/>
               </a:rPr>
-              <a:t>😊 Choose once. Run directly.</a:t>
+              <a:t>😊 Stack both layers.</a:t>
             </a:r>
           </a:p>
         </ns0:txBody>
@@ -3521,7 +3521,7 @@
                 <a:ea typeface="思源黑体 CN Bold" panose="020B0800000000000000" pitchFamily="34" charset="-122"/>
                 <a:cs typeface="Microsoft YaHei UI"/>
               </a:rPr>
-              <a:t>Acceleration methods</a:t>
+              <a:t>Two acceleration layers</a:t>
             </a:r>
           </a:p>
         </ns0:txBody>
@@ -3698,7 +3698,7 @@
                 <a:ea typeface="思源黑体 CN Bold" panose="020B0800000000000000" pitchFamily="34" charset="-122"/>
                 <a:cs typeface="Microsoft YaHei UI"/>
               </a:rPr>
-              <a:t>Relative</a:t>
+              <a:t>Model-level</a:t>
             </a:r>
             <a:r>
               <a:rPr sz="975" b="0" dirty="0">
@@ -3720,7 +3720,7 @@
                 <a:ea typeface="思源黑体 CN Bold" panose="020B0800000000000000" pitchFamily="34" charset="-122"/>
                 <a:cs typeface="Microsoft YaHei UI"/>
               </a:rPr>
-              <a:t>distance criterion</a:t>
+              <a:t>cache criterion</a:t>
             </a:r>
             <a:endParaRPr sz="975" b="0" dirty="0">
               <a:solidFill>
@@ -3755,7 +3755,7 @@
                 <a:ea typeface="思源黑体 CN Bold" panose="020B0800000000000000" pitchFamily="34" charset="-122"/>
                 <a:cs typeface="Microsoft YaHei UI"/>
               </a:rPr>
-              <a:t>Preserves original coefficients and strategy</a:t>
+              <a:t>Preserves TeaCache logic</a:t>
             </a:r>
             <a:endParaRPr sz="975" b="0" dirty="0">
               <a:solidFill>
@@ -3940,7 +3940,7 @@
                 <a:ea typeface="思源黑体 CN Bold" panose="020B0800000000000000" pitchFamily="34" charset="-122"/>
                 <a:cs typeface="Microsoft YaHei UI"/>
               </a:rPr>
-              <a:t>Feature cache + residual reuse</a:t>
+              <a:t>Sampler-level output reuse</a:t>
             </a:r>
           </a:p>
           <a:p>
@@ -3967,7 +3967,7 @@
                 <a:ea typeface="思源黑体 CN Bold" panose="020B0800000000000000" pitchFamily="34" charset="-122"/>
                 <a:cs typeface="Microsoft YaHei UI"/>
               </a:rPr>
-              <a:t>Preserves original logic</a:t>
+              <a:t>Preserves method logic</a:t>
             </a:r>
           </a:p>
         </ns0:txBody>
@@ -4144,7 +4144,7 @@
                 <a:ea typeface="思源黑体 CN Bold" panose="020B0800000000000000" pitchFamily="34" charset="-122"/>
                 <a:cs typeface="Microsoft YaHei UI"/>
               </a:rPr>
-              <a:t>Magnitude-change criterion</a:t>
+              <a:t>Model-level magnitude cache</a:t>
             </a:r>
           </a:p>
           <a:p>
@@ -4171,7 +4171,7 @@
                 <a:ea typeface="思源黑体 CN Bold" panose="020B0800000000000000" pitchFamily="34" charset="-122"/>
                 <a:cs typeface="Microsoft YaHei UI"/>
               </a:rPr>
-              <a:t>Preserves original logic</a:t>
+              <a:t>Preserves method logic</a:t>
             </a:r>
           </a:p>
         </ns0:txBody>
@@ -4348,7 +4348,7 @@
                 <a:ea typeface="思源黑体 CN Bold" panose="020B0800000000000000" pitchFamily="34" charset="-122"/>
                 <a:cs typeface="Microsoft YaHei UI"/>
               </a:rPr>
-              <a:t>Adaptive step skipping</a:t>
+              <a:t>Sampler-level adaptive skipping</a:t>
             </a:r>
           </a:p>
           <a:p>
@@ -4375,7 +4375,7 @@
                 <a:ea typeface="思源黑体 CN Bold" panose="020B0800000000000000" pitchFamily="34" charset="-122"/>
                 <a:cs typeface="Microsoft YaHei UI"/>
               </a:rPr>
-              <a:t>Preserves original logic</a:t>
+              <a:t>Preserves method logic</a:t>
             </a:r>
           </a:p>
         </ns0:txBody>
@@ -6449,7 +6449,7 @@
                 <a:ea typeface="思源黑体 CN Bold" panose="020B0800000000000000" pitchFamily="34" charset="-122"/>
                 <a:cs typeface="阿里巴巴普惠体 2.0 65 Medium" panose="00020600040101010101" pitchFamily="18" charset="-122"/>
               </a:rPr>
-              <a:t>You Only </a:t>
+              <a:t>Stack Both</a:t>
             </a:r>
           </a:p>
           <a:p>
@@ -6460,7 +6460,7 @@
                 <a:ea typeface="思源黑体 CN Bold" panose="020B0800000000000000" pitchFamily="34" charset="-122"/>
                 <a:cs typeface="阿里巴巴普惠体 2.0 65 Medium" panose="00020600040101010101" pitchFamily="18" charset="-122"/>
               </a:rPr>
-              <a:t>Choose Once</a:t>
+              <a:t>Layers</a:t>
             </a:r>
             <a:endParaRPr lang="zh-CN" altLang="en-US" sz="2400" dirty="0">
               <a:latin typeface="思源黑体 CN Bold" panose="020B0800000000000000" pitchFamily="34" charset="-122"/>
@@ -6670,7 +6670,7 @@
                 <a:ea typeface="思源黑体 CN Bold" panose="020B0800000000000000" pitchFamily="34" charset="-122"/>
                 <a:cs typeface="Microsoft YaHei UI"/>
               </a:rPr>
-              <a:t>Less wiring, more output</a:t>
+              <a:t>Stack sampler-level and model-level methods</a:t>
             </a:r>
           </a:p>
         </ns0:txBody>
@@ -6884,7 +6884,7 @@
                 <a:ea typeface="Microsoft YaHei UI"/>
                 <a:cs typeface="Microsoft YaHei UI"/>
               </a:rPr>
-              <a:t>Less compute, quality intact</a:t>
+              <a:t>Sampler + model speedups</a:t>
             </a:r>
             <a:endParaRPr sz="1600" b="1" dirty="0">
               <a:solidFill>

--- a/docs/ComfyUI-AccelDiff_Promo_EN.pptx
+++ b/docs/ComfyUI-AccelDiff_Promo_EN.pptx
@@ -631,45 +631,45 @@
 </file>
 
 <file path=ppt/slides/slide1.xml><?xml version="1.0" encoding="utf-8"?>
-<ns0:sld xmlns:a="http://schemas.openxmlformats.org/drawingml/2006/main" xmlns:ns0="http://schemas.openxmlformats.org/presentationml/2006/main" xmlns:ns2="http://schemas.microsoft.com/office/drawing/2014/main" xmlns:ns3="http://schemas.openxmlformats.org/officeDocument/2006/relationships" xmlns:ns4="http://schemas.microsoft.com/office/drawing/2010/main" xmlns:ns5="http://schemas.microsoft.com/office/powerpoint/2010/main">
-  <ns0:cSld>
-    <ns0:bg>
-      <ns0:bgPr>
+<p:sld xmlns:a="http://schemas.openxmlformats.org/drawingml/2006/main" xmlns:r="http://schemas.openxmlformats.org/officeDocument/2006/relationships" xmlns:p="http://schemas.openxmlformats.org/presentationml/2006/main">
+  <p:cSld>
+    <p:bg>
+      <p:bgPr>
         <a:solidFill>
           <a:schemeClr val="tx1"/>
         </a:solidFill>
         <a:effectLst/>
-      </ns0:bgPr>
-    </ns0:bg>
-    <ns0:spTree>
-      <ns0:nvGrpSpPr>
-        <ns0:cNvPr id="1" name=""/>
-        <ns0:cNvGrpSpPr/>
-        <ns0:nvPr/>
-      </ns0:nvGrpSpPr>
-      <ns0:grpSpPr>
+      </p:bgPr>
+    </p:bg>
+    <p:spTree>
+      <p:nvGrpSpPr>
+        <p:cNvPr id="1" name=""/>
+        <p:cNvGrpSpPr/>
+        <p:nvPr/>
+      </p:nvGrpSpPr>
+      <p:grpSpPr>
         <a:xfrm>
           <a:off x="0" y="0"/>
           <a:ext cx="0" cy="0"/>
           <a:chOff x="0" y="0"/>
           <a:chExt cx="0" cy="0"/>
         </a:xfrm>
-      </ns0:grpSpPr>
-      <ns0:sp>
-        <ns0:nvSpPr>
-          <ns0:cNvPr id="151" name="椭圆 150">
-            <a:extLst>
-              <a:ext uri="{FF2B5EF4-FFF2-40B4-BE49-F238E27FC236}">
-                <ns2:creationId id="{4062C22E-2585-6F25-7C6A-5BE47EE79BF0}"/>
-              </a:ext>
-            </a:extLst>
-          </ns0:cNvPr>
-          <ns0:cNvSpPr>
-            <a:spLocks noGrp="1"/>
-          </ns0:cNvSpPr>
-          <ns0:nvPr/>
-        </ns0:nvSpPr>
-        <ns0:spPr>
+      </p:grpSpPr>
+      <p:sp>
+        <p:nvSpPr>
+          <p:cNvPr id="151" name="椭圆 150">
+            <a:extLst>
+              <a:ext uri="{FF2B5EF4-FFF2-40B4-BE49-F238E27FC236}">
+                <a16:creationId xmlns:a16="http://schemas.microsoft.com/office/drawing/2014/main" id="{4062C22E-2585-6F25-7C6A-5BE47EE79BF0}"/>
+              </a:ext>
+            </a:extLst>
+          </p:cNvPr>
+          <p:cNvSpPr>
+            <a:spLocks noGrp="1"/>
+          </p:cNvSpPr>
+          <p:nvPr/>
+        </p:nvSpPr>
+        <p:spPr>
           <a:xfrm>
             <a:off x="10751820" y="1356014"/>
             <a:ext cx="5334000" cy="4000500"/>
@@ -696,30 +696,30 @@
             <a:noFill/>
             <a:prstDash val="solid"/>
           </a:ln>
-        </ns0:spPr>
-        <ns0:txBody>
+        </p:spPr>
+        <p:txBody>
           <a:bodyPr/>
           <a:lstStyle/>
           <a:p>
             <a:endParaRPr lang="zh-CN" altLang="en-US"/>
           </a:p>
-        </ns0:txBody>
-      </ns0:sp>
-      <ns0:sp>
-        <ns0:nvSpPr>
-          <ns0:cNvPr id="150" name="椭圆 149">
-            <a:extLst>
-              <a:ext uri="{FF2B5EF4-FFF2-40B4-BE49-F238E27FC236}">
-                <ns2:creationId id="{D714E1A8-4251-3D05-ED31-0D84487A9A8B}"/>
-              </a:ext>
-            </a:extLst>
-          </ns0:cNvPr>
-          <ns0:cNvSpPr>
-            <a:spLocks noGrp="1"/>
-          </ns0:cNvSpPr>
-          <ns0:nvPr/>
-        </ns0:nvSpPr>
-        <ns0:spPr>
+        </p:txBody>
+      </p:sp>
+      <p:sp>
+        <p:nvSpPr>
+          <p:cNvPr id="150" name="椭圆 149">
+            <a:extLst>
+              <a:ext uri="{FF2B5EF4-FFF2-40B4-BE49-F238E27FC236}">
+                <a16:creationId xmlns:a16="http://schemas.microsoft.com/office/drawing/2014/main" id="{D714E1A8-4251-3D05-ED31-0D84487A9A8B}"/>
+              </a:ext>
+            </a:extLst>
+          </p:cNvPr>
+          <p:cNvSpPr>
+            <a:spLocks noGrp="1"/>
+          </p:cNvSpPr>
+          <p:nvPr/>
+        </p:nvSpPr>
+        <p:spPr>
           <a:xfrm>
             <a:off x="-2562225" y="-628650"/>
             <a:ext cx="5905500" cy="4000500"/>
@@ -746,30 +746,30 @@
             <a:noFill/>
             <a:prstDash val="solid"/>
           </a:ln>
-        </ns0:spPr>
-        <ns0:txBody>
+        </p:spPr>
+        <p:txBody>
           <a:bodyPr/>
           <a:lstStyle/>
           <a:p>
             <a:endParaRPr lang="zh-CN" altLang="en-US"/>
           </a:p>
-        </ns0:txBody>
-      </ns0:sp>
-      <ns0:sp>
-        <ns0:nvSpPr>
-          <ns0:cNvPr id="4" name="矩形 3">
-            <a:extLst>
-              <a:ext uri="{FF2B5EF4-FFF2-40B4-BE49-F238E27FC236}">
-                <ns2:creationId id="{645B0281-77AC-B19A-BA73-82E2264809D2}"/>
-              </a:ext>
-            </a:extLst>
-          </ns0:cNvPr>
-          <ns0:cNvSpPr>
-            <a:spLocks noGrp="1"/>
-          </ns0:cNvSpPr>
-          <ns0:nvPr/>
-        </ns0:nvSpPr>
-        <ns0:spPr>
+        </p:txBody>
+      </p:sp>
+      <p:sp>
+        <p:nvSpPr>
+          <p:cNvPr id="4" name="矩形 3">
+            <a:extLst>
+              <a:ext uri="{FF2B5EF4-FFF2-40B4-BE49-F238E27FC236}">
+                <a16:creationId xmlns:a16="http://schemas.microsoft.com/office/drawing/2014/main" id="{645B0281-77AC-B19A-BA73-82E2264809D2}"/>
+              </a:ext>
+            </a:extLst>
+          </p:cNvPr>
+          <p:cNvSpPr>
+            <a:spLocks noGrp="1"/>
+          </p:cNvSpPr>
+          <p:nvPr/>
+        </p:nvSpPr>
+        <p:spPr>
           <a:xfrm>
             <a:off x="2371725" y="409575"/>
             <a:ext cx="2381250" cy="685800"/>
@@ -782,8 +782,8 @@
             <a:noFill/>
             <a:prstDash val="solid"/>
           </a:ln>
-        </ns0:spPr>
-        <ns0:txBody>
+        </p:spPr>
+        <p:txBody>
           <a:bodyPr wrap="square" lIns="19050" tIns="0" rIns="19050" bIns="0" anchor="ctr">
             <a:normAutofit/>
           </a:bodyPr>
@@ -808,23 +808,23 @@
               <a:cs typeface="Microsoft YaHei UI"/>
             </a:endParaRPr>
           </a:p>
-        </ns0:txBody>
-      </ns0:sp>
-      <ns0:sp>
-        <ns0:nvSpPr>
-          <ns0:cNvPr id="5" name="矩形 4">
-            <a:extLst>
-              <a:ext uri="{FF2B5EF4-FFF2-40B4-BE49-F238E27FC236}">
-                <ns2:creationId id="{2308BDE2-C0AD-8100-CEFA-B7A795D890EF}"/>
-              </a:ext>
-            </a:extLst>
-          </ns0:cNvPr>
-          <ns0:cNvSpPr>
-            <a:spLocks noGrp="1"/>
-          </ns0:cNvSpPr>
-          <ns0:nvPr/>
-        </ns0:nvSpPr>
-        <ns0:spPr>
+        </p:txBody>
+      </p:sp>
+      <p:sp>
+        <p:nvSpPr>
+          <p:cNvPr id="5" name="矩形 4">
+            <a:extLst>
+              <a:ext uri="{FF2B5EF4-FFF2-40B4-BE49-F238E27FC236}">
+                <a16:creationId xmlns:a16="http://schemas.microsoft.com/office/drawing/2014/main" id="{2308BDE2-C0AD-8100-CEFA-B7A795D890EF}"/>
+              </a:ext>
+            </a:extLst>
+          </p:cNvPr>
+          <p:cNvSpPr>
+            <a:spLocks noGrp="1"/>
+          </p:cNvSpPr>
+          <p:nvPr/>
+        </p:nvSpPr>
+        <p:spPr>
           <a:xfrm>
             <a:off x="4743450" y="409575"/>
             <a:ext cx="5619750" cy="685800"/>
@@ -837,8 +837,8 @@
             <a:noFill/>
             <a:prstDash val="solid"/>
           </a:ln>
-        </ns0:spPr>
-        <ns0:txBody>
+        </p:spPr>
+        <p:txBody>
           <a:bodyPr wrap="square" lIns="19050" tIns="0" rIns="19050" bIns="0" anchor="ctr">
             <a:normAutofit/>
           </a:bodyPr>
@@ -863,31 +863,31 @@
               <a:cs typeface="Microsoft YaHei UI"/>
             </a:endParaRPr>
           </a:p>
-        </ns0:txBody>
-      </ns0:sp>
-      <ns0:sp>
-        <ns0:nvSpPr>
-          <ns0:cNvPr id="6" name="文本框 5">
-            <a:extLst>
-              <a:ext uri="{FF2B5EF4-FFF2-40B4-BE49-F238E27FC236}">
-                <ns2:creationId id="{76BF0AF1-48A9-A269-9C9D-69E9B487715A}"/>
-              </a:ext>
-            </a:extLst>
-          </ns0:cNvPr>
-          <ns0:cNvSpPr txBox="1"/>
-          <ns0:nvPr/>
-        </ns0:nvSpPr>
-        <ns0:spPr>
-          <a:xfrm>
-            <a:off x="2288165" y="335363"/>
+        </p:txBody>
+      </p:sp>
+      <p:sp>
+        <p:nvSpPr>
+          <p:cNvPr id="6" name="文本框 5">
+            <a:extLst>
+              <a:ext uri="{FF2B5EF4-FFF2-40B4-BE49-F238E27FC236}">
+                <a16:creationId xmlns:a16="http://schemas.microsoft.com/office/drawing/2014/main" id="{76BF0AF1-48A9-A269-9C9D-69E9B487715A}"/>
+              </a:ext>
+            </a:extLst>
+          </p:cNvPr>
+          <p:cNvSpPr txBox="1"/>
+          <p:nvPr/>
+        </p:nvSpPr>
+        <p:spPr>
+          <a:xfrm>
+            <a:off x="4123286" y="254713"/>
             <a:ext cx="9349220" cy="761747"/>
           </a:xfrm>
           <a:prstGeom prst="rect">
             <a:avLst/>
           </a:prstGeom>
           <a:noFill/>
-        </ns0:spPr>
-        <ns0:txBody>
+        </p:spPr>
+        <p:txBody>
           <a:bodyPr wrap="square" rtlCol="0">
             <a:spAutoFit/>
           </a:bodyPr>
@@ -948,21 +948,21 @@
               <a:t> Layers</a:t>
             </a:r>
           </a:p>
-        </ns0:txBody>
-      </ns0:sp>
-      <ns0:sp>
-        <ns0:nvSpPr>
-          <ns0:cNvPr id="10" name="文本框 9">
-            <a:extLst>
-              <a:ext uri="{FF2B5EF4-FFF2-40B4-BE49-F238E27FC236}">
-                <ns2:creationId id="{056D02AA-218E-AE21-3213-62441626FFF6}"/>
-              </a:ext>
-            </a:extLst>
-          </ns0:cNvPr>
-          <ns0:cNvSpPr txBox="1"/>
-          <ns0:nvPr/>
-        </ns0:nvSpPr>
-        <ns0:spPr>
+        </p:txBody>
+      </p:sp>
+      <p:sp>
+        <p:nvSpPr>
+          <p:cNvPr id="10" name="文本框 9">
+            <a:extLst>
+              <a:ext uri="{FF2B5EF4-FFF2-40B4-BE49-F238E27FC236}">
+                <a16:creationId xmlns:a16="http://schemas.microsoft.com/office/drawing/2014/main" id="{056D02AA-218E-AE21-3213-62441626FFF6}"/>
+              </a:ext>
+            </a:extLst>
+          </p:cNvPr>
+          <p:cNvSpPr txBox="1"/>
+          <p:nvPr/>
+        </p:nvSpPr>
+        <p:spPr>
           <a:xfrm>
             <a:off x="3796145" y="1095375"/>
             <a:ext cx="7315200" cy="369332"/>
@@ -971,8 +971,8 @@
             <a:avLst/>
           </a:prstGeom>
           <a:noFill/>
-        </ns0:spPr>
-        <ns0:txBody>
+        </p:spPr>
+        <p:txBody>
           <a:bodyPr wrap="square">
             <a:spAutoFit/>
           </a:bodyPr>
@@ -993,8 +993,8 @@
                 <a:solidFill>
                   <a:srgbClr val="C2C7D0"/>
                 </a:solidFill>
-                <a:latin typeface="Microsoft YaHei UI"/>
-                <a:ea typeface="Microsoft YaHei UI"/>
+                <a:latin typeface="思源黑体 CN Bold" panose="020B0800000000000000" pitchFamily="34" charset="-122"/>
+                <a:ea typeface="思源黑体 CN Bold" panose="020B0800000000000000" pitchFamily="34" charset="-122"/>
                 <a:cs typeface="Microsoft YaHei UI"/>
               </a:rPr>
               <a:t>Unified </a:t>
@@ -1004,8 +1004,8 @@
                 <a:solidFill>
                   <a:srgbClr val="C2C7D0"/>
                 </a:solidFill>
-                <a:latin typeface="Microsoft YaHei UI"/>
-                <a:ea typeface="Microsoft YaHei UI"/>
+                <a:latin typeface="思源黑体 CN Bold" panose="020B0800000000000000" pitchFamily="34" charset="-122"/>
+                <a:ea typeface="思源黑体 CN Bold" panose="020B0800000000000000" pitchFamily="34" charset="-122"/>
                 <a:cs typeface="Microsoft YaHei UI"/>
               </a:rPr>
               <a:t>ComfyUI</a:t>
@@ -1015,8 +1015,8 @@
                 <a:solidFill>
                   <a:srgbClr val="C2C7D0"/>
                 </a:solidFill>
-                <a:latin typeface="Microsoft YaHei UI"/>
-                <a:ea typeface="Microsoft YaHei UI"/>
+                <a:latin typeface="思源黑体 CN Bold" panose="020B0800000000000000" pitchFamily="34" charset="-122"/>
+                <a:ea typeface="思源黑体 CN Bold" panose="020B0800000000000000" pitchFamily="34" charset="-122"/>
                 <a:cs typeface="Microsoft YaHei UI"/>
               </a:rPr>
               <a:t> </a:t>
@@ -1026,30 +1026,30 @@
                 <a:solidFill>
                   <a:srgbClr val="C2C7D0"/>
                 </a:solidFill>
-                <a:latin typeface="Microsoft YaHei UI"/>
-                <a:ea typeface="Microsoft YaHei UI"/>
+                <a:latin typeface="思源黑体 CN Bold" panose="020B0800000000000000" pitchFamily="34" charset="-122"/>
+                <a:ea typeface="思源黑体 CN Bold" panose="020B0800000000000000" pitchFamily="34" charset="-122"/>
                 <a:cs typeface="Microsoft YaHei UI"/>
               </a:rPr>
               <a:t> acceleration stack</a:t>
             </a:r>
           </a:p>
-        </ns0:txBody>
-      </ns0:sp>
-      <ns0:sp>
-        <ns0:nvSpPr>
-          <ns0:cNvPr id="17" name="矩形 16">
-            <a:extLst>
-              <a:ext uri="{FF2B5EF4-FFF2-40B4-BE49-F238E27FC236}">
-                <ns2:creationId id="{B98FC153-B696-C45B-BF44-93C9B71E4376}"/>
-              </a:ext>
-            </a:extLst>
-          </ns0:cNvPr>
-          <ns0:cNvSpPr>
-            <a:spLocks noGrp="1"/>
-          </ns0:cNvSpPr>
-          <ns0:nvPr/>
-        </ns0:nvSpPr>
-        <ns0:spPr>
+        </p:txBody>
+      </p:sp>
+      <p:sp>
+        <p:nvSpPr>
+          <p:cNvPr id="17" name="矩形 16">
+            <a:extLst>
+              <a:ext uri="{FF2B5EF4-FFF2-40B4-BE49-F238E27FC236}">
+                <a16:creationId xmlns:a16="http://schemas.microsoft.com/office/drawing/2014/main" id="{B98FC153-B696-C45B-BF44-93C9B71E4376}"/>
+              </a:ext>
+            </a:extLst>
+          </p:cNvPr>
+          <p:cNvSpPr>
+            <a:spLocks noGrp="1"/>
+          </p:cNvSpPr>
+          <p:nvPr/>
+        </p:nvSpPr>
+        <p:spPr>
           <a:xfrm>
             <a:off x="8589645" y="2126441"/>
             <a:ext cx="200025" cy="200025"/>
@@ -1062,8 +1062,8 @@
             <a:noFill/>
             <a:prstDash val="solid"/>
           </a:ln>
-        </ns0:spPr>
-        <ns0:txBody>
+        </p:spPr>
+        <p:txBody>
           <a:bodyPr wrap="square" lIns="0" tIns="0" rIns="0" bIns="0" anchor="ctr">
             <a:normAutofit/>
           </a:bodyPr>
@@ -1088,23 +1088,23 @@
               <a:cs typeface="Segoe UI Symbol"/>
             </a:endParaRPr>
           </a:p>
-        </ns0:txBody>
-      </ns0:sp>
-      <ns0:sp>
-        <ns0:nvSpPr>
-          <ns0:cNvPr id="23" name="矩形 22">
-            <a:extLst>
-              <a:ext uri="{FF2B5EF4-FFF2-40B4-BE49-F238E27FC236}">
-                <ns2:creationId id="{2BD2B32F-EB55-952B-2BA1-C16C85FDC689}"/>
-              </a:ext>
-            </a:extLst>
-          </ns0:cNvPr>
-          <ns0:cNvSpPr>
-            <a:spLocks noGrp="1"/>
-          </ns0:cNvSpPr>
-          <ns0:nvPr/>
-        </ns0:nvSpPr>
-        <ns0:spPr>
+        </p:txBody>
+      </p:sp>
+      <p:sp>
+        <p:nvSpPr>
+          <p:cNvPr id="23" name="矩形 22">
+            <a:extLst>
+              <a:ext uri="{FF2B5EF4-FFF2-40B4-BE49-F238E27FC236}">
+                <a16:creationId xmlns:a16="http://schemas.microsoft.com/office/drawing/2014/main" id="{2BD2B32F-EB55-952B-2BA1-C16C85FDC689}"/>
+              </a:ext>
+            </a:extLst>
+          </p:cNvPr>
+          <p:cNvSpPr>
+            <a:spLocks noGrp="1"/>
+          </p:cNvSpPr>
+          <p:nvPr/>
+        </p:nvSpPr>
+        <p:spPr>
           <a:xfrm>
             <a:off x="2628900" y="1743075"/>
             <a:ext cx="2476500" cy="285750"/>
@@ -1117,8 +1117,8 @@
             <a:noFill/>
             <a:prstDash val="solid"/>
           </a:ln>
-        </ns0:spPr>
-        <ns0:txBody>
+        </p:spPr>
+        <p:txBody>
           <a:bodyPr wrap="square" lIns="19050" tIns="0" rIns="19050" bIns="0" anchor="ctr">
             <a:normAutofit/>
           </a:bodyPr>
@@ -1143,61 +1143,61 @@
               <a:cs typeface="Microsoft YaHei UI"/>
             </a:endParaRPr>
           </a:p>
-        </ns0:txBody>
-      </ns0:sp>
-      <ns0:grpSp>
-        <ns0:nvGrpSpPr>
-          <ns0:cNvPr id="26" name="组合 25">
-            <a:extLst>
-              <a:ext uri="{FF2B5EF4-FFF2-40B4-BE49-F238E27FC236}">
-                <ns2:creationId id="{A080DA7C-4F5E-BC1C-EB7F-221D31193FDC}"/>
-              </a:ext>
-            </a:extLst>
-          </ns0:cNvPr>
-          <ns0:cNvGrpSpPr/>
-          <ns0:nvPr/>
-        </ns0:nvGrpSpPr>
-        <ns0:grpSpPr>
-          <a:xfrm>
-            <a:off x="2242185" y="1728847"/>
+        </p:txBody>
+      </p:sp>
+      <p:grpSp>
+        <p:nvGrpSpPr>
+          <p:cNvPr id="26" name="组合 25">
+            <a:extLst>
+              <a:ext uri="{FF2B5EF4-FFF2-40B4-BE49-F238E27FC236}">
+                <a16:creationId xmlns:a16="http://schemas.microsoft.com/office/drawing/2014/main" id="{A080DA7C-4F5E-BC1C-EB7F-221D31193FDC}"/>
+              </a:ext>
+            </a:extLst>
+          </p:cNvPr>
+          <p:cNvGrpSpPr/>
+          <p:nvPr/>
+        </p:nvGrpSpPr>
+        <p:grpSpPr>
+          <a:xfrm>
+            <a:off x="2242185" y="1534881"/>
             <a:ext cx="3159442" cy="369332"/>
             <a:chOff x="2242185" y="1728847"/>
             <a:chExt cx="3159442" cy="369332"/>
           </a:xfrm>
-        </ns0:grpSpPr>
-        <ns0:grpSp>
-          <ns0:nvGrpSpPr>
-            <ns0:cNvPr id="22" name="组合 21">
+        </p:grpSpPr>
+        <p:grpSp>
+          <p:nvGrpSpPr>
+            <p:cNvPr id="22" name="组合 21">
               <a:extLst>
                 <a:ext uri="{FF2B5EF4-FFF2-40B4-BE49-F238E27FC236}">
-                  <ns2:creationId id="{2862E0C9-BD73-2AC0-3DA0-D1E4D069AF3B}"/>
+                  <a16:creationId xmlns:a16="http://schemas.microsoft.com/office/drawing/2014/main" id="{2862E0C9-BD73-2AC0-3DA0-D1E4D069AF3B}"/>
                 </a:ext>
               </a:extLst>
-            </ns0:cNvPr>
-            <ns0:cNvGrpSpPr/>
-            <ns0:nvPr/>
-          </ns0:nvGrpSpPr>
-          <ns0:grpSpPr>
+            </p:cNvPr>
+            <p:cNvGrpSpPr/>
+            <p:nvPr/>
+          </p:nvGrpSpPr>
+          <p:grpSpPr>
             <a:xfrm>
               <a:off x="2242185" y="1728847"/>
               <a:ext cx="259080" cy="369332"/>
               <a:chOff x="7185660" y="3359281"/>
               <a:chExt cx="259080" cy="369332"/>
             </a:xfrm>
-          </ns0:grpSpPr>
-          <ns0:sp>
-            <ns0:nvSpPr>
-              <ns0:cNvPr id="20" name="椭圆 19">
+          </p:grpSpPr>
+          <p:sp>
+            <p:nvSpPr>
+              <p:cNvPr id="20" name="椭圆 19">
                 <a:extLst>
                   <a:ext uri="{FF2B5EF4-FFF2-40B4-BE49-F238E27FC236}">
-                    <ns2:creationId id="{749CB227-318B-5447-6A53-DF0B23F570D8}"/>
+                    <a16:creationId xmlns:a16="http://schemas.microsoft.com/office/drawing/2014/main" id="{749CB227-318B-5447-6A53-DF0B23F570D8}"/>
                   </a:ext>
                 </a:extLst>
-              </ns0:cNvPr>
-              <ns0:cNvSpPr/>
-              <ns0:nvPr/>
-            </ns0:nvSpPr>
-            <ns0:spPr>
+              </p:cNvPr>
+              <p:cNvSpPr/>
+              <p:nvPr/>
+            </p:nvSpPr>
+            <p:spPr>
               <a:xfrm>
                 <a:off x="7185660" y="3414407"/>
                 <a:ext cx="259080" cy="259080"/>
@@ -1213,8 +1213,8 @@
                   <a:srgbClr val="C00000"/>
                 </a:solidFill>
               </a:ln>
-            </ns0:spPr>
-            <ns0:style>
+            </p:spPr>
+            <p:style>
               <a:lnRef idx="2">
                 <a:schemeClr val="accent1">
                   <a:shade val="15000"/>
@@ -1229,29 +1229,29 @@
               <a:fontRef idx="minor">
                 <a:schemeClr val="lt1"/>
               </a:fontRef>
-            </ns0:style>
-            <ns0:txBody>
+            </p:style>
+            <p:txBody>
               <a:bodyPr rtlCol="0" anchor="ctr"/>
               <a:lstStyle/>
               <a:p>
                 <a:pPr algn="ctr"/>
                 <a:endParaRPr lang="zh-CN" altLang="en-US"/>
               </a:p>
-            </ns0:txBody>
-          </ns0:sp>
-          <ns0:sp>
-            <ns0:nvSpPr>
-              <ns0:cNvPr id="19" name="文本框 18">
+            </p:txBody>
+          </p:sp>
+          <p:sp>
+            <p:nvSpPr>
+              <p:cNvPr id="19" name="文本框 18">
                 <a:extLst>
                   <a:ext uri="{FF2B5EF4-FFF2-40B4-BE49-F238E27FC236}">
-                    <ns2:creationId id="{5557D8ED-3A97-8060-DA1E-D17F987F5BD7}"/>
+                    <a16:creationId xmlns:a16="http://schemas.microsoft.com/office/drawing/2014/main" id="{5557D8ED-3A97-8060-DA1E-D17F987F5BD7}"/>
                   </a:ext>
                 </a:extLst>
-              </ns0:cNvPr>
-              <ns0:cNvSpPr txBox="1"/>
-              <ns0:nvPr/>
-            </ns0:nvSpPr>
-            <ns0:spPr>
+              </p:cNvPr>
+              <p:cNvSpPr txBox="1"/>
+              <p:nvPr/>
+            </p:nvSpPr>
+            <p:spPr>
               <a:xfrm>
                 <a:off x="7215187" y="3359281"/>
                 <a:ext cx="200026" cy="369332"/>
@@ -1260,8 +1260,8 @@
                 <a:avLst/>
               </a:prstGeom>
               <a:noFill/>
-            </ns0:spPr>
-            <ns0:txBody>
+            </p:spPr>
+            <p:txBody>
               <a:bodyPr wrap="square">
                 <a:spAutoFit/>
               </a:bodyPr>
@@ -1289,22 +1289,22 @@
                   <a:t>✓</a:t>
                 </a:r>
               </a:p>
-            </ns0:txBody>
-          </ns0:sp>
-        </ns0:grpSp>
-        <ns0:sp>
-          <ns0:nvSpPr>
-            <ns0:cNvPr id="25" name="文本框 24">
+            </p:txBody>
+          </p:sp>
+        </p:grpSp>
+        <p:sp>
+          <p:nvSpPr>
+            <p:cNvPr id="25" name="文本框 24">
               <a:extLst>
                 <a:ext uri="{FF2B5EF4-FFF2-40B4-BE49-F238E27FC236}">
-                  <ns2:creationId id="{04A73CEB-D1A1-761F-EAF6-B7C371787E91}"/>
+                  <a16:creationId xmlns:a16="http://schemas.microsoft.com/office/drawing/2014/main" id="{04A73CEB-D1A1-761F-EAF6-B7C371787E91}"/>
                 </a:ext>
               </a:extLst>
-            </ns0:cNvPr>
-            <ns0:cNvSpPr txBox="1"/>
-            <ns0:nvPr/>
-          </ns0:nvSpPr>
-          <ns0:spPr>
+            </p:cNvPr>
+            <p:cNvSpPr txBox="1"/>
+            <p:nvPr/>
+          </p:nvSpPr>
+          <p:spPr>
             <a:xfrm>
               <a:off x="2628900" y="1728847"/>
               <a:ext cx="2772727" cy="369332"/>
@@ -1313,8 +1313,8 @@
               <a:avLst/>
             </a:prstGeom>
             <a:noFill/>
-          </ns0:spPr>
-          <ns0:txBody>
+          </p:spPr>
+          <p:txBody>
             <a:bodyPr wrap="square">
               <a:spAutoFit/>
             </a:bodyPr>
@@ -1342,62 +1342,62 @@
                 <a:t>Pick sampler + model</a:t>
               </a:r>
             </a:p>
-          </ns0:txBody>
-        </ns0:sp>
-      </ns0:grpSp>
-      <ns0:grpSp>
-        <ns0:nvGrpSpPr>
-          <ns0:cNvPr id="34" name="组合 33">
-            <a:extLst>
-              <a:ext uri="{FF2B5EF4-FFF2-40B4-BE49-F238E27FC236}">
-                <ns2:creationId id="{894EE88A-592A-497F-E7F8-83C01C9C4EFF}"/>
-              </a:ext>
-            </a:extLst>
-          </ns0:cNvPr>
-          <ns0:cNvGrpSpPr/>
-          <ns0:nvPr/>
-        </ns0:nvGrpSpPr>
-        <ns0:grpSpPr>
-          <a:xfrm>
-            <a:off x="5530215" y="1728847"/>
-            <a:ext cx="3159442" cy="369332"/>
+          </p:txBody>
+        </p:sp>
+      </p:grpSp>
+      <p:grpSp>
+        <p:nvGrpSpPr>
+          <p:cNvPr id="34" name="组合 33">
+            <a:extLst>
+              <a:ext uri="{FF2B5EF4-FFF2-40B4-BE49-F238E27FC236}">
+                <a16:creationId xmlns:a16="http://schemas.microsoft.com/office/drawing/2014/main" id="{894EE88A-592A-497F-E7F8-83C01C9C4EFF}"/>
+              </a:ext>
+            </a:extLst>
+          </p:cNvPr>
+          <p:cNvGrpSpPr/>
+          <p:nvPr/>
+        </p:nvGrpSpPr>
+        <p:grpSpPr>
+          <a:xfrm>
+            <a:off x="5908988" y="1534881"/>
+            <a:ext cx="2650808" cy="398778"/>
             <a:chOff x="2242185" y="1728847"/>
-            <a:chExt cx="3159442" cy="369332"/>
-          </a:xfrm>
-        </ns0:grpSpPr>
-        <ns0:grpSp>
-          <ns0:nvGrpSpPr>
-            <ns0:cNvPr id="35" name="组合 34">
+            <a:chExt cx="2650808" cy="398778"/>
+          </a:xfrm>
+        </p:grpSpPr>
+        <p:grpSp>
+          <p:nvGrpSpPr>
+            <p:cNvPr id="35" name="组合 34">
               <a:extLst>
                 <a:ext uri="{FF2B5EF4-FFF2-40B4-BE49-F238E27FC236}">
-                  <ns2:creationId id="{FF02E26D-9687-5A80-E977-2CB090323A16}"/>
+                  <a16:creationId xmlns:a16="http://schemas.microsoft.com/office/drawing/2014/main" id="{FF02E26D-9687-5A80-E977-2CB090323A16}"/>
                 </a:ext>
               </a:extLst>
-            </ns0:cNvPr>
-            <ns0:cNvGrpSpPr/>
-            <ns0:nvPr/>
-          </ns0:nvGrpSpPr>
-          <ns0:grpSpPr>
+            </p:cNvPr>
+            <p:cNvGrpSpPr/>
+            <p:nvPr/>
+          </p:nvGrpSpPr>
+          <p:grpSpPr>
             <a:xfrm>
               <a:off x="2242185" y="1728847"/>
               <a:ext cx="259080" cy="369332"/>
               <a:chOff x="7185660" y="3359281"/>
               <a:chExt cx="259080" cy="369332"/>
             </a:xfrm>
-          </ns0:grpSpPr>
-          <ns0:sp>
-            <ns0:nvSpPr>
-              <ns0:cNvPr id="37" name="椭圆 36">
+          </p:grpSpPr>
+          <p:sp>
+            <p:nvSpPr>
+              <p:cNvPr id="37" name="椭圆 36">
                 <a:extLst>
                   <a:ext uri="{FF2B5EF4-FFF2-40B4-BE49-F238E27FC236}">
-                    <ns2:creationId id="{0C66DE2C-F219-C5A0-79B3-0BA02C537728}"/>
+                    <a16:creationId xmlns:a16="http://schemas.microsoft.com/office/drawing/2014/main" id="{0C66DE2C-F219-C5A0-79B3-0BA02C537728}"/>
                   </a:ext>
                 </a:extLst>
-              </ns0:cNvPr>
-              <ns0:cNvSpPr/>
-              <ns0:nvPr/>
-            </ns0:nvSpPr>
-            <ns0:spPr>
+              </p:cNvPr>
+              <p:cNvSpPr/>
+              <p:nvPr/>
+            </p:nvSpPr>
+            <p:spPr>
               <a:xfrm>
                 <a:off x="7185660" y="3414407"/>
                 <a:ext cx="259080" cy="259080"/>
@@ -1413,8 +1413,8 @@
                   <a:srgbClr val="C00000"/>
                 </a:solidFill>
               </a:ln>
-            </ns0:spPr>
-            <ns0:style>
+            </p:spPr>
+            <p:style>
               <a:lnRef idx="2">
                 <a:schemeClr val="accent1">
                   <a:shade val="15000"/>
@@ -1429,29 +1429,29 @@
               <a:fontRef idx="minor">
                 <a:schemeClr val="lt1"/>
               </a:fontRef>
-            </ns0:style>
-            <ns0:txBody>
+            </p:style>
+            <p:txBody>
               <a:bodyPr rtlCol="0" anchor="ctr"/>
               <a:lstStyle/>
               <a:p>
                 <a:pPr algn="ctr"/>
                 <a:endParaRPr lang="zh-CN" altLang="en-US"/>
               </a:p>
-            </ns0:txBody>
-          </ns0:sp>
-          <ns0:sp>
-            <ns0:nvSpPr>
-              <ns0:cNvPr id="38" name="文本框 37">
+            </p:txBody>
+          </p:sp>
+          <p:sp>
+            <p:nvSpPr>
+              <p:cNvPr id="38" name="文本框 37">
                 <a:extLst>
                   <a:ext uri="{FF2B5EF4-FFF2-40B4-BE49-F238E27FC236}">
-                    <ns2:creationId id="{F64771DB-541F-94FA-5B37-3C37E19D9BEE}"/>
+                    <a16:creationId xmlns:a16="http://schemas.microsoft.com/office/drawing/2014/main" id="{F64771DB-541F-94FA-5B37-3C37E19D9BEE}"/>
                   </a:ext>
                 </a:extLst>
-              </ns0:cNvPr>
-              <ns0:cNvSpPr txBox="1"/>
-              <ns0:nvPr/>
-            </ns0:nvSpPr>
-            <ns0:spPr>
+              </p:cNvPr>
+              <p:cNvSpPr txBox="1"/>
+              <p:nvPr/>
+            </p:nvSpPr>
+            <p:spPr>
               <a:xfrm>
                 <a:off x="7215187" y="3359281"/>
                 <a:ext cx="200026" cy="369332"/>
@@ -1460,8 +1460,8 @@
                 <a:avLst/>
               </a:prstGeom>
               <a:noFill/>
-            </ns0:spPr>
-            <ns0:txBody>
+            </p:spPr>
+            <p:txBody>
               <a:bodyPr wrap="square">
                 <a:spAutoFit/>
               </a:bodyPr>
@@ -1489,32 +1489,32 @@
                   <a:t>✓</a:t>
                 </a:r>
               </a:p>
-            </ns0:txBody>
-          </ns0:sp>
-        </ns0:grpSp>
-        <ns0:sp>
-          <ns0:nvSpPr>
-            <ns0:cNvPr id="36" name="文本框 35">
+            </p:txBody>
+          </p:sp>
+        </p:grpSp>
+        <p:sp>
+          <p:nvSpPr>
+            <p:cNvPr id="36" name="文本框 35">
               <a:extLst>
                 <a:ext uri="{FF2B5EF4-FFF2-40B4-BE49-F238E27FC236}">
-                  <ns2:creationId id="{BB8AD044-E596-226E-4F5E-FF98F3CD4BBF}"/>
+                  <a16:creationId xmlns:a16="http://schemas.microsoft.com/office/drawing/2014/main" id="{BB8AD044-E596-226E-4F5E-FF98F3CD4BBF}"/>
                 </a:ext>
               </a:extLst>
-            </ns0:cNvPr>
-            <ns0:cNvSpPr txBox="1"/>
-            <ns0:nvPr/>
-          </ns0:nvSpPr>
-          <ns0:spPr>
+            </p:cNvPr>
+            <p:cNvSpPr txBox="1"/>
+            <p:nvPr/>
+          </p:nvSpPr>
+          <p:spPr>
             <a:xfrm>
-              <a:off x="2628900" y="1728847"/>
-              <a:ext cx="2772727" cy="369332"/>
+              <a:off x="2628900" y="1758293"/>
+              <a:ext cx="2264093" cy="369332"/>
             </a:xfrm>
             <a:prstGeom prst="rect">
               <a:avLst/>
             </a:prstGeom>
             <a:noFill/>
-          </ns0:spPr>
-          <ns0:txBody>
+          </p:spPr>
+          <p:txBody>
             <a:bodyPr wrap="square">
               <a:spAutoFit/>
             </a:bodyPr>
@@ -1542,119 +1542,192 @@
                 <a:t>Use one or both</a:t>
               </a:r>
             </a:p>
-          </ns0:txBody>
-        </ns0:sp>
-      </ns0:grpSp>
-      <ns0:grpSp>
-        <ns0:nvGrpSpPr>
-          <ns0:cNvPr id="40" name="组合 39">
-            <a:extLst>
-              <a:ext uri="{FF2B5EF4-FFF2-40B4-BE49-F238E27FC236}">
-                <ns2:creationId id="{9BB43E03-5006-C4C5-2195-F7E7662A055C}"/>
-              </a:ext>
-            </a:extLst>
-          </ns0:cNvPr>
-          <ns0:cNvGrpSpPr/>
-          <ns0:nvPr/>
-        </ns0:nvGrpSpPr>
-        <ns0:grpSpPr>
-          <a:xfrm>
-            <a:off x="9067156" y="1728847"/>
-            <a:ext cx="259080" cy="369332"/>
-            <a:chOff x="7185660" y="3359281"/>
-            <a:chExt cx="259080" cy="369332"/>
-          </a:xfrm>
-        </ns0:grpSpPr>
-        <ns0:sp>
-          <ns0:nvSpPr>
-            <ns0:cNvPr id="42" name="椭圆 41">
+          </p:txBody>
+        </p:sp>
+      </p:grpSp>
+      <p:grpSp>
+        <p:nvGrpSpPr>
+          <p:cNvPr id="2" name="组合 1">
+            <a:extLst>
+              <a:ext uri="{FF2B5EF4-FFF2-40B4-BE49-F238E27FC236}">
+                <a16:creationId xmlns:a16="http://schemas.microsoft.com/office/drawing/2014/main" id="{D609F8DD-EA70-6023-C74F-C0FF8FE959B0}"/>
+              </a:ext>
+            </a:extLst>
+          </p:cNvPr>
+          <p:cNvGrpSpPr/>
+          <p:nvPr/>
+        </p:nvGrpSpPr>
+        <p:grpSpPr>
+          <a:xfrm>
+            <a:off x="9067156" y="1519462"/>
+            <a:ext cx="3900699" cy="384751"/>
+            <a:chOff x="9067156" y="1713428"/>
+            <a:chExt cx="3900699" cy="384751"/>
+          </a:xfrm>
+        </p:grpSpPr>
+        <p:grpSp>
+          <p:nvGrpSpPr>
+            <p:cNvPr id="40" name="组合 39">
               <a:extLst>
                 <a:ext uri="{FF2B5EF4-FFF2-40B4-BE49-F238E27FC236}">
-                  <ns2:creationId id="{0503B1C7-1100-7720-2ABB-5BF8ED00D71A}"/>
+                  <a16:creationId xmlns:a16="http://schemas.microsoft.com/office/drawing/2014/main" id="{9BB43E03-5006-C4C5-2195-F7E7662A055C}"/>
                 </a:ext>
               </a:extLst>
-            </ns0:cNvPr>
-            <ns0:cNvSpPr/>
-            <ns0:nvPr/>
-          </ns0:nvSpPr>
-          <ns0:spPr>
+            </p:cNvPr>
+            <p:cNvGrpSpPr/>
+            <p:nvPr/>
+          </p:nvGrpSpPr>
+          <p:grpSpPr>
             <a:xfrm>
-              <a:off x="7185660" y="3414407"/>
-              <a:ext cx="259080" cy="259080"/>
+              <a:off x="9067156" y="1728847"/>
+              <a:ext cx="259080" cy="369332"/>
+              <a:chOff x="7185660" y="3359281"/>
+              <a:chExt cx="259080" cy="369332"/>
             </a:xfrm>
-            <a:prstGeom prst="ellipse">
-              <a:avLst/>
-            </a:prstGeom>
-            <a:solidFill>
-              <a:srgbClr val="C00000"/>
-            </a:solidFill>
-            <a:ln>
+          </p:grpSpPr>
+          <p:sp>
+            <p:nvSpPr>
+              <p:cNvPr id="42" name="椭圆 41">
+                <a:extLst>
+                  <a:ext uri="{FF2B5EF4-FFF2-40B4-BE49-F238E27FC236}">
+                    <a16:creationId xmlns:a16="http://schemas.microsoft.com/office/drawing/2014/main" id="{0503B1C7-1100-7720-2ABB-5BF8ED00D71A}"/>
+                  </a:ext>
+                </a:extLst>
+              </p:cNvPr>
+              <p:cNvSpPr/>
+              <p:nvPr/>
+            </p:nvSpPr>
+            <p:spPr>
+              <a:xfrm>
+                <a:off x="7185660" y="3414407"/>
+                <a:ext cx="259080" cy="259080"/>
+              </a:xfrm>
+              <a:prstGeom prst="ellipse">
+                <a:avLst/>
+              </a:prstGeom>
               <a:solidFill>
                 <a:srgbClr val="C00000"/>
               </a:solidFill>
-            </a:ln>
-          </ns0:spPr>
-          <ns0:style>
-            <a:lnRef idx="2">
-              <a:schemeClr val="accent1">
-                <a:shade val="15000"/>
-              </a:schemeClr>
-            </a:lnRef>
-            <a:fillRef idx="1">
-              <a:schemeClr val="accent1"/>
-            </a:fillRef>
-            <a:effectRef idx="0">
-              <a:schemeClr val="accent1"/>
-            </a:effectRef>
-            <a:fontRef idx="minor">
-              <a:schemeClr val="lt1"/>
-            </a:fontRef>
-          </ns0:style>
-          <ns0:txBody>
-            <a:bodyPr rtlCol="0" anchor="ctr"/>
-            <a:lstStyle/>
-            <a:p>
-              <a:pPr algn="ctr"/>
-              <a:endParaRPr lang="zh-CN" altLang="en-US"/>
-            </a:p>
-          </ns0:txBody>
-        </ns0:sp>
-        <ns0:sp>
-          <ns0:nvSpPr>
-            <ns0:cNvPr id="43" name="文本框 42">
+              <a:ln>
+                <a:solidFill>
+                  <a:srgbClr val="C00000"/>
+                </a:solidFill>
+              </a:ln>
+            </p:spPr>
+            <p:style>
+              <a:lnRef idx="2">
+                <a:schemeClr val="accent1">
+                  <a:shade val="15000"/>
+                </a:schemeClr>
+              </a:lnRef>
+              <a:fillRef idx="1">
+                <a:schemeClr val="accent1"/>
+              </a:fillRef>
+              <a:effectRef idx="0">
+                <a:schemeClr val="accent1"/>
+              </a:effectRef>
+              <a:fontRef idx="minor">
+                <a:schemeClr val="lt1"/>
+              </a:fontRef>
+            </p:style>
+            <p:txBody>
+              <a:bodyPr rtlCol="0" anchor="ctr"/>
+              <a:lstStyle/>
+              <a:p>
+                <a:pPr algn="ctr"/>
+                <a:endParaRPr lang="zh-CN" altLang="en-US"/>
+              </a:p>
+            </p:txBody>
+          </p:sp>
+          <p:sp>
+            <p:nvSpPr>
+              <p:cNvPr id="43" name="文本框 42">
+                <a:extLst>
+                  <a:ext uri="{FF2B5EF4-FFF2-40B4-BE49-F238E27FC236}">
+                    <a16:creationId xmlns:a16="http://schemas.microsoft.com/office/drawing/2014/main" id="{B12F6135-4E33-4C44-EC0B-3A852BDBFE4B}"/>
+                  </a:ext>
+                </a:extLst>
+              </p:cNvPr>
+              <p:cNvSpPr txBox="1"/>
+              <p:nvPr/>
+            </p:nvSpPr>
+            <p:spPr>
+              <a:xfrm>
+                <a:off x="7215187" y="3359281"/>
+                <a:ext cx="200026" cy="369332"/>
+              </a:xfrm>
+              <a:prstGeom prst="rect">
+                <a:avLst/>
+              </a:prstGeom>
+              <a:noFill/>
+            </p:spPr>
+            <p:txBody>
+              <a:bodyPr wrap="square">
+                <a:spAutoFit/>
+              </a:bodyPr>
+              <a:lstStyle/>
+              <a:p>
+                <a:pPr algn="ctr">
+                  <a:defRPr sz="1292" b="1">
+                    <a:solidFill>
+                      <a:srgbClr val="FFFFFF"/>
+                    </a:solidFill>
+                    <a:latin typeface="Segoe UI Symbol"/>
+                    <a:ea typeface="Segoe UI Symbol"/>
+                    <a:cs typeface="Segoe UI Symbol"/>
+                  </a:defRPr>
+                </a:pPr>
+                <a:r>
+                  <a:rPr lang="zh-CN" altLang="en-US" sz="1800" b="1" dirty="0">
+                    <a:solidFill>
+                      <a:srgbClr val="FFFFFF"/>
+                    </a:solidFill>
+                    <a:latin typeface="Segoe UI Symbol"/>
+                    <a:ea typeface="Segoe UI Symbol"/>
+                    <a:cs typeface="Segoe UI Symbol"/>
+                  </a:rPr>
+                  <a:t>✓</a:t>
+                </a:r>
+              </a:p>
+            </p:txBody>
+          </p:sp>
+        </p:grpSp>
+        <p:sp>
+          <p:nvSpPr>
+            <p:cNvPr id="45" name="文本框 44">
               <a:extLst>
                 <a:ext uri="{FF2B5EF4-FFF2-40B4-BE49-F238E27FC236}">
-                  <ns2:creationId id="{B12F6135-4E33-4C44-EC0B-3A852BDBFE4B}"/>
+                  <a16:creationId xmlns:a16="http://schemas.microsoft.com/office/drawing/2014/main" id="{160EA1DE-8F8D-A9A4-E1EE-DF7858815250}"/>
                 </a:ext>
               </a:extLst>
-            </ns0:cNvPr>
-            <ns0:cNvSpPr txBox="1"/>
-            <ns0:nvPr/>
-          </ns0:nvSpPr>
-          <ns0:spPr>
+            </p:cNvPr>
+            <p:cNvSpPr txBox="1"/>
+            <p:nvPr/>
+          </p:nvSpPr>
+          <p:spPr>
             <a:xfrm>
-              <a:off x="7215187" y="3359281"/>
-              <a:ext cx="200026" cy="369332"/>
+              <a:off x="9525002" y="1713428"/>
+              <a:ext cx="3442853" cy="369332"/>
             </a:xfrm>
             <a:prstGeom prst="rect">
               <a:avLst/>
             </a:prstGeom>
             <a:noFill/>
-          </ns0:spPr>
-          <ns0:txBody>
+          </p:spPr>
+          <p:txBody>
             <a:bodyPr wrap="square">
               <a:spAutoFit/>
             </a:bodyPr>
             <a:lstStyle/>
             <a:p>
-              <a:pPr algn="ctr">
-                <a:defRPr sz="1292" b="1">
+              <a:pPr>
+                <a:defRPr sz="1575" b="1">
                   <a:solidFill>
                     <a:srgbClr val="FFFFFF"/>
                   </a:solidFill>
-                  <a:latin typeface="Segoe UI Symbol"/>
-                  <a:ea typeface="Segoe UI Symbol"/>
-                  <a:cs typeface="Segoe UI Symbol"/>
+                  <a:latin typeface="Microsoft YaHei UI"/>
+                  <a:ea typeface="Microsoft YaHei UI"/>
+                  <a:cs typeface="Microsoft YaHei UI"/>
                 </a:defRPr>
               </a:pPr>
               <a:r>
@@ -1662,83 +1735,31 @@
                   <a:solidFill>
                     <a:srgbClr val="FFFFFF"/>
                   </a:solidFill>
-                  <a:latin typeface="Segoe UI Symbol"/>
-                  <a:ea typeface="Segoe UI Symbol"/>
-                  <a:cs typeface="Segoe UI Symbol"/>
+                  <a:latin typeface="思源黑体 CN Bold" panose="020B0800000000000000" pitchFamily="34" charset="-122"/>
+                  <a:ea typeface="思源黑体 CN Bold" panose="020B0800000000000000" pitchFamily="34" charset="-122"/>
+                  <a:cs typeface="Microsoft YaHei UI"/>
                 </a:rPr>
-                <a:t>✓</a:t>
+                <a:t>Keeps each method's logic</a:t>
               </a:r>
             </a:p>
-          </ns0:txBody>
-        </ns0:sp>
-      </ns0:grpSp>
-      <ns0:sp>
-        <ns0:nvSpPr>
-          <ns0:cNvPr id="45" name="文本框 44">
-            <a:extLst>
-              <a:ext uri="{FF2B5EF4-FFF2-40B4-BE49-F238E27FC236}">
-                <ns2:creationId id="{160EA1DE-8F8D-A9A4-E1EE-DF7858815250}"/>
-              </a:ext>
-            </a:extLst>
-          </ns0:cNvPr>
-          <ns0:cNvSpPr txBox="1"/>
-          <ns0:nvPr/>
-        </ns0:nvSpPr>
-        <ns0:spPr>
-          <a:xfrm>
-            <a:off x="9525002" y="1713428"/>
-            <a:ext cx="7315200" cy="369332"/>
-          </a:xfrm>
-          <a:prstGeom prst="rect">
-            <a:avLst/>
-          </a:prstGeom>
-          <a:noFill/>
-        </ns0:spPr>
-        <ns0:txBody>
-          <a:bodyPr wrap="square">
-            <a:spAutoFit/>
-          </a:bodyPr>
-          <a:lstStyle/>
-          <a:p>
-            <a:pPr>
-              <a:defRPr sz="1575" b="1">
-                <a:solidFill>
-                  <a:srgbClr val="FFFFFF"/>
-                </a:solidFill>
-                <a:latin typeface="Microsoft YaHei UI"/>
-                <a:ea typeface="Microsoft YaHei UI"/>
-                <a:cs typeface="Microsoft YaHei UI"/>
-              </a:defRPr>
-            </a:pPr>
-            <a:r>
-              <a:rPr lang="zh-CN" altLang="en-US" sz="1800" b="1" dirty="0">
-                <a:solidFill>
-                  <a:srgbClr val="FFFFFF"/>
-                </a:solidFill>
-                <a:latin typeface="思源黑体 CN Bold" panose="020B0800000000000000" pitchFamily="34" charset="-122"/>
-                <a:ea typeface="思源黑体 CN Bold" panose="020B0800000000000000" pitchFamily="34" charset="-122"/>
-                <a:cs typeface="Microsoft YaHei UI"/>
-              </a:rPr>
-              <a:t>Keeps each method's logic</a:t>
-            </a:r>
-          </a:p>
-        </ns0:txBody>
-      </ns0:sp>
-      <ns0:sp>
-        <ns0:nvSpPr>
-          <ns0:cNvPr id="46" name="矩形: 圆角 45">
-            <a:extLst>
-              <a:ext uri="{FF2B5EF4-FFF2-40B4-BE49-F238E27FC236}">
-                <ns2:creationId id="{9B2A2CFB-F4C4-73C0-3E1E-5ADAB96EAD96}"/>
-              </a:ext>
-            </a:extLst>
-          </ns0:cNvPr>
-          <ns0:cNvSpPr>
-            <a:spLocks noGrp="1"/>
-          </ns0:cNvSpPr>
-          <ns0:nvPr/>
-        </ns0:nvSpPr>
-        <ns0:spPr>
+          </p:txBody>
+        </p:sp>
+      </p:grpSp>
+      <p:sp>
+        <p:nvSpPr>
+          <p:cNvPr id="46" name="矩形: 圆角 45">
+            <a:extLst>
+              <a:ext uri="{FF2B5EF4-FFF2-40B4-BE49-F238E27FC236}">
+                <a16:creationId xmlns:a16="http://schemas.microsoft.com/office/drawing/2014/main" id="{9B2A2CFB-F4C4-73C0-3E1E-5ADAB96EAD96}"/>
+              </a:ext>
+            </a:extLst>
+          </p:cNvPr>
+          <p:cNvSpPr>
+            <a:spLocks noGrp="1"/>
+          </p:cNvSpPr>
+          <p:nvPr/>
+        </p:nvSpPr>
+        <p:spPr>
           <a:xfrm>
             <a:off x="142875" y="2209800"/>
             <a:ext cx="6772275" cy="4572000"/>
@@ -1772,8 +1793,8 @@
             <a:noFill/>
             <a:prstDash val="solid"/>
           </a:ln>
-        </ns0:spPr>
-        <ns0:style>
+        </p:spPr>
+        <p:style>
           <a:lnRef idx="0">
             <a:scrgbClr r="0" g="0" b="0"/>
           </a:lnRef>
@@ -1784,30 +1805,30 @@
             <a:scrgbClr r="0" g="0" b="0"/>
           </a:effectRef>
           <a:fontRef idx="major"/>
-        </ns0:style>
-        <ns0:txBody>
+        </p:style>
+        <p:txBody>
           <a:bodyPr/>
           <a:lstStyle/>
           <a:p>
             <a:endParaRPr lang="zh-CN" altLang="en-US"/>
           </a:p>
-        </ns0:txBody>
-      </ns0:sp>
-      <ns0:sp>
-        <ns0:nvSpPr>
-          <ns0:cNvPr id="47" name="矩形: 圆角 46">
-            <a:extLst>
-              <a:ext uri="{FF2B5EF4-FFF2-40B4-BE49-F238E27FC236}">
-                <ns2:creationId id="{EB7AC368-ACE6-5964-7919-F761882CBB0F}"/>
-              </a:ext>
-            </a:extLst>
-          </ns0:cNvPr>
-          <ns0:cNvSpPr>
-            <a:spLocks noGrp="1"/>
-          </ns0:cNvSpPr>
-          <ns0:nvPr/>
-        </ns0:nvSpPr>
-        <ns0:spPr>
+        </p:txBody>
+      </p:sp>
+      <p:sp>
+        <p:nvSpPr>
+          <p:cNvPr id="47" name="矩形: 圆角 46">
+            <a:extLst>
+              <a:ext uri="{FF2B5EF4-FFF2-40B4-BE49-F238E27FC236}">
+                <a16:creationId xmlns:a16="http://schemas.microsoft.com/office/drawing/2014/main" id="{EB7AC368-ACE6-5964-7919-F761882CBB0F}"/>
+              </a:ext>
+            </a:extLst>
+          </p:cNvPr>
+          <p:cNvSpPr>
+            <a:spLocks noGrp="1"/>
+          </p:cNvSpPr>
+          <p:nvPr/>
+        </p:nvSpPr>
+        <p:spPr>
           <a:xfrm>
             <a:off x="140970" y="2206541"/>
             <a:ext cx="6772275" cy="619125"/>
@@ -1824,8 +1845,8 @@
             <a:noFill/>
             <a:prstDash val="solid"/>
           </a:ln>
-        </ns0:spPr>
-        <ns0:txBody>
+        </p:spPr>
+        <p:txBody>
           <a:bodyPr/>
           <a:lstStyle/>
           <a:p>
@@ -1834,23 +1855,23 @@
               <a:ea typeface="思源黑体 CN Bold" panose="020B0800000000000000" pitchFamily="34" charset="-122"/>
             </a:endParaRPr>
           </a:p>
-        </ns0:txBody>
-      </ns0:sp>
-      <ns0:sp>
-        <ns0:nvSpPr>
-          <ns0:cNvPr id="48" name="矩形 47">
-            <a:extLst>
-              <a:ext uri="{FF2B5EF4-FFF2-40B4-BE49-F238E27FC236}">
-                <ns2:creationId id="{113E3F4A-EEA2-82E6-E52F-E1CD982A2C70}"/>
-              </a:ext>
-            </a:extLst>
-          </ns0:cNvPr>
-          <ns0:cNvSpPr>
-            <a:spLocks noGrp="1"/>
-          </ns0:cNvSpPr>
-          <ns0:nvPr/>
-        </ns0:nvSpPr>
-        <ns0:spPr>
+        </p:txBody>
+      </p:sp>
+      <p:sp>
+        <p:nvSpPr>
+          <p:cNvPr id="48" name="矩形 47">
+            <a:extLst>
+              <a:ext uri="{FF2B5EF4-FFF2-40B4-BE49-F238E27FC236}">
+                <a16:creationId xmlns:a16="http://schemas.microsoft.com/office/drawing/2014/main" id="{113E3F4A-EEA2-82E6-E52F-E1CD982A2C70}"/>
+              </a:ext>
+            </a:extLst>
+          </p:cNvPr>
+          <p:cNvSpPr>
+            <a:spLocks noGrp="1"/>
+          </p:cNvSpPr>
+          <p:nvPr/>
+        </p:nvSpPr>
+        <p:spPr>
           <a:xfrm>
             <a:off x="504825" y="3000375"/>
             <a:ext cx="1143000" cy="266700"/>
@@ -1863,8 +1884,8 @@
             <a:noFill/>
             <a:prstDash val="solid"/>
           </a:ln>
-        </ns0:spPr>
-        <ns0:txBody>
+        </p:spPr>
+        <p:txBody>
           <a:bodyPr wrap="square" lIns="19050" tIns="0" rIns="19050" bIns="0" anchor="ctr">
             <a:normAutofit/>
           </a:bodyPr>
@@ -1900,23 +1921,23 @@
               <a:cs typeface="Arial"/>
             </a:endParaRPr>
           </a:p>
-        </ns0:txBody>
-      </ns0:sp>
-      <ns0:sp>
-        <ns0:nvSpPr>
-          <ns0:cNvPr id="49" name="矩形 48">
-            <a:extLst>
-              <a:ext uri="{FF2B5EF4-FFF2-40B4-BE49-F238E27FC236}">
-                <ns2:creationId id="{A9E920FD-D20C-4171-917C-DAA6E388BAAF}"/>
-              </a:ext>
-            </a:extLst>
-          </ns0:cNvPr>
-          <ns0:cNvSpPr>
-            <a:spLocks noGrp="1"/>
-          </ns0:cNvSpPr>
-          <ns0:nvPr/>
-        </ns0:nvSpPr>
-        <ns0:spPr>
+        </p:txBody>
+      </p:sp>
+      <p:sp>
+        <p:nvSpPr>
+          <p:cNvPr id="49" name="矩形 48">
+            <a:extLst>
+              <a:ext uri="{FF2B5EF4-FFF2-40B4-BE49-F238E27FC236}">
+                <a16:creationId xmlns:a16="http://schemas.microsoft.com/office/drawing/2014/main" id="{A9E920FD-D20C-4171-917C-DAA6E388BAAF}"/>
+              </a:ext>
+            </a:extLst>
+          </p:cNvPr>
+          <p:cNvSpPr>
+            <a:spLocks noGrp="1"/>
+          </p:cNvSpPr>
+          <p:nvPr/>
+        </p:nvSpPr>
+        <p:spPr>
           <a:xfrm>
             <a:off x="333375" y="3286125"/>
             <a:ext cx="1428750" cy="247650"/>
@@ -1929,10 +1950,10 @@
             <a:noFill/>
             <a:prstDash val="solid"/>
           </a:ln>
-        </ns0:spPr>
-        <ns0:txBody>
+        </p:spPr>
+        <p:txBody>
           <a:bodyPr wrap="square" lIns="19050" tIns="0" rIns="19050" bIns="0" anchor="ctr">
-            <a:normAutofit/>
+            <a:normAutofit fontScale="77500" lnSpcReduction="20000"/>
           </a:bodyPr>
           <a:lstStyle/>
           <a:p>
@@ -1966,30 +1987,30 @@
               <a:cs typeface="Microsoft YaHei UI"/>
             </a:endParaRPr>
           </a:p>
-        </ns0:txBody>
-      </ns0:sp>
-      <ns0:pic>
-        <ns0:nvPicPr>
-          <ns0:cNvPr id="50" name="图片 49">
-            <a:extLst>
-              <a:ext uri="{FF2B5EF4-FFF2-40B4-BE49-F238E27FC236}">
-                <ns2:creationId id="{DCD32A67-DD04-7ED8-BC43-899074B7E7DB}"/>
-              </a:ext>
-            </a:extLst>
-          </ns0:cNvPr>
-          <ns0:cNvPicPr>
+        </p:txBody>
+      </p:sp>
+      <p:pic>
+        <p:nvPicPr>
+          <p:cNvPr id="50" name="图片 49">
+            <a:extLst>
+              <a:ext uri="{FF2B5EF4-FFF2-40B4-BE49-F238E27FC236}">
+                <a16:creationId xmlns:a16="http://schemas.microsoft.com/office/drawing/2014/main" id="{DCD32A67-DD04-7ED8-BC43-899074B7E7DB}"/>
+              </a:ext>
+            </a:extLst>
+          </p:cNvPr>
+          <p:cNvPicPr>
             <a:picLocks noChangeAspect="1"/>
-          </ns0:cNvPicPr>
-          <ns0:nvPr/>
-        </ns0:nvPicPr>
-        <ns0:blipFill>
-          <a:blip ns3:embed="rId2"/>
+          </p:cNvPicPr>
+          <p:nvPr/>
+        </p:nvPicPr>
+        <p:blipFill>
+          <a:blip r:embed="rId2"/>
           <a:srcRect/>
           <a:stretch>
             <a:fillRect/>
           </a:stretch>
-        </ns0:blipFill>
-        <ns0:spPr>
+        </p:blipFill>
+        <p:spPr>
           <a:xfrm>
             <a:off x="342900" y="3743325"/>
             <a:ext cx="1428750" cy="1457325"/>
@@ -1997,23 +2018,23 @@
           <a:prstGeom prst="rect">
             <a:avLst/>
           </a:prstGeom>
-        </ns0:spPr>
-      </ns0:pic>
-      <ns0:sp>
-        <ns0:nvSpPr>
-          <ns0:cNvPr id="51" name="矩形 50">
-            <a:extLst>
-              <a:ext uri="{FF2B5EF4-FFF2-40B4-BE49-F238E27FC236}">
-                <ns2:creationId id="{DC4C869F-5BA8-2FF0-9374-B811045C432E}"/>
-              </a:ext>
-            </a:extLst>
-          </ns0:cNvPr>
-          <ns0:cNvSpPr>
-            <a:spLocks noGrp="1"/>
-          </ns0:cNvSpPr>
-          <ns0:nvPr/>
-        </ns0:nvSpPr>
-        <ns0:spPr>
+        </p:spPr>
+      </p:pic>
+      <p:sp>
+        <p:nvSpPr>
+          <p:cNvPr id="51" name="矩形 50">
+            <a:extLst>
+              <a:ext uri="{FF2B5EF4-FFF2-40B4-BE49-F238E27FC236}">
+                <a16:creationId xmlns:a16="http://schemas.microsoft.com/office/drawing/2014/main" id="{DC4C869F-5BA8-2FF0-9374-B811045C432E}"/>
+              </a:ext>
+            </a:extLst>
+          </p:cNvPr>
+          <p:cNvSpPr>
+            <a:spLocks noGrp="1"/>
+          </p:cNvSpPr>
+          <p:nvPr/>
+        </p:nvSpPr>
+        <p:spPr>
           <a:xfrm>
             <a:off x="2105025" y="3000375"/>
             <a:ext cx="1143000" cy="266700"/>
@@ -2026,8 +2047,8 @@
             <a:noFill/>
             <a:prstDash val="solid"/>
           </a:ln>
-        </ns0:spPr>
-        <ns0:txBody>
+        </p:spPr>
+        <p:txBody>
           <a:bodyPr wrap="square" lIns="19050" tIns="0" rIns="19050" bIns="0" anchor="ctr">
             <a:normAutofit/>
           </a:bodyPr>
@@ -2055,23 +2076,23 @@
               <a:t>EasyCache</a:t>
             </a:r>
           </a:p>
-        </ns0:txBody>
-      </ns0:sp>
-      <ns0:sp>
-        <ns0:nvSpPr>
-          <ns0:cNvPr id="52" name="矩形 51">
-            <a:extLst>
-              <a:ext uri="{FF2B5EF4-FFF2-40B4-BE49-F238E27FC236}">
-                <ns2:creationId id="{CBB8A5D5-B869-518F-2DED-EF40254EC074}"/>
-              </a:ext>
-            </a:extLst>
-          </ns0:cNvPr>
-          <ns0:cNvSpPr>
-            <a:spLocks noGrp="1"/>
-          </ns0:cNvSpPr>
-          <ns0:nvPr/>
-        </ns0:nvSpPr>
-        <ns0:spPr>
+        </p:txBody>
+      </p:sp>
+      <p:sp>
+        <p:nvSpPr>
+          <p:cNvPr id="52" name="矩形 51">
+            <a:extLst>
+              <a:ext uri="{FF2B5EF4-FFF2-40B4-BE49-F238E27FC236}">
+                <a16:creationId xmlns:a16="http://schemas.microsoft.com/office/drawing/2014/main" id="{CBB8A5D5-B869-518F-2DED-EF40254EC074}"/>
+              </a:ext>
+            </a:extLst>
+          </p:cNvPr>
+          <p:cNvSpPr>
+            <a:spLocks noGrp="1"/>
+          </p:cNvSpPr>
+          <p:nvPr/>
+        </p:nvSpPr>
+        <p:spPr>
           <a:xfrm>
             <a:off x="1933575" y="3286125"/>
             <a:ext cx="1428750" cy="247650"/>
@@ -2084,10 +2105,10 @@
             <a:noFill/>
             <a:prstDash val="solid"/>
           </a:ln>
-        </ns0:spPr>
-        <ns0:txBody>
+        </p:spPr>
+        <p:txBody>
           <a:bodyPr wrap="square" lIns="19050" tIns="0" rIns="19050" bIns="0" anchor="ctr">
-            <a:normAutofit/>
+            <a:normAutofit fontScale="77500" lnSpcReduction="20000"/>
           </a:bodyPr>
           <a:lstStyle/>
           <a:p>
@@ -2113,30 +2134,30 @@
               <a:t>Separate wiring patterns</a:t>
             </a:r>
           </a:p>
-        </ns0:txBody>
-      </ns0:sp>
-      <ns0:pic>
-        <ns0:nvPicPr>
-          <ns0:cNvPr id="53" name="图片 52">
-            <a:extLst>
-              <a:ext uri="{FF2B5EF4-FFF2-40B4-BE49-F238E27FC236}">
-                <ns2:creationId id="{FE60C463-19CF-01D5-C674-06436FA6A623}"/>
-              </a:ext>
-            </a:extLst>
-          </ns0:cNvPr>
-          <ns0:cNvPicPr>
+        </p:txBody>
+      </p:sp>
+      <p:pic>
+        <p:nvPicPr>
+          <p:cNvPr id="53" name="图片 52">
+            <a:extLst>
+              <a:ext uri="{FF2B5EF4-FFF2-40B4-BE49-F238E27FC236}">
+                <a16:creationId xmlns:a16="http://schemas.microsoft.com/office/drawing/2014/main" id="{FE60C463-19CF-01D5-C674-06436FA6A623}"/>
+              </a:ext>
+            </a:extLst>
+          </p:cNvPr>
+          <p:cNvPicPr>
             <a:picLocks noChangeAspect="1"/>
-          </ns0:cNvPicPr>
-          <ns0:nvPr/>
-        </ns0:nvPicPr>
-        <ns0:blipFill>
-          <a:blip ns3:embed="rId3"/>
+          </p:cNvPicPr>
+          <p:nvPr/>
+        </p:nvPicPr>
+        <p:blipFill>
+          <a:blip r:embed="rId3"/>
           <a:srcRect l="658" r="658"/>
           <a:stretch>
             <a:fillRect/>
           </a:stretch>
-        </ns0:blipFill>
-        <ns0:spPr>
+        </p:blipFill>
+        <p:spPr>
           <a:xfrm>
             <a:off x="1943100" y="3743325"/>
             <a:ext cx="1428750" cy="1457325"/>
@@ -2144,23 +2165,23 @@
           <a:prstGeom prst="rect">
             <a:avLst/>
           </a:prstGeom>
-        </ns0:spPr>
-      </ns0:pic>
-      <ns0:sp>
-        <ns0:nvSpPr>
-          <ns0:cNvPr id="54" name="矩形 53">
-            <a:extLst>
-              <a:ext uri="{FF2B5EF4-FFF2-40B4-BE49-F238E27FC236}">
-                <ns2:creationId id="{7D30DF35-2C02-2825-29B2-7C527C517E66}"/>
-              </a:ext>
-            </a:extLst>
-          </ns0:cNvPr>
-          <ns0:cNvSpPr>
-            <a:spLocks noGrp="1"/>
-          </ns0:cNvSpPr>
-          <ns0:nvPr/>
-        </ns0:nvSpPr>
-        <ns0:spPr>
+        </p:spPr>
+      </p:pic>
+      <p:sp>
+        <p:nvSpPr>
+          <p:cNvPr id="54" name="矩形 53">
+            <a:extLst>
+              <a:ext uri="{FF2B5EF4-FFF2-40B4-BE49-F238E27FC236}">
+                <a16:creationId xmlns:a16="http://schemas.microsoft.com/office/drawing/2014/main" id="{7D30DF35-2C02-2825-29B2-7C527C517E66}"/>
+              </a:ext>
+            </a:extLst>
+          </p:cNvPr>
+          <p:cNvSpPr>
+            <a:spLocks noGrp="1"/>
+          </p:cNvSpPr>
+          <p:nvPr/>
+        </p:nvSpPr>
+        <p:spPr>
           <a:xfrm>
             <a:off x="3819525" y="3000375"/>
             <a:ext cx="1143000" cy="266700"/>
@@ -2173,8 +2194,8 @@
             <a:noFill/>
             <a:prstDash val="solid"/>
           </a:ln>
-        </ns0:spPr>
-        <ns0:txBody>
+        </p:spPr>
+        <p:txBody>
           <a:bodyPr wrap="square" lIns="19050" tIns="0" rIns="19050" bIns="0" anchor="ctr">
             <a:normAutofit/>
           </a:bodyPr>
@@ -2202,23 +2223,23 @@
               <a:t>MagCache</a:t>
             </a:r>
           </a:p>
-        </ns0:txBody>
-      </ns0:sp>
-      <ns0:sp>
-        <ns0:nvSpPr>
-          <ns0:cNvPr id="55" name="矩形 54">
-            <a:extLst>
-              <a:ext uri="{FF2B5EF4-FFF2-40B4-BE49-F238E27FC236}">
-                <ns2:creationId id="{A1E85622-0132-8C5C-9698-A92E2E1F5913}"/>
-              </a:ext>
-            </a:extLst>
-          </ns0:cNvPr>
-          <ns0:cNvSpPr>
-            <a:spLocks noGrp="1"/>
-          </ns0:cNvSpPr>
-          <ns0:nvPr/>
-        </ns0:nvSpPr>
-        <ns0:spPr>
+        </p:txBody>
+      </p:sp>
+      <p:sp>
+        <p:nvSpPr>
+          <p:cNvPr id="55" name="矩形 54">
+            <a:extLst>
+              <a:ext uri="{FF2B5EF4-FFF2-40B4-BE49-F238E27FC236}">
+                <a16:creationId xmlns:a16="http://schemas.microsoft.com/office/drawing/2014/main" id="{A1E85622-0132-8C5C-9698-A92E2E1F5913}"/>
+              </a:ext>
+            </a:extLst>
+          </p:cNvPr>
+          <p:cNvSpPr>
+            <a:spLocks noGrp="1"/>
+          </p:cNvSpPr>
+          <p:nvPr/>
+        </p:nvSpPr>
+        <p:spPr>
           <a:xfrm>
             <a:off x="3648075" y="3286125"/>
             <a:ext cx="1428750" cy="247650"/>
@@ -2231,10 +2252,10 @@
             <a:noFill/>
             <a:prstDash val="solid"/>
           </a:ln>
-        </ns0:spPr>
-        <ns0:txBody>
+        </p:spPr>
+        <p:txBody>
           <a:bodyPr wrap="square" lIns="19050" tIns="0" rIns="19050" bIns="0" anchor="ctr">
-            <a:normAutofit/>
+            <a:normAutofit fontScale="77500" lnSpcReduction="20000"/>
           </a:bodyPr>
           <a:lstStyle/>
           <a:p>
@@ -2268,30 +2289,30 @@
               <a:cs typeface="Microsoft YaHei UI"/>
             </a:endParaRPr>
           </a:p>
-        </ns0:txBody>
-      </ns0:sp>
-      <ns0:pic>
-        <ns0:nvPicPr>
-          <ns0:cNvPr id="56" name="图片 55">
-            <a:extLst>
-              <a:ext uri="{FF2B5EF4-FFF2-40B4-BE49-F238E27FC236}">
-                <ns2:creationId id="{77DADF20-146B-7604-858B-231A35F70393}"/>
-              </a:ext>
-            </a:extLst>
-          </ns0:cNvPr>
-          <ns0:cNvPicPr>
+        </p:txBody>
+      </p:sp>
+      <p:pic>
+        <p:nvPicPr>
+          <p:cNvPr id="56" name="图片 55">
+            <a:extLst>
+              <a:ext uri="{FF2B5EF4-FFF2-40B4-BE49-F238E27FC236}">
+                <a16:creationId xmlns:a16="http://schemas.microsoft.com/office/drawing/2014/main" id="{77DADF20-146B-7604-858B-231A35F70393}"/>
+              </a:ext>
+            </a:extLst>
+          </p:cNvPr>
+          <p:cNvPicPr>
             <a:picLocks noChangeAspect="1"/>
-          </ns0:cNvPicPr>
-          <ns0:nvPr/>
-        </ns0:nvPicPr>
-        <ns0:blipFill>
-          <a:blip ns3:embed="rId4"/>
+          </p:cNvPicPr>
+          <p:nvPr/>
+        </p:nvPicPr>
+        <p:blipFill>
+          <a:blip r:embed="rId4"/>
           <a:srcRect l="980" r="980"/>
           <a:stretch>
             <a:fillRect/>
           </a:stretch>
-        </ns0:blipFill>
-        <ns0:spPr>
+        </p:blipFill>
+        <p:spPr>
           <a:xfrm>
             <a:off x="3657600" y="3743325"/>
             <a:ext cx="1428750" cy="1457325"/>
@@ -2299,23 +2320,23 @@
           <a:prstGeom prst="rect">
             <a:avLst/>
           </a:prstGeom>
-        </ns0:spPr>
-      </ns0:pic>
-      <ns0:sp>
-        <ns0:nvSpPr>
-          <ns0:cNvPr id="57" name="矩形 56">
-            <a:extLst>
-              <a:ext uri="{FF2B5EF4-FFF2-40B4-BE49-F238E27FC236}">
-                <ns2:creationId id="{C749D9BC-A4D6-82F4-908B-5D24AAA8CFE4}"/>
-              </a:ext>
-            </a:extLst>
-          </ns0:cNvPr>
-          <ns0:cNvSpPr>
-            <a:spLocks noGrp="1"/>
-          </ns0:cNvSpPr>
-          <ns0:nvPr/>
-        </ns0:nvSpPr>
-        <ns0:spPr>
+        </p:spPr>
+      </p:pic>
+      <p:sp>
+        <p:nvSpPr>
+          <p:cNvPr id="57" name="矩形 56">
+            <a:extLst>
+              <a:ext uri="{FF2B5EF4-FFF2-40B4-BE49-F238E27FC236}">
+                <a16:creationId xmlns:a16="http://schemas.microsoft.com/office/drawing/2014/main" id="{C749D9BC-A4D6-82F4-908B-5D24AAA8CFE4}"/>
+              </a:ext>
+            </a:extLst>
+          </p:cNvPr>
+          <p:cNvSpPr>
+            <a:spLocks noGrp="1"/>
+          </p:cNvSpPr>
+          <p:nvPr/>
+        </p:nvSpPr>
+        <p:spPr>
           <a:xfrm>
             <a:off x="5467350" y="3000375"/>
             <a:ext cx="1143000" cy="266700"/>
@@ -2328,8 +2349,8 @@
             <a:noFill/>
             <a:prstDash val="solid"/>
           </a:ln>
-        </ns0:spPr>
-        <ns0:txBody>
+        </p:spPr>
+        <p:txBody>
           <a:bodyPr wrap="square" lIns="19050" tIns="0" rIns="19050" bIns="0" anchor="ctr">
             <a:normAutofit fontScale="90977"/>
           </a:bodyPr>
@@ -2357,23 +2378,23 @@
               <a:t>AdaptiveDiff</a:t>
             </a:r>
           </a:p>
-        </ns0:txBody>
-      </ns0:sp>
-      <ns0:sp>
-        <ns0:nvSpPr>
-          <ns0:cNvPr id="58" name="矩形 57">
-            <a:extLst>
-              <a:ext uri="{FF2B5EF4-FFF2-40B4-BE49-F238E27FC236}">
-                <ns2:creationId id="{E975F7EF-C58B-9846-45EF-935A44E0D260}"/>
-              </a:ext>
-            </a:extLst>
-          </ns0:cNvPr>
-          <ns0:cNvSpPr>
-            <a:spLocks noGrp="1"/>
-          </ns0:cNvSpPr>
-          <ns0:nvPr/>
-        </ns0:nvSpPr>
-        <ns0:spPr>
+        </p:txBody>
+      </p:sp>
+      <p:sp>
+        <p:nvSpPr>
+          <p:cNvPr id="58" name="矩形 57">
+            <a:extLst>
+              <a:ext uri="{FF2B5EF4-FFF2-40B4-BE49-F238E27FC236}">
+                <a16:creationId xmlns:a16="http://schemas.microsoft.com/office/drawing/2014/main" id="{E975F7EF-C58B-9846-45EF-935A44E0D260}"/>
+              </a:ext>
+            </a:extLst>
+          </p:cNvPr>
+          <p:cNvSpPr>
+            <a:spLocks noGrp="1"/>
+          </p:cNvSpPr>
+          <p:nvPr/>
+        </p:nvSpPr>
+        <p:spPr>
           <a:xfrm>
             <a:off x="5295900" y="3286125"/>
             <a:ext cx="1428750" cy="247650"/>
@@ -2386,10 +2407,10 @@
             <a:noFill/>
             <a:prstDash val="solid"/>
           </a:ln>
-        </ns0:spPr>
-        <ns0:txBody>
+        </p:spPr>
+        <p:txBody>
           <a:bodyPr wrap="square" lIns="19050" tIns="0" rIns="19050" bIns="0" anchor="ctr">
-            <a:normAutofit/>
+            <a:normAutofit fontScale="77500" lnSpcReduction="20000"/>
           </a:bodyPr>
           <a:lstStyle/>
           <a:p>
@@ -2415,30 +2436,30 @@
               <a:t>Skip steps, reuse residuals</a:t>
             </a:r>
           </a:p>
-        </ns0:txBody>
-      </ns0:sp>
-      <ns0:pic>
-        <ns0:nvPicPr>
-          <ns0:cNvPr id="59" name="图片 58">
-            <a:extLst>
-              <a:ext uri="{FF2B5EF4-FFF2-40B4-BE49-F238E27FC236}">
-                <ns2:creationId id="{8E7B670B-E894-CA7B-2DBF-EDDBABD8181F}"/>
-              </a:ext>
-            </a:extLst>
-          </ns0:cNvPr>
-          <ns0:cNvPicPr>
+        </p:txBody>
+      </p:sp>
+      <p:pic>
+        <p:nvPicPr>
+          <p:cNvPr id="59" name="图片 58">
+            <a:extLst>
+              <a:ext uri="{FF2B5EF4-FFF2-40B4-BE49-F238E27FC236}">
+                <a16:creationId xmlns:a16="http://schemas.microsoft.com/office/drawing/2014/main" id="{8E7B670B-E894-CA7B-2DBF-EDDBABD8181F}"/>
+              </a:ext>
+            </a:extLst>
+          </p:cNvPr>
+          <p:cNvPicPr>
             <a:picLocks noChangeAspect="1"/>
-          </ns0:cNvPicPr>
-          <ns0:nvPr/>
-        </ns0:nvPicPr>
-        <ns0:blipFill>
-          <a:blip ns3:embed="rId5"/>
+          </p:cNvPicPr>
+          <p:nvPr/>
+        </p:nvPicPr>
+        <p:blipFill>
+          <a:blip r:embed="rId5"/>
           <a:srcRect l="331" r="331"/>
           <a:stretch>
             <a:fillRect/>
           </a:stretch>
-        </ns0:blipFill>
-        <ns0:spPr>
+        </p:blipFill>
+        <p:spPr>
           <a:xfrm>
             <a:off x="5305425" y="3743325"/>
             <a:ext cx="1428750" cy="1457325"/>
@@ -2446,23 +2467,23 @@
           <a:prstGeom prst="rect">
             <a:avLst/>
           </a:prstGeom>
-        </ns0:spPr>
-      </ns0:pic>
-      <ns0:sp>
-        <ns0:nvSpPr>
-          <ns0:cNvPr id="60" name="矩形 59">
-            <a:extLst>
-              <a:ext uri="{FF2B5EF4-FFF2-40B4-BE49-F238E27FC236}">
-                <ns2:creationId id="{B7053595-034B-0762-B05B-92B777AA57D8}"/>
-              </a:ext>
-            </a:extLst>
-          </ns0:cNvPr>
-          <ns0:cNvSpPr>
-            <a:spLocks noGrp="1"/>
-          </ns0:cNvSpPr>
-          <ns0:nvPr/>
-        </ns0:nvSpPr>
-        <ns0:spPr>
+        </p:spPr>
+      </p:pic>
+      <p:sp>
+        <p:nvSpPr>
+          <p:cNvPr id="60" name="矩形 59">
+            <a:extLst>
+              <a:ext uri="{FF2B5EF4-FFF2-40B4-BE49-F238E27FC236}">
+                <a16:creationId xmlns:a16="http://schemas.microsoft.com/office/drawing/2014/main" id="{B7053595-034B-0762-B05B-92B777AA57D8}"/>
+              </a:ext>
+            </a:extLst>
+          </p:cNvPr>
+          <p:cNvSpPr>
+            <a:spLocks noGrp="1"/>
+          </p:cNvSpPr>
+          <p:nvPr/>
+        </p:nvSpPr>
+        <p:spPr>
           <a:xfrm>
             <a:off x="428625" y="5410200"/>
             <a:ext cx="1200150" cy="495300"/>
@@ -2475,10 +2496,10 @@
             <a:noFill/>
             <a:prstDash val="solid"/>
           </a:ln>
-        </ns0:spPr>
-        <ns0:txBody>
+        </p:spPr>
+        <p:txBody>
           <a:bodyPr wrap="square" lIns="19050" tIns="0" rIns="19050" bIns="0" anchor="ctr">
-            <a:normAutofit fontScale="96819"/>
+            <a:normAutofit fontScale="74319" lnSpcReduction="20000"/>
           </a:bodyPr>
           <a:lstStyle/>
           <a:p>
@@ -2551,23 +2572,23 @@
               <a:cs typeface="Microsoft YaHei UI"/>
             </a:endParaRPr>
           </a:p>
-        </ns0:txBody>
-      </ns0:sp>
-      <ns0:sp>
-        <ns0:nvSpPr>
-          <ns0:cNvPr id="61" name="矩形 60">
-            <a:extLst>
-              <a:ext uri="{FF2B5EF4-FFF2-40B4-BE49-F238E27FC236}">
-                <ns2:creationId id="{7BA491B3-94A5-4A03-605C-3998C1589CC4}"/>
-              </a:ext>
-            </a:extLst>
-          </ns0:cNvPr>
-          <ns0:cNvSpPr>
-            <a:spLocks noGrp="1"/>
-          </ns0:cNvSpPr>
-          <ns0:nvPr/>
-        </ns0:nvSpPr>
-        <ns0:spPr>
+        </p:txBody>
+      </p:sp>
+      <p:sp>
+        <p:nvSpPr>
+          <p:cNvPr id="61" name="矩形 60">
+            <a:extLst>
+              <a:ext uri="{FF2B5EF4-FFF2-40B4-BE49-F238E27FC236}">
+                <a16:creationId xmlns:a16="http://schemas.microsoft.com/office/drawing/2014/main" id="{7BA491B3-94A5-4A03-605C-3998C1589CC4}"/>
+              </a:ext>
+            </a:extLst>
+          </p:cNvPr>
+          <p:cNvSpPr>
+            <a:spLocks noGrp="1"/>
+          </p:cNvSpPr>
+          <p:nvPr/>
+        </p:nvSpPr>
+        <p:spPr>
           <a:xfrm>
             <a:off x="2333625" y="5410200"/>
             <a:ext cx="847725" cy="495300"/>
@@ -2580,10 +2601,10 @@
             <a:noFill/>
             <a:prstDash val="solid"/>
           </a:ln>
-        </ns0:spPr>
-        <ns0:txBody>
+        </p:spPr>
+        <p:txBody>
           <a:bodyPr wrap="square" lIns="19050" tIns="0" rIns="19050" bIns="0" anchor="ctr">
-            <a:normAutofit/>
+            <a:normAutofit fontScale="77500" lnSpcReduction="20000"/>
           </a:bodyPr>
           <a:lstStyle/>
           <a:p>
@@ -2656,23 +2677,23 @@
               <a:cs typeface="Microsoft YaHei UI"/>
             </a:endParaRPr>
           </a:p>
-        </ns0:txBody>
-      </ns0:sp>
-      <ns0:sp>
-        <ns0:nvSpPr>
-          <ns0:cNvPr id="62" name="矩形 61">
-            <a:extLst>
-              <a:ext uri="{FF2B5EF4-FFF2-40B4-BE49-F238E27FC236}">
-                <ns2:creationId id="{086F0C98-B0C6-758D-332E-850C22E19362}"/>
-              </a:ext>
-            </a:extLst>
-          </ns0:cNvPr>
-          <ns0:cNvSpPr>
-            <a:spLocks noGrp="1"/>
-          </ns0:cNvSpPr>
-          <ns0:nvPr/>
-        </ns0:nvSpPr>
-        <ns0:spPr>
+        </p:txBody>
+      </p:sp>
+      <p:sp>
+        <p:nvSpPr>
+          <p:cNvPr id="62" name="矩形 61">
+            <a:extLst>
+              <a:ext uri="{FF2B5EF4-FFF2-40B4-BE49-F238E27FC236}">
+                <a16:creationId xmlns:a16="http://schemas.microsoft.com/office/drawing/2014/main" id="{086F0C98-B0C6-758D-332E-850C22E19362}"/>
+              </a:ext>
+            </a:extLst>
+          </p:cNvPr>
+          <p:cNvSpPr>
+            <a:spLocks noGrp="1"/>
+          </p:cNvSpPr>
+          <p:nvPr/>
+        </p:nvSpPr>
+        <p:spPr>
           <a:xfrm>
             <a:off x="3762375" y="5410200"/>
             <a:ext cx="1209675" cy="495300"/>
@@ -2685,10 +2706,10 @@
             <a:noFill/>
             <a:prstDash val="solid"/>
           </a:ln>
-        </ns0:spPr>
-        <ns0:txBody>
+        </p:spPr>
+        <p:txBody>
           <a:bodyPr wrap="square" lIns="19050" tIns="0" rIns="19050" bIns="0" anchor="ctr">
-            <a:normAutofit fontScale="97625"/>
+            <a:normAutofit fontScale="90125" lnSpcReduction="10000"/>
           </a:bodyPr>
           <a:lstStyle/>
           <a:p>
@@ -2761,23 +2782,23 @@
               <a:cs typeface="Microsoft YaHei UI"/>
             </a:endParaRPr>
           </a:p>
-        </ns0:txBody>
-      </ns0:sp>
-      <ns0:sp>
-        <ns0:nvSpPr>
-          <ns0:cNvPr id="63" name="矩形 62">
-            <a:extLst>
-              <a:ext uri="{FF2B5EF4-FFF2-40B4-BE49-F238E27FC236}">
-                <ns2:creationId id="{7201E3F8-CCEA-397F-FF9A-FE53ED53BA64}"/>
-              </a:ext>
-            </a:extLst>
-          </ns0:cNvPr>
-          <ns0:cNvSpPr>
-            <a:spLocks noGrp="1"/>
-          </ns0:cNvSpPr>
-          <ns0:nvPr/>
-        </ns0:nvSpPr>
-        <ns0:spPr>
+        </p:txBody>
+      </p:sp>
+      <p:sp>
+        <p:nvSpPr>
+          <p:cNvPr id="63" name="矩形 62">
+            <a:extLst>
+              <a:ext uri="{FF2B5EF4-FFF2-40B4-BE49-F238E27FC236}">
+                <a16:creationId xmlns:a16="http://schemas.microsoft.com/office/drawing/2014/main" id="{7201E3F8-CCEA-397F-FF9A-FE53ED53BA64}"/>
+              </a:ext>
+            </a:extLst>
+          </p:cNvPr>
+          <p:cNvSpPr>
+            <a:spLocks noGrp="1"/>
+          </p:cNvSpPr>
+          <p:nvPr/>
+        </p:nvSpPr>
+        <p:spPr>
           <a:xfrm>
             <a:off x="5448300" y="5410200"/>
             <a:ext cx="952500" cy="495300"/>
@@ -2790,10 +2811,10 @@
             <a:noFill/>
             <a:prstDash val="solid"/>
           </a:ln>
-        </ns0:spPr>
-        <ns0:txBody>
+        </p:spPr>
+        <p:txBody>
           <a:bodyPr wrap="square" lIns="19050" tIns="0" rIns="19050" bIns="0" anchor="ctr">
-            <a:normAutofit fontScale="88919"/>
+            <a:normAutofit fontScale="73919" lnSpcReduction="20000"/>
           </a:bodyPr>
           <a:lstStyle/>
           <a:p>
@@ -2866,23 +2887,23 @@
               <a:cs typeface="Microsoft YaHei UI"/>
             </a:endParaRPr>
           </a:p>
-        </ns0:txBody>
-      </ns0:sp>
-      <ns0:sp>
-        <ns0:nvSpPr>
-          <ns0:cNvPr id="64" name="矩形 63">
-            <a:extLst>
-              <a:ext uri="{FF2B5EF4-FFF2-40B4-BE49-F238E27FC236}">
-                <ns2:creationId id="{DD02D4F7-F8B5-2DFC-A836-69888195F911}"/>
-              </a:ext>
-            </a:extLst>
-          </ns0:cNvPr>
-          <ns0:cNvSpPr>
-            <a:spLocks noGrp="1"/>
-          </ns0:cNvSpPr>
-          <ns0:nvPr/>
-        </ns0:nvSpPr>
-        <ns0:spPr>
+        </p:txBody>
+      </p:sp>
+      <p:sp>
+        <p:nvSpPr>
+          <p:cNvPr id="64" name="矩形 63">
+            <a:extLst>
+              <a:ext uri="{FF2B5EF4-FFF2-40B4-BE49-F238E27FC236}">
+                <a16:creationId xmlns:a16="http://schemas.microsoft.com/office/drawing/2014/main" id="{DD02D4F7-F8B5-2DFC-A836-69888195F911}"/>
+              </a:ext>
+            </a:extLst>
+          </p:cNvPr>
+          <p:cNvSpPr>
+            <a:spLocks noGrp="1"/>
+          </p:cNvSpPr>
+          <p:nvPr/>
+        </p:nvSpPr>
+        <p:spPr>
           <a:xfrm>
             <a:off x="762000" y="2381250"/>
             <a:ext cx="5715000" cy="323850"/>
@@ -2895,10 +2916,10 @@
             <a:noFill/>
             <a:prstDash val="solid"/>
           </a:ln>
-        </ns0:spPr>
-        <ns0:txBody>
+        </p:spPr>
+        <p:txBody>
           <a:bodyPr wrap="square" lIns="19050" tIns="0" rIns="19050" bIns="0" anchor="ctr">
-            <a:normAutofit/>
+            <a:normAutofit fontScale="92500" lnSpcReduction="10000"/>
           </a:bodyPr>
           <a:lstStyle/>
           <a:p>
@@ -2913,7 +2934,7 @@
               </a:defRPr>
             </a:pPr>
             <a:r>
-              <a:rPr sz="1950" b="1" dirty="0" err="1">
+              <a:rPr sz="2400" b="1" dirty="0" err="1">
                 <a:solidFill>
                   <a:srgbClr val="FFFFFF"/>
                 </a:solidFill>
@@ -2923,7 +2944,7 @@
               </a:rPr>
               <a:t>Today: separate plugins, separate wiring</a:t>
             </a:r>
-            <a:endParaRPr sz="1950" b="1" dirty="0">
+            <a:endParaRPr sz="2400" b="1" dirty="0">
               <a:solidFill>
                 <a:srgbClr val="FFFFFF"/>
               </a:solidFill>
@@ -2932,23 +2953,23 @@
               <a:cs typeface="Microsoft YaHei UI"/>
             </a:endParaRPr>
           </a:p>
-        </ns0:txBody>
-      </ns0:sp>
-      <ns0:sp>
-        <ns0:nvSpPr>
-          <ns0:cNvPr id="65" name="矩形: 圆角 64">
-            <a:extLst>
-              <a:ext uri="{FF2B5EF4-FFF2-40B4-BE49-F238E27FC236}">
-                <ns2:creationId id="{D1E5FE4A-4FA2-9C87-3E56-F35B075D23F7}"/>
-              </a:ext>
-            </a:extLst>
-          </ns0:cNvPr>
-          <ns0:cNvSpPr>
-            <a:spLocks noGrp="1"/>
-          </ns0:cNvSpPr>
-          <ns0:nvPr/>
-        </ns0:nvSpPr>
-        <ns0:spPr>
+        </p:txBody>
+      </p:sp>
+      <p:sp>
+        <p:nvSpPr>
+          <p:cNvPr id="65" name="矩形: 圆角 64">
+            <a:extLst>
+              <a:ext uri="{FF2B5EF4-FFF2-40B4-BE49-F238E27FC236}">
+                <a16:creationId xmlns:a16="http://schemas.microsoft.com/office/drawing/2014/main" id="{D1E5FE4A-4FA2-9C87-3E56-F35B075D23F7}"/>
+              </a:ext>
+            </a:extLst>
+          </p:cNvPr>
+          <p:cNvSpPr>
+            <a:spLocks noGrp="1"/>
+          </p:cNvSpPr>
+          <p:nvPr/>
+        </p:nvSpPr>
+        <p:spPr>
           <a:xfrm>
             <a:off x="190500" y="6226124"/>
             <a:ext cx="6677025" cy="514350"/>
@@ -2969,30 +2990,30 @@
             </a:solidFill>
             <a:prstDash val="solid"/>
           </a:ln>
-        </ns0:spPr>
-        <ns0:txBody>
+        </p:spPr>
+        <p:txBody>
           <a:bodyPr/>
           <a:lstStyle/>
           <a:p>
             <a:endParaRPr lang="zh-CN" altLang="en-US"/>
           </a:p>
-        </ns0:txBody>
-      </ns0:sp>
-      <ns0:sp>
-        <ns0:nvSpPr>
-          <ns0:cNvPr id="66" name="矩形 65">
-            <a:extLst>
-              <a:ext uri="{FF2B5EF4-FFF2-40B4-BE49-F238E27FC236}">
-                <ns2:creationId id="{8FFFC75E-ED45-4085-486F-D347119F48FD}"/>
-              </a:ext>
-            </a:extLst>
-          </ns0:cNvPr>
-          <ns0:cNvSpPr>
-            <a:spLocks noGrp="1"/>
-          </ns0:cNvSpPr>
-          <ns0:nvPr/>
-        </ns0:nvSpPr>
-        <ns0:spPr>
+        </p:txBody>
+      </p:sp>
+      <p:sp>
+        <p:nvSpPr>
+          <p:cNvPr id="66" name="矩形 65">
+            <a:extLst>
+              <a:ext uri="{FF2B5EF4-FFF2-40B4-BE49-F238E27FC236}">
+                <a16:creationId xmlns:a16="http://schemas.microsoft.com/office/drawing/2014/main" id="{8FFFC75E-ED45-4085-486F-D347119F48FD}"/>
+              </a:ext>
+            </a:extLst>
+          </p:cNvPr>
+          <p:cNvSpPr>
+            <a:spLocks noGrp="1"/>
+          </p:cNvSpPr>
+          <p:nvPr/>
+        </p:nvSpPr>
+        <p:spPr>
           <a:xfrm>
             <a:off x="1743075" y="6305741"/>
             <a:ext cx="352425" cy="352425"/>
@@ -3005,8 +3026,8 @@
             <a:noFill/>
             <a:prstDash val="solid"/>
           </a:ln>
-        </ns0:spPr>
-        <ns0:txBody>
+        </p:spPr>
+        <p:txBody>
           <a:bodyPr wrap="square" lIns="0" tIns="0" rIns="0" bIns="0" anchor="ctr">
             <a:normAutofit/>
           </a:bodyPr>
@@ -3031,23 +3052,23 @@
               <a:cs typeface="Segoe UI Symbol"/>
             </a:endParaRPr>
           </a:p>
-        </ns0:txBody>
-      </ns0:sp>
-      <ns0:sp>
-        <ns0:nvSpPr>
-          <ns0:cNvPr id="67" name="矩形 66">
-            <a:extLst>
-              <a:ext uri="{FF2B5EF4-FFF2-40B4-BE49-F238E27FC236}">
-                <ns2:creationId id="{F125C4EA-CA52-5A20-79F4-228C5E48CE12}"/>
-              </a:ext>
-            </a:extLst>
-          </ns0:cNvPr>
-          <ns0:cNvSpPr>
-            <a:spLocks noGrp="1"/>
-          </ns0:cNvSpPr>
-          <ns0:nvPr/>
-        </ns0:nvSpPr>
-        <ns0:spPr>
+        </p:txBody>
+      </p:sp>
+      <p:sp>
+        <p:nvSpPr>
+          <p:cNvPr id="67" name="矩形 66">
+            <a:extLst>
+              <a:ext uri="{FF2B5EF4-FFF2-40B4-BE49-F238E27FC236}">
+                <a16:creationId xmlns:a16="http://schemas.microsoft.com/office/drawing/2014/main" id="{F125C4EA-CA52-5A20-79F4-228C5E48CE12}"/>
+              </a:ext>
+            </a:extLst>
+          </p:cNvPr>
+          <p:cNvSpPr>
+            <a:spLocks noGrp="1"/>
+          </p:cNvSpPr>
+          <p:nvPr/>
+        </p:nvSpPr>
+        <p:spPr>
           <a:xfrm>
             <a:off x="2190750" y="6310503"/>
             <a:ext cx="2667000" cy="342900"/>
@@ -3060,8 +3081,8 @@
             <a:noFill/>
             <a:prstDash val="solid"/>
           </a:ln>
-        </ns0:spPr>
-        <ns0:txBody>
+        </p:spPr>
+        <p:txBody>
           <a:bodyPr wrap="square" lIns="19050" tIns="0" rIns="19050" bIns="0" anchor="ctr">
             <a:normAutofit/>
           </a:bodyPr>
@@ -3086,21 +3107,21 @@
               <a:cs typeface="Microsoft YaHei UI"/>
             </a:endParaRPr>
           </a:p>
-        </ns0:txBody>
-      </ns0:sp>
-      <ns0:sp>
-        <ns0:nvSpPr>
-          <ns0:cNvPr id="70" name="文本框 69">
-            <a:extLst>
-              <a:ext uri="{FF2B5EF4-FFF2-40B4-BE49-F238E27FC236}">
-                <ns2:creationId id="{ED6C755E-14C1-F772-29F9-F40665513C79}"/>
-              </a:ext>
-            </a:extLst>
-          </ns0:cNvPr>
-          <ns0:cNvSpPr txBox="1"/>
-          <ns0:nvPr/>
-        </ns0:nvSpPr>
-        <ns0:spPr>
+        </p:txBody>
+      </p:sp>
+      <p:sp>
+        <p:nvSpPr>
+          <p:cNvPr id="70" name="文本框 69">
+            <a:extLst>
+              <a:ext uri="{FF2B5EF4-FFF2-40B4-BE49-F238E27FC236}">
+                <a16:creationId xmlns:a16="http://schemas.microsoft.com/office/drawing/2014/main" id="{ED6C755E-14C1-F772-29F9-F40665513C79}"/>
+              </a:ext>
+            </a:extLst>
+          </p:cNvPr>
+          <p:cNvSpPr txBox="1"/>
+          <p:nvPr/>
+        </p:nvSpPr>
+        <p:spPr>
           <a:xfrm>
             <a:off x="2090737" y="6279845"/>
             <a:ext cx="2867025" cy="400110"/>
@@ -3109,8 +3130,8 @@
             <a:avLst/>
           </a:prstGeom>
           <a:noFill/>
-        </ns0:spPr>
-        <ns0:txBody>
+        </p:spPr>
+        <p:txBody>
           <a:bodyPr wrap="square" rtlCol="0">
             <a:spAutoFit/>
           </a:bodyPr>
@@ -3128,23 +3149,23 @@
               <a:t>😔 Too much wiring</a:t>
             </a:r>
           </a:p>
-        </ns0:txBody>
-      </ns0:sp>
-      <ns0:sp>
-        <ns0:nvSpPr>
-          <ns0:cNvPr id="71" name="矩形: 圆角 70">
-            <a:extLst>
-              <a:ext uri="{FF2B5EF4-FFF2-40B4-BE49-F238E27FC236}">
-                <ns2:creationId id="{EEC95D3B-4395-5D72-2831-2DD2F0546AC6}"/>
-              </a:ext>
-            </a:extLst>
-          </ns0:cNvPr>
-          <ns0:cNvSpPr>
-            <a:spLocks noGrp="1"/>
-          </ns0:cNvSpPr>
-          <ns0:nvPr/>
-        </ns0:nvSpPr>
-        <ns0:spPr>
+        </p:txBody>
+      </p:sp>
+      <p:sp>
+        <p:nvSpPr>
+          <p:cNvPr id="71" name="矩形: 圆角 70">
+            <a:extLst>
+              <a:ext uri="{FF2B5EF4-FFF2-40B4-BE49-F238E27FC236}">
+                <a16:creationId xmlns:a16="http://schemas.microsoft.com/office/drawing/2014/main" id="{EEC95D3B-4395-5D72-2831-2DD2F0546AC6}"/>
+              </a:ext>
+            </a:extLst>
+          </p:cNvPr>
+          <p:cNvSpPr>
+            <a:spLocks noGrp="1"/>
+          </p:cNvSpPr>
+          <p:nvPr/>
+        </p:nvSpPr>
+        <p:spPr>
           <a:xfrm>
             <a:off x="7296150" y="2264927"/>
             <a:ext cx="7115175" cy="4516874"/>
@@ -3161,8 +3182,8 @@
             <a:noFill/>
             <a:prstDash val="solid"/>
           </a:ln>
-        </ns0:spPr>
-        <ns0:style>
+        </p:spPr>
+        <p:style>
           <a:lnRef idx="0">
             <a:scrgbClr r="0" g="0" b="0"/>
           </a:lnRef>
@@ -3173,30 +3194,30 @@
             <a:scrgbClr r="0" g="0" b="0"/>
           </a:effectRef>
           <a:fontRef idx="major"/>
-        </ns0:style>
-        <ns0:txBody>
+        </p:style>
+        <p:txBody>
           <a:bodyPr/>
           <a:lstStyle/>
           <a:p>
             <a:endParaRPr lang="zh-CN" altLang="en-US"/>
           </a:p>
-        </ns0:txBody>
-      </ns0:sp>
-      <ns0:sp>
-        <ns0:nvSpPr>
-          <ns0:cNvPr id="72" name="矩形: 圆角 71">
-            <a:extLst>
-              <a:ext uri="{FF2B5EF4-FFF2-40B4-BE49-F238E27FC236}">
-                <ns2:creationId id="{93920E00-A7E9-31DB-542B-74064A2C534A}"/>
-              </a:ext>
-            </a:extLst>
-          </ns0:cNvPr>
-          <ns0:cNvSpPr>
-            <a:spLocks noGrp="1"/>
-          </ns0:cNvSpPr>
-          <ns0:nvPr/>
-        </ns0:nvSpPr>
-        <ns0:spPr>
+        </p:txBody>
+      </p:sp>
+      <p:sp>
+        <p:nvSpPr>
+          <p:cNvPr id="72" name="矩形: 圆角 71">
+            <a:extLst>
+              <a:ext uri="{FF2B5EF4-FFF2-40B4-BE49-F238E27FC236}">
+                <a16:creationId xmlns:a16="http://schemas.microsoft.com/office/drawing/2014/main" id="{93920E00-A7E9-31DB-542B-74064A2C534A}"/>
+              </a:ext>
+            </a:extLst>
+          </p:cNvPr>
+          <p:cNvSpPr>
+            <a:spLocks noGrp="1"/>
+          </p:cNvSpPr>
+          <p:nvPr/>
+        </p:nvSpPr>
+        <p:spPr>
           <a:xfrm>
             <a:off x="7296150" y="2209800"/>
             <a:ext cx="7115175" cy="619125"/>
@@ -3221,33 +3242,33 @@
             <a:noFill/>
             <a:prstDash val="solid"/>
           </a:ln>
-        </ns0:spPr>
-        <ns0:txBody>
+        </p:spPr>
+        <p:txBody>
           <a:bodyPr/>
           <a:lstStyle/>
           <a:p>
             <a:endParaRPr lang="zh-CN" altLang="en-US"/>
           </a:p>
-        </ns0:txBody>
-      </ns0:sp>
-      <ns0:sp>
-        <ns0:nvSpPr>
-          <ns0:cNvPr id="73" name="矩形 72">
-            <a:extLst>
-              <a:ext uri="{FF2B5EF4-FFF2-40B4-BE49-F238E27FC236}">
-                <ns2:creationId id="{15C608D0-ED77-F7A4-3D94-165E74DD9F5B}"/>
-              </a:ext>
-            </a:extLst>
-          </ns0:cNvPr>
-          <ns0:cNvSpPr>
-            <a:spLocks noGrp="1"/>
-          </ns0:cNvSpPr>
-          <ns0:nvPr/>
-        </ns0:nvSpPr>
-        <ns0:spPr>
-          <a:xfrm>
-            <a:off x="9391650" y="2381250"/>
-            <a:ext cx="2905125" cy="333375"/>
+        </p:txBody>
+      </p:sp>
+      <p:sp>
+        <p:nvSpPr>
+          <p:cNvPr id="73" name="矩形 72">
+            <a:extLst>
+              <a:ext uri="{FF2B5EF4-FFF2-40B4-BE49-F238E27FC236}">
+                <a16:creationId xmlns:a16="http://schemas.microsoft.com/office/drawing/2014/main" id="{15C608D0-ED77-F7A4-3D94-165E74DD9F5B}"/>
+              </a:ext>
+            </a:extLst>
+          </p:cNvPr>
+          <p:cNvSpPr>
+            <a:spLocks noGrp="1"/>
+          </p:cNvSpPr>
+          <p:nvPr/>
+        </p:nvSpPr>
+        <p:spPr>
+          <a:xfrm>
+            <a:off x="9097328" y="2381250"/>
+            <a:ext cx="3592512" cy="333375"/>
           </a:xfrm>
           <a:prstGeom prst="rect">
             <a:avLst/>
@@ -3257,10 +3278,10 @@
             <a:noFill/>
             <a:prstDash val="solid"/>
           </a:ln>
-        </ns0:spPr>
-        <ns0:txBody>
+        </p:spPr>
+        <p:txBody>
           <a:bodyPr wrap="square" lIns="19050" tIns="0" rIns="19050" bIns="0" anchor="ctr">
-            <a:normAutofit/>
+            <a:noAutofit/>
           </a:bodyPr>
           <a:lstStyle/>
           <a:p>
@@ -3275,7 +3296,7 @@
               </a:defRPr>
             </a:pPr>
             <a:r>
-              <a:rPr sz="2100" dirty="0" err="1">
+              <a:rPr sz="2200" dirty="0" err="1">
                 <a:solidFill>
                   <a:srgbClr val="FFFFFF"/>
                 </a:solidFill>
@@ -3285,7 +3306,7 @@
               </a:rPr>
               <a:t>Now: one dual-layer node</a:t>
             </a:r>
-            <a:endParaRPr sz="2100" dirty="0">
+            <a:endParaRPr sz="2200" dirty="0">
               <a:solidFill>
                 <a:srgbClr val="FFFFFF"/>
               </a:solidFill>
@@ -3294,35 +3315,35 @@
               <a:cs typeface="Microsoft YaHei UI"/>
             </a:endParaRPr>
           </a:p>
-        </ns0:txBody>
-      </ns0:sp>
-      <ns0:pic>
-        <ns0:nvPicPr>
-          <ns0:cNvPr id="77" name="图片 76">
-            <a:extLst>
-              <a:ext uri="{FF2B5EF4-FFF2-40B4-BE49-F238E27FC236}">
-                <ns2:creationId id="{72F80A0B-B8BC-C271-5042-AFE61C0AEFB1}"/>
-              </a:ext>
-            </a:extLst>
-          </ns0:cNvPr>
-          <ns0:cNvPicPr>
+        </p:txBody>
+      </p:sp>
+      <p:pic>
+        <p:nvPicPr>
+          <p:cNvPr id="77" name="图片 76">
+            <a:extLst>
+              <a:ext uri="{FF2B5EF4-FFF2-40B4-BE49-F238E27FC236}">
+                <a16:creationId xmlns:a16="http://schemas.microsoft.com/office/drawing/2014/main" id="{72F80A0B-B8BC-C271-5042-AFE61C0AEFB1}"/>
+              </a:ext>
+            </a:extLst>
+          </p:cNvPr>
+          <p:cNvPicPr>
             <a:picLocks noChangeAspect="1"/>
-          </ns0:cNvPicPr>
-          <ns0:nvPr/>
-        </ns0:nvPicPr>
-        <ns0:blipFill>
-          <a:blip ns3:embed="rId6">
+          </p:cNvPicPr>
+          <p:nvPr/>
+        </p:nvPicPr>
+        <p:blipFill>
+          <a:blip r:embed="rId6">
             <a:extLst>
               <a:ext uri="{28A0092B-C50C-407E-A947-70E740481C1C}">
-                <ns4:useLocalDpi val="0"/>
+                <a14:useLocalDpi xmlns:a14="http://schemas.microsoft.com/office/drawing/2010/main" val="0"/>
               </a:ext>
             </a:extLst>
           </a:blip>
           <a:stretch>
             <a:fillRect/>
           </a:stretch>
-        </ns0:blipFill>
-        <ns0:spPr>
+        </p:blipFill>
+        <p:spPr>
           <a:xfrm>
             <a:off x="7676197" y="2800575"/>
             <a:ext cx="6515100" cy="3467100"/>
@@ -3330,23 +3351,23 @@
           <a:prstGeom prst="rect">
             <a:avLst/>
           </a:prstGeom>
-        </ns0:spPr>
-      </ns0:pic>
-      <ns0:sp>
-        <ns0:nvSpPr>
-          <ns0:cNvPr id="79" name="矩形: 圆角 78">
-            <a:extLst>
-              <a:ext uri="{FF2B5EF4-FFF2-40B4-BE49-F238E27FC236}">
-                <ns2:creationId id="{7C9D0F4D-6E5C-04DB-95C8-505CE77DD0C2}"/>
-              </a:ext>
-            </a:extLst>
-          </ns0:cNvPr>
-          <ns0:cNvSpPr>
-            <a:spLocks noGrp="1"/>
-          </ns0:cNvSpPr>
-          <ns0:nvPr/>
-        </ns0:nvSpPr>
-        <ns0:spPr>
+        </p:spPr>
+      </p:pic>
+      <p:sp>
+        <p:nvSpPr>
+          <p:cNvPr id="79" name="矩形: 圆角 78">
+            <a:extLst>
+              <a:ext uri="{FF2B5EF4-FFF2-40B4-BE49-F238E27FC236}">
+                <a16:creationId xmlns:a16="http://schemas.microsoft.com/office/drawing/2014/main" id="{7C9D0F4D-6E5C-04DB-95C8-505CE77DD0C2}"/>
+              </a:ext>
+            </a:extLst>
+          </p:cNvPr>
+          <p:cNvSpPr>
+            <a:spLocks noGrp="1"/>
+          </p:cNvSpPr>
+          <p:nvPr/>
+        </p:nvSpPr>
+        <p:spPr>
           <a:xfrm>
             <a:off x="7371713" y="6226124"/>
             <a:ext cx="6948000" cy="514350"/>
@@ -3365,28 +3386,28 @@
             </a:solidFill>
             <a:prstDash val="solid"/>
           </a:ln>
-        </ns0:spPr>
-        <ns0:txBody>
+        </p:spPr>
+        <p:txBody>
           <a:bodyPr/>
           <a:lstStyle/>
           <a:p>
             <a:endParaRPr lang="zh-CN" altLang="en-US"/>
           </a:p>
-        </ns0:txBody>
-      </ns0:sp>
-      <ns0:sp>
-        <ns0:nvSpPr>
-          <ns0:cNvPr id="80" name="文本框 79">
-            <a:extLst>
-              <a:ext uri="{FF2B5EF4-FFF2-40B4-BE49-F238E27FC236}">
-                <ns2:creationId id="{24D237B2-C39D-B3C0-F48A-6C0A35E1CF53}"/>
-              </a:ext>
-            </a:extLst>
-          </ns0:cNvPr>
-          <ns0:cNvSpPr txBox="1"/>
-          <ns0:nvPr/>
-        </ns0:nvSpPr>
-        <ns0:spPr>
+        </p:txBody>
+      </p:sp>
+      <p:sp>
+        <p:nvSpPr>
+          <p:cNvPr id="80" name="文本框 79">
+            <a:extLst>
+              <a:ext uri="{FF2B5EF4-FFF2-40B4-BE49-F238E27FC236}">
+                <a16:creationId xmlns:a16="http://schemas.microsoft.com/office/drawing/2014/main" id="{24D237B2-C39D-B3C0-F48A-6C0A35E1CF53}"/>
+              </a:ext>
+            </a:extLst>
+          </p:cNvPr>
+          <p:cNvSpPr txBox="1"/>
+          <p:nvPr/>
+        </p:nvSpPr>
+        <p:spPr>
           <a:xfrm>
             <a:off x="9439910" y="6279845"/>
             <a:ext cx="3847827" cy="400110"/>
@@ -3395,8 +3416,8 @@
             <a:avLst/>
           </a:prstGeom>
           <a:noFill/>
-        </ns0:spPr>
-        <ns0:txBody>
+        </p:spPr>
+        <p:txBody>
           <a:bodyPr wrap="square" rtlCol="0">
             <a:spAutoFit/>
           </a:bodyPr>
@@ -3411,26 +3432,26 @@
                 <a:ea typeface="思源黑体 CN Bold" panose="020B0800000000000000" pitchFamily="34" charset="-122"/>
                 <a:cs typeface="Microsoft YaHei UI"/>
               </a:rPr>
-              <a:t>😊 Stack both layers.</a:t>
+              <a:t>😊 Stack both outputs.</a:t>
             </a:r>
           </a:p>
-        </ns0:txBody>
-      </ns0:sp>
-      <ns0:sp>
-        <ns0:nvSpPr>
-          <ns0:cNvPr id="81" name="矩形: 圆角 80">
-            <a:extLst>
-              <a:ext uri="{FF2B5EF4-FFF2-40B4-BE49-F238E27FC236}">
-                <ns2:creationId id="{7D78387B-D057-8703-D10F-F9B0705B83C7}"/>
-              </a:ext>
-            </a:extLst>
-          </ns0:cNvPr>
-          <ns0:cNvSpPr>
-            <a:spLocks noGrp="1"/>
-          </ns0:cNvSpPr>
-          <ns0:nvPr/>
-        </ns0:nvSpPr>
-        <ns0:spPr>
+        </p:txBody>
+      </p:sp>
+      <p:sp>
+        <p:nvSpPr>
+          <p:cNvPr id="81" name="矩形: 圆角 80">
+            <a:extLst>
+              <a:ext uri="{FF2B5EF4-FFF2-40B4-BE49-F238E27FC236}">
+                <a16:creationId xmlns:a16="http://schemas.microsoft.com/office/drawing/2014/main" id="{7D78387B-D057-8703-D10F-F9B0705B83C7}"/>
+              </a:ext>
+            </a:extLst>
+          </p:cNvPr>
+          <p:cNvSpPr>
+            <a:spLocks noGrp="1"/>
+          </p:cNvSpPr>
+          <p:nvPr/>
+        </p:nvSpPr>
+        <p:spPr>
           <a:xfrm>
             <a:off x="152400" y="6886575"/>
             <a:ext cx="14268450" cy="2038350"/>
@@ -3447,8 +3468,8 @@
             <a:noFill/>
             <a:prstDash val="solid"/>
           </a:ln>
-        </ns0:spPr>
-        <ns0:style>
+        </p:spPr>
+        <p:style>
           <a:lnRef idx="0">
             <a:scrgbClr r="0" g="0" b="0"/>
           </a:lnRef>
@@ -3459,30 +3480,30 @@
             <a:scrgbClr r="0" g="0" b="0"/>
           </a:effectRef>
           <a:fontRef idx="major"/>
-        </ns0:style>
-        <ns0:txBody>
+        </p:style>
+        <p:txBody>
           <a:bodyPr/>
           <a:lstStyle/>
           <a:p>
             <a:endParaRPr lang="zh-CN" altLang="en-US"/>
           </a:p>
-        </ns0:txBody>
-      </ns0:sp>
-      <ns0:sp>
-        <ns0:nvSpPr>
-          <ns0:cNvPr id="82" name="矩形 81">
-            <a:extLst>
-              <a:ext uri="{FF2B5EF4-FFF2-40B4-BE49-F238E27FC236}">
-                <ns2:creationId id="{35DE6DEF-77C3-21E8-1C9C-005434D29A5B}"/>
-              </a:ext>
-            </a:extLst>
-          </ns0:cNvPr>
-          <ns0:cNvSpPr>
-            <a:spLocks noGrp="1"/>
-          </ns0:cNvSpPr>
-          <ns0:nvPr/>
-        </ns0:nvSpPr>
-        <ns0:spPr>
+        </p:txBody>
+      </p:sp>
+      <p:sp>
+        <p:nvSpPr>
+          <p:cNvPr id="82" name="矩形 81">
+            <a:extLst>
+              <a:ext uri="{FF2B5EF4-FFF2-40B4-BE49-F238E27FC236}">
+                <a16:creationId xmlns:a16="http://schemas.microsoft.com/office/drawing/2014/main" id="{35DE6DEF-77C3-21E8-1C9C-005434D29A5B}"/>
+              </a:ext>
+            </a:extLst>
+          </p:cNvPr>
+          <p:cNvSpPr>
+            <a:spLocks noGrp="1"/>
+          </p:cNvSpPr>
+          <p:nvPr/>
+        </p:nvSpPr>
+        <p:spPr>
           <a:xfrm>
             <a:off x="352425" y="7067550"/>
             <a:ext cx="2095500" cy="295275"/>
@@ -3495,10 +3516,10 @@
             <a:noFill/>
             <a:prstDash val="solid"/>
           </a:ln>
-        </ns0:spPr>
-        <ns0:txBody>
+        </p:spPr>
+        <p:txBody>
           <a:bodyPr wrap="square" lIns="19050" tIns="0" rIns="19050" bIns="0" anchor="ctr">
-            <a:normAutofit/>
+            <a:normAutofit fontScale="85000" lnSpcReduction="10000"/>
           </a:bodyPr>
           <a:lstStyle/>
           <a:p>
@@ -3524,23 +3545,23 @@
               <a:t>Two acceleration layers</a:t>
             </a:r>
           </a:p>
-        </ns0:txBody>
-      </ns0:sp>
-      <ns0:sp>
-        <ns0:nvSpPr>
-          <ns0:cNvPr id="83" name="矩形: 圆角 82">
-            <a:extLst>
-              <a:ext uri="{FF2B5EF4-FFF2-40B4-BE49-F238E27FC236}">
-                <ns2:creationId id="{06E57A99-AE5A-8848-501B-9A608A0FA4D7}"/>
-              </a:ext>
-            </a:extLst>
-          </ns0:cNvPr>
-          <ns0:cNvSpPr>
-            <a:spLocks noGrp="1"/>
-          </ns0:cNvSpPr>
-          <ns0:nvPr/>
-        </ns0:nvSpPr>
-        <ns0:spPr>
+        </p:txBody>
+      </p:sp>
+      <p:sp>
+        <p:nvSpPr>
+          <p:cNvPr id="83" name="矩形: 圆角 82">
+            <a:extLst>
+              <a:ext uri="{FF2B5EF4-FFF2-40B4-BE49-F238E27FC236}">
+                <a16:creationId xmlns:a16="http://schemas.microsoft.com/office/drawing/2014/main" id="{06E57A99-AE5A-8848-501B-9A608A0FA4D7}"/>
+              </a:ext>
+            </a:extLst>
+          </p:cNvPr>
+          <p:cNvSpPr>
+            <a:spLocks noGrp="1"/>
+          </p:cNvSpPr>
+          <p:nvPr/>
+        </p:nvSpPr>
+        <p:spPr>
           <a:xfrm>
             <a:off x="342900" y="7419975"/>
             <a:ext cx="1333500" cy="1295400"/>
@@ -3559,8 +3580,8 @@
             </a:solidFill>
             <a:prstDash val="solid"/>
           </a:ln>
-        </ns0:spPr>
-        <ns0:style>
+        </p:spPr>
+        <p:style>
           <a:lnRef idx="0">
             <a:scrgbClr r="0" g="0" b="0"/>
           </a:lnRef>
@@ -3571,8 +3592,8 @@
             <a:scrgbClr r="0" g="0" b="0"/>
           </a:effectRef>
           <a:fontRef idx="major"/>
-        </ns0:style>
-        <ns0:txBody>
+        </p:style>
+        <p:txBody>
           <a:bodyPr/>
           <a:lstStyle/>
           <a:p>
@@ -3581,23 +3602,23 @@
               <a:ea typeface="思源黑体 CN Bold" panose="020B0800000000000000" pitchFamily="34" charset="-122"/>
             </a:endParaRPr>
           </a:p>
-        </ns0:txBody>
-      </ns0:sp>
-      <ns0:sp>
-        <ns0:nvSpPr>
-          <ns0:cNvPr id="84" name="矩形 83">
-            <a:extLst>
-              <a:ext uri="{FF2B5EF4-FFF2-40B4-BE49-F238E27FC236}">
-                <ns2:creationId id="{8DEBB4FB-0B9C-94F8-3B38-EBD9367A9DF4}"/>
-              </a:ext>
-            </a:extLst>
-          </ns0:cNvPr>
-          <ns0:cNvSpPr>
-            <a:spLocks noGrp="1"/>
-          </ns0:cNvSpPr>
-          <ns0:nvPr/>
-        </ns0:nvSpPr>
-        <ns0:spPr>
+        </p:txBody>
+      </p:sp>
+      <p:sp>
+        <p:nvSpPr>
+          <p:cNvPr id="84" name="矩形 83">
+            <a:extLst>
+              <a:ext uri="{FF2B5EF4-FFF2-40B4-BE49-F238E27FC236}">
+                <a16:creationId xmlns:a16="http://schemas.microsoft.com/office/drawing/2014/main" id="{8DEBB4FB-0B9C-94F8-3B38-EBD9367A9DF4}"/>
+              </a:ext>
+            </a:extLst>
+          </p:cNvPr>
+          <p:cNvSpPr>
+            <a:spLocks noGrp="1"/>
+          </p:cNvSpPr>
+          <p:nvPr/>
+        </p:nvSpPr>
+        <p:spPr>
           <a:xfrm>
             <a:off x="457200" y="7591425"/>
             <a:ext cx="1104900" cy="247650"/>
@@ -3610,8 +3631,8 @@
             <a:noFill/>
             <a:prstDash val="solid"/>
           </a:ln>
-        </ns0:spPr>
-        <ns0:txBody>
+        </p:spPr>
+        <p:txBody>
           <a:bodyPr wrap="square" lIns="19050" tIns="0" rIns="19050" bIns="0" anchor="ctr">
             <a:normAutofit/>
           </a:bodyPr>
@@ -3639,23 +3660,23 @@
               <a:t>TeaCache</a:t>
             </a:r>
           </a:p>
-        </ns0:txBody>
-      </ns0:sp>
-      <ns0:sp>
-        <ns0:nvSpPr>
-          <ns0:cNvPr id="85" name="矩形 84">
-            <a:extLst>
-              <a:ext uri="{FF2B5EF4-FFF2-40B4-BE49-F238E27FC236}">
-                <ns2:creationId id="{31376589-A2A5-18B0-3A1A-1DC2348C23BE}"/>
-              </a:ext>
-            </a:extLst>
-          </ns0:cNvPr>
-          <ns0:cNvSpPr>
-            <a:spLocks noGrp="1"/>
-          </ns0:cNvSpPr>
-          <ns0:nvPr/>
-        </ns0:nvSpPr>
-        <ns0:spPr>
+        </p:txBody>
+      </p:sp>
+      <p:sp>
+        <p:nvSpPr>
+          <p:cNvPr id="85" name="矩形 84">
+            <a:extLst>
+              <a:ext uri="{FF2B5EF4-FFF2-40B4-BE49-F238E27FC236}">
+                <a16:creationId xmlns:a16="http://schemas.microsoft.com/office/drawing/2014/main" id="{31376589-A2A5-18B0-3A1A-1DC2348C23BE}"/>
+              </a:ext>
+            </a:extLst>
+          </p:cNvPr>
+          <p:cNvSpPr>
+            <a:spLocks noGrp="1"/>
+          </p:cNvSpPr>
+          <p:nvPr/>
+        </p:nvSpPr>
+        <p:spPr>
           <a:xfrm>
             <a:off x="400050" y="7972425"/>
             <a:ext cx="1219200" cy="514350"/>
@@ -3668,8 +3689,8 @@
             <a:noFill/>
             <a:prstDash val="solid"/>
           </a:ln>
-        </ns0:spPr>
-        <ns0:txBody>
+        </p:spPr>
+        <p:txBody>
           <a:bodyPr wrap="square" lIns="19050" tIns="0" rIns="19050" bIns="0" anchor="ctr">
             <a:normAutofit/>
           </a:bodyPr>
@@ -3698,7 +3719,7 @@
                 <a:ea typeface="思源黑体 CN Bold" panose="020B0800000000000000" pitchFamily="34" charset="-122"/>
                 <a:cs typeface="Microsoft YaHei UI"/>
               </a:rPr>
-              <a:t>Model-level</a:t>
+              <a:t>Model</a:t>
             </a:r>
             <a:r>
               <a:rPr sz="975" b="0" dirty="0">
@@ -3720,7 +3741,7 @@
                 <a:ea typeface="思源黑体 CN Bold" panose="020B0800000000000000" pitchFamily="34" charset="-122"/>
                 <a:cs typeface="Microsoft YaHei UI"/>
               </a:rPr>
-              <a:t>cache criterion</a:t>
+              <a:t>cache</a:t>
             </a:r>
             <a:endParaRPr sz="975" b="0" dirty="0">
               <a:solidFill>
@@ -3755,7 +3776,7 @@
                 <a:ea typeface="思源黑体 CN Bold" panose="020B0800000000000000" pitchFamily="34" charset="-122"/>
                 <a:cs typeface="Microsoft YaHei UI"/>
               </a:rPr>
-              <a:t>Preserves TeaCache logic</a:t>
+              <a:t>TeaCache logic</a:t>
             </a:r>
             <a:endParaRPr sz="975" b="0" dirty="0">
               <a:solidFill>
@@ -3766,23 +3787,23 @@
               <a:cs typeface="Microsoft YaHei UI"/>
             </a:endParaRPr>
           </a:p>
-        </ns0:txBody>
-      </ns0:sp>
-      <ns0:sp>
-        <ns0:nvSpPr>
-          <ns0:cNvPr id="86" name="矩形: 圆角 85">
-            <a:extLst>
-              <a:ext uri="{FF2B5EF4-FFF2-40B4-BE49-F238E27FC236}">
-                <ns2:creationId id="{BDFC1F25-76D7-6B1E-595C-B32164C9E8F4}"/>
-              </a:ext>
-            </a:extLst>
-          </ns0:cNvPr>
-          <ns0:cNvSpPr>
-            <a:spLocks noGrp="1"/>
-          </ns0:cNvSpPr>
-          <ns0:nvPr/>
-        </ns0:nvSpPr>
-        <ns0:spPr>
+        </p:txBody>
+      </p:sp>
+      <p:sp>
+        <p:nvSpPr>
+          <p:cNvPr id="86" name="矩形: 圆角 85">
+            <a:extLst>
+              <a:ext uri="{FF2B5EF4-FFF2-40B4-BE49-F238E27FC236}">
+                <a16:creationId xmlns:a16="http://schemas.microsoft.com/office/drawing/2014/main" id="{BDFC1F25-76D7-6B1E-595C-B32164C9E8F4}"/>
+              </a:ext>
+            </a:extLst>
+          </p:cNvPr>
+          <p:cNvSpPr>
+            <a:spLocks noGrp="1"/>
+          </p:cNvSpPr>
+          <p:nvPr/>
+        </p:nvSpPr>
+        <p:spPr>
           <a:xfrm>
             <a:off x="1743075" y="7419975"/>
             <a:ext cx="1333500" cy="1295400"/>
@@ -3801,8 +3822,8 @@
             </a:solidFill>
             <a:prstDash val="solid"/>
           </a:ln>
-        </ns0:spPr>
-        <ns0:style>
+        </p:spPr>
+        <p:style>
           <a:lnRef idx="0">
             <a:scrgbClr r="0" g="0" b="0"/>
           </a:lnRef>
@@ -3813,8 +3834,8 @@
             <a:scrgbClr r="0" g="0" b="0"/>
           </a:effectRef>
           <a:fontRef idx="major"/>
-        </ns0:style>
-        <ns0:txBody>
+        </p:style>
+        <p:txBody>
           <a:bodyPr/>
           <a:lstStyle/>
           <a:p>
@@ -3823,23 +3844,23 @@
               <a:ea typeface="思源黑体 CN Bold" panose="020B0800000000000000" pitchFamily="34" charset="-122"/>
             </a:endParaRPr>
           </a:p>
-        </ns0:txBody>
-      </ns0:sp>
-      <ns0:sp>
-        <ns0:nvSpPr>
-          <ns0:cNvPr id="87" name="矩形 86">
-            <a:extLst>
-              <a:ext uri="{FF2B5EF4-FFF2-40B4-BE49-F238E27FC236}">
-                <ns2:creationId id="{07C18BF1-2560-9413-D701-FB2A57A6D7AE}"/>
-              </a:ext>
-            </a:extLst>
-          </ns0:cNvPr>
-          <ns0:cNvSpPr>
-            <a:spLocks noGrp="1"/>
-          </ns0:cNvSpPr>
-          <ns0:nvPr/>
-        </ns0:nvSpPr>
-        <ns0:spPr>
+        </p:txBody>
+      </p:sp>
+      <p:sp>
+        <p:nvSpPr>
+          <p:cNvPr id="87" name="矩形 86">
+            <a:extLst>
+              <a:ext uri="{FF2B5EF4-FFF2-40B4-BE49-F238E27FC236}">
+                <a16:creationId xmlns:a16="http://schemas.microsoft.com/office/drawing/2014/main" id="{07C18BF1-2560-9413-D701-FB2A57A6D7AE}"/>
+              </a:ext>
+            </a:extLst>
+          </p:cNvPr>
+          <p:cNvSpPr>
+            <a:spLocks noGrp="1"/>
+          </p:cNvSpPr>
+          <p:nvPr/>
+        </p:nvSpPr>
+        <p:spPr>
           <a:xfrm>
             <a:off x="1857375" y="7591425"/>
             <a:ext cx="1104900" cy="247650"/>
@@ -3852,8 +3873,8 @@
             <a:noFill/>
             <a:prstDash val="solid"/>
           </a:ln>
-        </ns0:spPr>
-        <ns0:txBody>
+        </p:spPr>
+        <p:txBody>
           <a:bodyPr wrap="square" lIns="19050" tIns="0" rIns="19050" bIns="0" anchor="ctr">
             <a:normAutofit/>
           </a:bodyPr>
@@ -3881,23 +3902,23 @@
               <a:t>EasyCache</a:t>
             </a:r>
           </a:p>
-        </ns0:txBody>
-      </ns0:sp>
-      <ns0:sp>
-        <ns0:nvSpPr>
-          <ns0:cNvPr id="88" name="矩形 87">
-            <a:extLst>
-              <a:ext uri="{FF2B5EF4-FFF2-40B4-BE49-F238E27FC236}">
-                <ns2:creationId id="{2CAFEE8C-FC02-55D9-018C-87D04526FF41}"/>
-              </a:ext>
-            </a:extLst>
-          </ns0:cNvPr>
-          <ns0:cNvSpPr>
-            <a:spLocks noGrp="1"/>
-          </ns0:cNvSpPr>
-          <ns0:nvPr/>
-        </ns0:nvSpPr>
-        <ns0:spPr>
+        </p:txBody>
+      </p:sp>
+      <p:sp>
+        <p:nvSpPr>
+          <p:cNvPr id="88" name="矩形 87">
+            <a:extLst>
+              <a:ext uri="{FF2B5EF4-FFF2-40B4-BE49-F238E27FC236}">
+                <a16:creationId xmlns:a16="http://schemas.microsoft.com/office/drawing/2014/main" id="{2CAFEE8C-FC02-55D9-018C-87D04526FF41}"/>
+              </a:ext>
+            </a:extLst>
+          </p:cNvPr>
+          <p:cNvSpPr>
+            <a:spLocks noGrp="1"/>
+          </p:cNvSpPr>
+          <p:nvPr/>
+        </p:nvSpPr>
+        <p:spPr>
           <a:xfrm>
             <a:off x="1800225" y="7972425"/>
             <a:ext cx="1219200" cy="514350"/>
@@ -3910,8 +3931,8 @@
             <a:noFill/>
             <a:prstDash val="solid"/>
           </a:ln>
-        </ns0:spPr>
-        <ns0:txBody>
+        </p:spPr>
+        <p:txBody>
           <a:bodyPr wrap="square" lIns="19050" tIns="0" rIns="19050" bIns="0" anchor="ctr">
             <a:normAutofit/>
           </a:bodyPr>
@@ -3940,7 +3961,7 @@
                 <a:ea typeface="思源黑体 CN Bold" panose="020B0800000000000000" pitchFamily="34" charset="-122"/>
                 <a:cs typeface="Microsoft YaHei UI"/>
               </a:rPr>
-              <a:t>Sampler-level output reuse</a:t>
+              <a:t>Sampler reuse</a:t>
             </a:r>
           </a:p>
           <a:p>
@@ -3967,26 +3988,26 @@
                 <a:ea typeface="思源黑体 CN Bold" panose="020B0800000000000000" pitchFamily="34" charset="-122"/>
                 <a:cs typeface="Microsoft YaHei UI"/>
               </a:rPr>
-              <a:t>Preserves method logic</a:t>
+              <a:t>Original logic</a:t>
             </a:r>
           </a:p>
-        </ns0:txBody>
-      </ns0:sp>
-      <ns0:sp>
-        <ns0:nvSpPr>
-          <ns0:cNvPr id="89" name="矩形: 圆角 88">
-            <a:extLst>
-              <a:ext uri="{FF2B5EF4-FFF2-40B4-BE49-F238E27FC236}">
-                <ns2:creationId id="{BAB9EF3F-301F-A77F-28D5-8711AE56D6E3}"/>
-              </a:ext>
-            </a:extLst>
-          </ns0:cNvPr>
-          <ns0:cNvSpPr>
-            <a:spLocks noGrp="1"/>
-          </ns0:cNvSpPr>
-          <ns0:nvPr/>
-        </ns0:nvSpPr>
-        <ns0:spPr>
+        </p:txBody>
+      </p:sp>
+      <p:sp>
+        <p:nvSpPr>
+          <p:cNvPr id="89" name="矩形: 圆角 88">
+            <a:extLst>
+              <a:ext uri="{FF2B5EF4-FFF2-40B4-BE49-F238E27FC236}">
+                <a16:creationId xmlns:a16="http://schemas.microsoft.com/office/drawing/2014/main" id="{BAB9EF3F-301F-A77F-28D5-8711AE56D6E3}"/>
+              </a:ext>
+            </a:extLst>
+          </p:cNvPr>
+          <p:cNvSpPr>
+            <a:spLocks noGrp="1"/>
+          </p:cNvSpPr>
+          <p:nvPr/>
+        </p:nvSpPr>
+        <p:spPr>
           <a:xfrm>
             <a:off x="3143250" y="7419975"/>
             <a:ext cx="1333500" cy="1295400"/>
@@ -4005,8 +4026,8 @@
             </a:solidFill>
             <a:prstDash val="solid"/>
           </a:ln>
-        </ns0:spPr>
-        <ns0:style>
+        </p:spPr>
+        <p:style>
           <a:lnRef idx="0">
             <a:scrgbClr r="0" g="0" b="0"/>
           </a:lnRef>
@@ -4017,8 +4038,8 @@
             <a:scrgbClr r="0" g="0" b="0"/>
           </a:effectRef>
           <a:fontRef idx="major"/>
-        </ns0:style>
-        <ns0:txBody>
+        </p:style>
+        <p:txBody>
           <a:bodyPr/>
           <a:lstStyle/>
           <a:p>
@@ -4027,23 +4048,23 @@
               <a:ea typeface="思源黑体 CN Bold" panose="020B0800000000000000" pitchFamily="34" charset="-122"/>
             </a:endParaRPr>
           </a:p>
-        </ns0:txBody>
-      </ns0:sp>
-      <ns0:sp>
-        <ns0:nvSpPr>
-          <ns0:cNvPr id="90" name="矩形 89">
-            <a:extLst>
-              <a:ext uri="{FF2B5EF4-FFF2-40B4-BE49-F238E27FC236}">
-                <ns2:creationId id="{AE3D9EBC-708D-DBDD-9CEA-EDA03B10EEDB}"/>
-              </a:ext>
-            </a:extLst>
-          </ns0:cNvPr>
-          <ns0:cNvSpPr>
-            <a:spLocks noGrp="1"/>
-          </ns0:cNvSpPr>
-          <ns0:nvPr/>
-        </ns0:nvSpPr>
-        <ns0:spPr>
+        </p:txBody>
+      </p:sp>
+      <p:sp>
+        <p:nvSpPr>
+          <p:cNvPr id="90" name="矩形 89">
+            <a:extLst>
+              <a:ext uri="{FF2B5EF4-FFF2-40B4-BE49-F238E27FC236}">
+                <a16:creationId xmlns:a16="http://schemas.microsoft.com/office/drawing/2014/main" id="{AE3D9EBC-708D-DBDD-9CEA-EDA03B10EEDB}"/>
+              </a:ext>
+            </a:extLst>
+          </p:cNvPr>
+          <p:cNvSpPr>
+            <a:spLocks noGrp="1"/>
+          </p:cNvSpPr>
+          <p:nvPr/>
+        </p:nvSpPr>
+        <p:spPr>
           <a:xfrm>
             <a:off x="3257550" y="7591425"/>
             <a:ext cx="1104900" cy="247650"/>
@@ -4056,8 +4077,8 @@
             <a:noFill/>
             <a:prstDash val="solid"/>
           </a:ln>
-        </ns0:spPr>
-        <ns0:txBody>
+        </p:spPr>
+        <p:txBody>
           <a:bodyPr wrap="square" lIns="19050" tIns="0" rIns="19050" bIns="0" anchor="ctr">
             <a:normAutofit/>
           </a:bodyPr>
@@ -4085,23 +4106,23 @@
               <a:t>MagCache</a:t>
             </a:r>
           </a:p>
-        </ns0:txBody>
-      </ns0:sp>
-      <ns0:sp>
-        <ns0:nvSpPr>
-          <ns0:cNvPr id="91" name="矩形 90">
-            <a:extLst>
-              <a:ext uri="{FF2B5EF4-FFF2-40B4-BE49-F238E27FC236}">
-                <ns2:creationId id="{D01846DF-2721-CDDB-7D8A-B0F5C62869E2}"/>
-              </a:ext>
-            </a:extLst>
-          </ns0:cNvPr>
-          <ns0:cNvSpPr>
-            <a:spLocks noGrp="1"/>
-          </ns0:cNvSpPr>
-          <ns0:nvPr/>
-        </ns0:nvSpPr>
-        <ns0:spPr>
+        </p:txBody>
+      </p:sp>
+      <p:sp>
+        <p:nvSpPr>
+          <p:cNvPr id="91" name="矩形 90">
+            <a:extLst>
+              <a:ext uri="{FF2B5EF4-FFF2-40B4-BE49-F238E27FC236}">
+                <a16:creationId xmlns:a16="http://schemas.microsoft.com/office/drawing/2014/main" id="{D01846DF-2721-CDDB-7D8A-B0F5C62869E2}"/>
+              </a:ext>
+            </a:extLst>
+          </p:cNvPr>
+          <p:cNvSpPr>
+            <a:spLocks noGrp="1"/>
+          </p:cNvSpPr>
+          <p:nvPr/>
+        </p:nvSpPr>
+        <p:spPr>
           <a:xfrm>
             <a:off x="3200400" y="7972425"/>
             <a:ext cx="1219200" cy="514350"/>
@@ -4114,8 +4135,8 @@
             <a:noFill/>
             <a:prstDash val="solid"/>
           </a:ln>
-        </ns0:spPr>
-        <ns0:txBody>
+        </p:spPr>
+        <p:txBody>
           <a:bodyPr wrap="square" lIns="19050" tIns="0" rIns="19050" bIns="0" anchor="ctr">
             <a:normAutofit/>
           </a:bodyPr>
@@ -4144,7 +4165,7 @@
                 <a:ea typeface="思源黑体 CN Bold" panose="020B0800000000000000" pitchFamily="34" charset="-122"/>
                 <a:cs typeface="Microsoft YaHei UI"/>
               </a:rPr>
-              <a:t>Model-level magnitude cache</a:t>
+              <a:t>Model cache</a:t>
             </a:r>
           </a:p>
           <a:p>
@@ -4171,26 +4192,26 @@
                 <a:ea typeface="思源黑体 CN Bold" panose="020B0800000000000000" pitchFamily="34" charset="-122"/>
                 <a:cs typeface="Microsoft YaHei UI"/>
               </a:rPr>
-              <a:t>Preserves method logic</a:t>
+              <a:t>Original logic</a:t>
             </a:r>
           </a:p>
-        </ns0:txBody>
-      </ns0:sp>
-      <ns0:sp>
-        <ns0:nvSpPr>
-          <ns0:cNvPr id="92" name="矩形: 圆角 91">
-            <a:extLst>
-              <a:ext uri="{FF2B5EF4-FFF2-40B4-BE49-F238E27FC236}">
-                <ns2:creationId id="{11E0458D-4068-C2B5-CC54-9D116644F41D}"/>
-              </a:ext>
-            </a:extLst>
-          </ns0:cNvPr>
-          <ns0:cNvSpPr>
-            <a:spLocks noGrp="1"/>
-          </ns0:cNvSpPr>
-          <ns0:nvPr/>
-        </ns0:nvSpPr>
-        <ns0:spPr>
+        </p:txBody>
+      </p:sp>
+      <p:sp>
+        <p:nvSpPr>
+          <p:cNvPr id="92" name="矩形: 圆角 91">
+            <a:extLst>
+              <a:ext uri="{FF2B5EF4-FFF2-40B4-BE49-F238E27FC236}">
+                <a16:creationId xmlns:a16="http://schemas.microsoft.com/office/drawing/2014/main" id="{11E0458D-4068-C2B5-CC54-9D116644F41D}"/>
+              </a:ext>
+            </a:extLst>
+          </p:cNvPr>
+          <p:cNvSpPr>
+            <a:spLocks noGrp="1"/>
+          </p:cNvSpPr>
+          <p:nvPr/>
+        </p:nvSpPr>
+        <p:spPr>
           <a:xfrm>
             <a:off x="4543425" y="7419975"/>
             <a:ext cx="1333500" cy="1295400"/>
@@ -4209,8 +4230,8 @@
             </a:solidFill>
             <a:prstDash val="solid"/>
           </a:ln>
-        </ns0:spPr>
-        <ns0:style>
+        </p:spPr>
+        <p:style>
           <a:lnRef idx="0">
             <a:scrgbClr r="0" g="0" b="0"/>
           </a:lnRef>
@@ -4221,8 +4242,8 @@
             <a:scrgbClr r="0" g="0" b="0"/>
           </a:effectRef>
           <a:fontRef idx="major"/>
-        </ns0:style>
-        <ns0:txBody>
+        </p:style>
+        <p:txBody>
           <a:bodyPr/>
           <a:lstStyle/>
           <a:p>
@@ -4231,23 +4252,23 @@
               <a:ea typeface="思源黑体 CN Bold" panose="020B0800000000000000" pitchFamily="34" charset="-122"/>
             </a:endParaRPr>
           </a:p>
-        </ns0:txBody>
-      </ns0:sp>
-      <ns0:sp>
-        <ns0:nvSpPr>
-          <ns0:cNvPr id="93" name="矩形 92">
-            <a:extLst>
-              <a:ext uri="{FF2B5EF4-FFF2-40B4-BE49-F238E27FC236}">
-                <ns2:creationId id="{936D4EAE-BD96-846C-4C35-8D5E09140C9E}"/>
-              </a:ext>
-            </a:extLst>
-          </ns0:cNvPr>
-          <ns0:cNvSpPr>
-            <a:spLocks noGrp="1"/>
-          </ns0:cNvSpPr>
-          <ns0:nvPr/>
-        </ns0:nvSpPr>
-        <ns0:spPr>
+        </p:txBody>
+      </p:sp>
+      <p:sp>
+        <p:nvSpPr>
+          <p:cNvPr id="93" name="矩形 92">
+            <a:extLst>
+              <a:ext uri="{FF2B5EF4-FFF2-40B4-BE49-F238E27FC236}">
+                <a16:creationId xmlns:a16="http://schemas.microsoft.com/office/drawing/2014/main" id="{936D4EAE-BD96-846C-4C35-8D5E09140C9E}"/>
+              </a:ext>
+            </a:extLst>
+          </p:cNvPr>
+          <p:cNvSpPr>
+            <a:spLocks noGrp="1"/>
+          </p:cNvSpPr>
+          <p:nvPr/>
+        </p:nvSpPr>
+        <p:spPr>
           <a:xfrm>
             <a:off x="4657725" y="7591425"/>
             <a:ext cx="1104900" cy="247650"/>
@@ -4260,8 +4281,8 @@
             <a:noFill/>
             <a:prstDash val="solid"/>
           </a:ln>
-        </ns0:spPr>
-        <ns0:txBody>
+        </p:spPr>
+        <p:txBody>
           <a:bodyPr wrap="square" lIns="19050" tIns="0" rIns="19050" bIns="0" anchor="ctr">
             <a:normAutofit/>
           </a:bodyPr>
@@ -4289,23 +4310,23 @@
               <a:t>AdaptiveDiff</a:t>
             </a:r>
           </a:p>
-        </ns0:txBody>
-      </ns0:sp>
-      <ns0:sp>
-        <ns0:nvSpPr>
-          <ns0:cNvPr id="94" name="矩形 93">
-            <a:extLst>
-              <a:ext uri="{FF2B5EF4-FFF2-40B4-BE49-F238E27FC236}">
-                <ns2:creationId id="{C84A45CF-6942-5A0E-99D8-8954D200EA5D}"/>
-              </a:ext>
-            </a:extLst>
-          </ns0:cNvPr>
-          <ns0:cNvSpPr>
-            <a:spLocks noGrp="1"/>
-          </ns0:cNvSpPr>
-          <ns0:nvPr/>
-        </ns0:nvSpPr>
-        <ns0:spPr>
+        </p:txBody>
+      </p:sp>
+      <p:sp>
+        <p:nvSpPr>
+          <p:cNvPr id="94" name="矩形 93">
+            <a:extLst>
+              <a:ext uri="{FF2B5EF4-FFF2-40B4-BE49-F238E27FC236}">
+                <a16:creationId xmlns:a16="http://schemas.microsoft.com/office/drawing/2014/main" id="{C84A45CF-6942-5A0E-99D8-8954D200EA5D}"/>
+              </a:ext>
+            </a:extLst>
+          </p:cNvPr>
+          <p:cNvSpPr>
+            <a:spLocks noGrp="1"/>
+          </p:cNvSpPr>
+          <p:nvPr/>
+        </p:nvSpPr>
+        <p:spPr>
           <a:xfrm>
             <a:off x="4600575" y="7972425"/>
             <a:ext cx="1219200" cy="514350"/>
@@ -4318,8 +4339,8 @@
             <a:noFill/>
             <a:prstDash val="solid"/>
           </a:ln>
-        </ns0:spPr>
-        <ns0:txBody>
+        </p:spPr>
+        <p:txBody>
           <a:bodyPr wrap="square" lIns="19050" tIns="0" rIns="19050" bIns="0" anchor="ctr">
             <a:normAutofit/>
           </a:bodyPr>
@@ -4348,7 +4369,7 @@
                 <a:ea typeface="思源黑体 CN Bold" panose="020B0800000000000000" pitchFamily="34" charset="-122"/>
                 <a:cs typeface="Microsoft YaHei UI"/>
               </a:rPr>
-              <a:t>Sampler-level adaptive skipping</a:t>
+              <a:t>Sampler skip</a:t>
             </a:r>
           </a:p>
           <a:p>
@@ -4375,26 +4396,26 @@
                 <a:ea typeface="思源黑体 CN Bold" panose="020B0800000000000000" pitchFamily="34" charset="-122"/>
                 <a:cs typeface="Microsoft YaHei UI"/>
               </a:rPr>
-              <a:t>Preserves method logic</a:t>
+              <a:t>Original logic</a:t>
             </a:r>
           </a:p>
-        </ns0:txBody>
-      </ns0:sp>
-      <ns0:sp>
-        <ns0:nvSpPr>
-          <ns0:cNvPr id="95" name="矩形 94">
-            <a:extLst>
-              <a:ext uri="{FF2B5EF4-FFF2-40B4-BE49-F238E27FC236}">
-                <ns2:creationId id="{675EAF69-209D-A30B-6A6B-30B87A5D908A}"/>
-              </a:ext>
-            </a:extLst>
-          </ns0:cNvPr>
-          <ns0:cNvSpPr>
-            <a:spLocks noGrp="1"/>
-          </ns0:cNvSpPr>
-          <ns0:nvPr/>
-        </ns0:nvSpPr>
-        <ns0:spPr>
+        </p:txBody>
+      </p:sp>
+      <p:sp>
+        <p:nvSpPr>
+          <p:cNvPr id="95" name="矩形 94">
+            <a:extLst>
+              <a:ext uri="{FF2B5EF4-FFF2-40B4-BE49-F238E27FC236}">
+                <a16:creationId xmlns:a16="http://schemas.microsoft.com/office/drawing/2014/main" id="{675EAF69-209D-A30B-6A6B-30B87A5D908A}"/>
+              </a:ext>
+            </a:extLst>
+          </p:cNvPr>
+          <p:cNvSpPr>
+            <a:spLocks noGrp="1"/>
+          </p:cNvSpPr>
+          <p:nvPr/>
+        </p:nvSpPr>
+        <p:spPr>
           <a:xfrm>
             <a:off x="6076950" y="7067550"/>
             <a:ext cx="3143250" cy="295275"/>
@@ -4407,8 +4428,8 @@
             <a:noFill/>
             <a:prstDash val="solid"/>
           </a:ln>
-        </ns0:spPr>
-        <ns0:txBody>
+        </p:spPr>
+        <p:txBody>
           <a:bodyPr wrap="square" lIns="19050" tIns="0" rIns="19050" bIns="0" anchor="ctr">
             <a:normAutofit/>
           </a:bodyPr>
@@ -4447,23 +4468,23 @@
               <a:t>)</a:t>
             </a:r>
           </a:p>
-        </ns0:txBody>
-      </ns0:sp>
-      <ns0:sp>
-        <ns0:nvSpPr>
-          <ns0:cNvPr id="96" name="矩形: 圆角 95">
-            <a:extLst>
-              <a:ext uri="{FF2B5EF4-FFF2-40B4-BE49-F238E27FC236}">
-                <ns2:creationId id="{104D78B1-7446-49ED-227C-379002CEDA2E}"/>
-              </a:ext>
-            </a:extLst>
-          </ns0:cNvPr>
-          <ns0:cNvSpPr>
-            <a:spLocks noGrp="1"/>
-          </ns0:cNvSpPr>
-          <ns0:nvPr/>
-        </ns0:nvSpPr>
-        <ns0:spPr>
+        </p:txBody>
+      </p:sp>
+      <p:sp>
+        <p:nvSpPr>
+          <p:cNvPr id="96" name="矩形: 圆角 95">
+            <a:extLst>
+              <a:ext uri="{FF2B5EF4-FFF2-40B4-BE49-F238E27FC236}">
+                <a16:creationId xmlns:a16="http://schemas.microsoft.com/office/drawing/2014/main" id="{104D78B1-7446-49ED-227C-379002CEDA2E}"/>
+              </a:ext>
+            </a:extLst>
+          </p:cNvPr>
+          <p:cNvSpPr>
+            <a:spLocks noGrp="1"/>
+          </p:cNvSpPr>
+          <p:nvPr/>
+        </p:nvSpPr>
+        <p:spPr>
           <a:xfrm>
             <a:off x="6076950" y="7419975"/>
             <a:ext cx="1295400" cy="1295400"/>
@@ -4482,8 +4503,8 @@
             </a:solidFill>
             <a:prstDash val="solid"/>
           </a:ln>
-        </ns0:spPr>
-        <ns0:style>
+        </p:spPr>
+        <p:style>
           <a:lnRef idx="0">
             <a:scrgbClr r="0" g="0" b="0"/>
           </a:lnRef>
@@ -4494,8 +4515,8 @@
             <a:scrgbClr r="0" g="0" b="0"/>
           </a:effectRef>
           <a:fontRef idx="major"/>
-        </ns0:style>
-        <ns0:txBody>
+        </p:style>
+        <p:txBody>
           <a:bodyPr/>
           <a:lstStyle/>
           <a:p>
@@ -4504,23 +4525,23 @@
               <a:ea typeface="思源黑体 CN Bold" panose="020B0800000000000000" pitchFamily="34" charset="-122"/>
             </a:endParaRPr>
           </a:p>
-        </ns0:txBody>
-      </ns0:sp>
-      <ns0:sp>
-        <ns0:nvSpPr>
-          <ns0:cNvPr id="97" name="椭圆 96">
-            <a:extLst>
-              <a:ext uri="{FF2B5EF4-FFF2-40B4-BE49-F238E27FC236}">
-                <ns2:creationId id="{58508D49-7297-DC00-9273-AFB3484EBCFF}"/>
-              </a:ext>
-            </a:extLst>
-          </ns0:cNvPr>
-          <ns0:cNvSpPr>
-            <a:spLocks noGrp="1"/>
-          </ns0:cNvSpPr>
-          <ns0:nvPr/>
-        </ns0:nvSpPr>
-        <ns0:spPr>
+        </p:txBody>
+      </p:sp>
+      <p:sp>
+        <p:nvSpPr>
+          <p:cNvPr id="97" name="椭圆 96">
+            <a:extLst>
+              <a:ext uri="{FF2B5EF4-FFF2-40B4-BE49-F238E27FC236}">
+                <a16:creationId xmlns:a16="http://schemas.microsoft.com/office/drawing/2014/main" id="{58508D49-7297-DC00-9273-AFB3484EBCFF}"/>
+              </a:ext>
+            </a:extLst>
+          </p:cNvPr>
+          <p:cNvSpPr>
+            <a:spLocks noGrp="1"/>
+          </p:cNvSpPr>
+          <p:nvPr/>
+        </p:nvSpPr>
+        <p:spPr>
           <a:xfrm>
             <a:off x="6451612" y="7623143"/>
             <a:ext cx="74486" cy="74486"/>
@@ -4535,8 +4556,8 @@
             <a:noFill/>
             <a:prstDash val="solid"/>
           </a:ln>
-        </ns0:spPr>
-        <ns0:txBody>
+        </p:spPr>
+        <p:txBody>
           <a:bodyPr/>
           <a:lstStyle/>
           <a:p>
@@ -4545,23 +4566,23 @@
               <a:ea typeface="思源黑体 CN Bold" panose="020B0800000000000000" pitchFamily="34" charset="-122"/>
             </a:endParaRPr>
           </a:p>
-        </ns0:txBody>
-      </ns0:sp>
-      <ns0:sp>
-        <ns0:nvSpPr>
-          <ns0:cNvPr id="98" name="椭圆 97">
-            <a:extLst>
-              <a:ext uri="{FF2B5EF4-FFF2-40B4-BE49-F238E27FC236}">
-                <ns2:creationId id="{988BDDBE-340F-F489-C100-4D937F72CB01}"/>
-              </a:ext>
-            </a:extLst>
-          </ns0:cNvPr>
-          <ns0:cNvSpPr>
-            <a:spLocks noGrp="1"/>
-          </ns0:cNvSpPr>
-          <ns0:nvPr/>
-        </ns0:nvSpPr>
-        <ns0:spPr>
+        </p:txBody>
+      </p:sp>
+      <p:sp>
+        <p:nvSpPr>
+          <p:cNvPr id="98" name="椭圆 97">
+            <a:extLst>
+              <a:ext uri="{FF2B5EF4-FFF2-40B4-BE49-F238E27FC236}">
+                <a16:creationId xmlns:a16="http://schemas.microsoft.com/office/drawing/2014/main" id="{988BDDBE-340F-F489-C100-4D937F72CB01}"/>
+              </a:ext>
+            </a:extLst>
+          </p:cNvPr>
+          <p:cNvSpPr>
+            <a:spLocks noGrp="1"/>
+          </p:cNvSpPr>
+          <p:nvPr/>
+        </p:nvSpPr>
+        <p:spPr>
           <a:xfrm>
             <a:off x="6451612" y="7713821"/>
             <a:ext cx="74486" cy="74486"/>
@@ -4576,8 +4597,8 @@
             <a:noFill/>
             <a:prstDash val="solid"/>
           </a:ln>
-        </ns0:spPr>
-        <ns0:txBody>
+        </p:spPr>
+        <p:txBody>
           <a:bodyPr/>
           <a:lstStyle/>
           <a:p>
@@ -4586,23 +4607,23 @@
               <a:ea typeface="思源黑体 CN Bold" panose="020B0800000000000000" pitchFamily="34" charset="-122"/>
             </a:endParaRPr>
           </a:p>
-        </ns0:txBody>
-      </ns0:sp>
-      <ns0:sp>
-        <ns0:nvSpPr>
-          <ns0:cNvPr id="99" name="椭圆 98">
-            <a:extLst>
-              <a:ext uri="{FF2B5EF4-FFF2-40B4-BE49-F238E27FC236}">
-                <ns2:creationId id="{B9928D87-F440-FABB-EAD7-5A3696BBB0B8}"/>
-              </a:ext>
-            </a:extLst>
-          </ns0:cNvPr>
-          <ns0:cNvSpPr>
-            <a:spLocks noGrp="1"/>
-          </ns0:cNvSpPr>
-          <ns0:nvPr/>
-        </ns0:nvSpPr>
-        <ns0:spPr>
+        </p:txBody>
+      </p:sp>
+      <p:sp>
+        <p:nvSpPr>
+          <p:cNvPr id="99" name="椭圆 98">
+            <a:extLst>
+              <a:ext uri="{FF2B5EF4-FFF2-40B4-BE49-F238E27FC236}">
+                <a16:creationId xmlns:a16="http://schemas.microsoft.com/office/drawing/2014/main" id="{B9928D87-F440-FABB-EAD7-5A3696BBB0B8}"/>
+              </a:ext>
+            </a:extLst>
+          </p:cNvPr>
+          <p:cNvSpPr>
+            <a:spLocks noGrp="1"/>
+          </p:cNvSpPr>
+          <p:nvPr/>
+        </p:nvSpPr>
+        <p:spPr>
           <a:xfrm>
             <a:off x="6373082" y="7759160"/>
             <a:ext cx="74486" cy="74486"/>
@@ -4617,8 +4638,8 @@
             <a:noFill/>
             <a:prstDash val="solid"/>
           </a:ln>
-        </ns0:spPr>
-        <ns0:txBody>
+        </p:spPr>
+        <p:txBody>
           <a:bodyPr/>
           <a:lstStyle/>
           <a:p>
@@ -4627,23 +4648,23 @@
               <a:ea typeface="思源黑体 CN Bold" panose="020B0800000000000000" pitchFamily="34" charset="-122"/>
             </a:endParaRPr>
           </a:p>
-        </ns0:txBody>
-      </ns0:sp>
-      <ns0:sp>
-        <ns0:nvSpPr>
-          <ns0:cNvPr id="100" name="椭圆 99">
-            <a:extLst>
-              <a:ext uri="{FF2B5EF4-FFF2-40B4-BE49-F238E27FC236}">
-                <ns2:creationId id="{DC85079E-59F5-414C-042A-4B29C7918DAA}"/>
-              </a:ext>
-            </a:extLst>
-          </ns0:cNvPr>
-          <ns0:cNvSpPr>
-            <a:spLocks noGrp="1"/>
-          </ns0:cNvSpPr>
-          <ns0:nvPr/>
-        </ns0:nvSpPr>
-        <ns0:spPr>
+        </p:txBody>
+      </p:sp>
+      <p:sp>
+        <p:nvSpPr>
+          <p:cNvPr id="100" name="椭圆 99">
+            <a:extLst>
+              <a:ext uri="{FF2B5EF4-FFF2-40B4-BE49-F238E27FC236}">
+                <a16:creationId xmlns:a16="http://schemas.microsoft.com/office/drawing/2014/main" id="{DC85079E-59F5-414C-042A-4B29C7918DAA}"/>
+              </a:ext>
+            </a:extLst>
+          </p:cNvPr>
+          <p:cNvSpPr>
+            <a:spLocks noGrp="1"/>
+          </p:cNvSpPr>
+          <p:nvPr/>
+        </p:nvSpPr>
+        <p:spPr>
           <a:xfrm>
             <a:off x="6294553" y="7713821"/>
             <a:ext cx="74486" cy="74486"/>
@@ -4658,8 +4679,8 @@
             <a:noFill/>
             <a:prstDash val="solid"/>
           </a:ln>
-        </ns0:spPr>
-        <ns0:txBody>
+        </p:spPr>
+        <p:txBody>
           <a:bodyPr/>
           <a:lstStyle/>
           <a:p>
@@ -4668,23 +4689,23 @@
               <a:ea typeface="思源黑体 CN Bold" panose="020B0800000000000000" pitchFamily="34" charset="-122"/>
             </a:endParaRPr>
           </a:p>
-        </ns0:txBody>
-      </ns0:sp>
-      <ns0:sp>
-        <ns0:nvSpPr>
-          <ns0:cNvPr id="101" name="椭圆 100">
-            <a:extLst>
-              <a:ext uri="{FF2B5EF4-FFF2-40B4-BE49-F238E27FC236}">
-                <ns2:creationId id="{61193D8B-841E-F984-E126-7EEC203FB9CF}"/>
-              </a:ext>
-            </a:extLst>
-          </ns0:cNvPr>
-          <ns0:cNvSpPr>
-            <a:spLocks noGrp="1"/>
-          </ns0:cNvSpPr>
-          <ns0:nvPr/>
-        </ns0:nvSpPr>
-        <ns0:spPr>
+        </p:txBody>
+      </p:sp>
+      <p:sp>
+        <p:nvSpPr>
+          <p:cNvPr id="101" name="椭圆 100">
+            <a:extLst>
+              <a:ext uri="{FF2B5EF4-FFF2-40B4-BE49-F238E27FC236}">
+                <a16:creationId xmlns:a16="http://schemas.microsoft.com/office/drawing/2014/main" id="{61193D8B-841E-F984-E126-7EEC203FB9CF}"/>
+              </a:ext>
+            </a:extLst>
+          </p:cNvPr>
+          <p:cNvSpPr>
+            <a:spLocks noGrp="1"/>
+          </p:cNvSpPr>
+          <p:nvPr/>
+        </p:nvSpPr>
+        <p:spPr>
           <a:xfrm>
             <a:off x="6294553" y="7623143"/>
             <a:ext cx="74486" cy="74486"/>
@@ -4699,8 +4720,8 @@
             <a:noFill/>
             <a:prstDash val="solid"/>
           </a:ln>
-        </ns0:spPr>
-        <ns0:txBody>
+        </p:spPr>
+        <p:txBody>
           <a:bodyPr/>
           <a:lstStyle/>
           <a:p>
@@ -4709,23 +4730,23 @@
               <a:ea typeface="思源黑体 CN Bold" panose="020B0800000000000000" pitchFamily="34" charset="-122"/>
             </a:endParaRPr>
           </a:p>
-        </ns0:txBody>
-      </ns0:sp>
-      <ns0:sp>
-        <ns0:nvSpPr>
-          <ns0:cNvPr id="102" name="椭圆 101">
-            <a:extLst>
-              <a:ext uri="{FF2B5EF4-FFF2-40B4-BE49-F238E27FC236}">
-                <ns2:creationId id="{AC82ED27-3F9F-3924-7F1B-BA02BF590418}"/>
-              </a:ext>
-            </a:extLst>
-          </ns0:cNvPr>
-          <ns0:cNvSpPr>
-            <a:spLocks noGrp="1"/>
-          </ns0:cNvSpPr>
-          <ns0:nvPr/>
-        </ns0:nvSpPr>
-        <ns0:spPr>
+        </p:txBody>
+      </p:sp>
+      <p:sp>
+        <p:nvSpPr>
+          <p:cNvPr id="102" name="椭圆 101">
+            <a:extLst>
+              <a:ext uri="{FF2B5EF4-FFF2-40B4-BE49-F238E27FC236}">
+                <a16:creationId xmlns:a16="http://schemas.microsoft.com/office/drawing/2014/main" id="{AC82ED27-3F9F-3924-7F1B-BA02BF590418}"/>
+              </a:ext>
+            </a:extLst>
+          </p:cNvPr>
+          <p:cNvSpPr>
+            <a:spLocks noGrp="1"/>
+          </p:cNvSpPr>
+          <p:nvPr/>
+        </p:nvSpPr>
+        <p:spPr>
           <a:xfrm>
             <a:off x="6373082" y="7577804"/>
             <a:ext cx="74486" cy="74486"/>
@@ -4740,8 +4761,8 @@
             <a:noFill/>
             <a:prstDash val="solid"/>
           </a:ln>
-        </ns0:spPr>
-        <ns0:txBody>
+        </p:spPr>
+        <p:txBody>
           <a:bodyPr/>
           <a:lstStyle/>
           <a:p>
@@ -4750,23 +4771,23 @@
               <a:ea typeface="思源黑体 CN Bold" panose="020B0800000000000000" pitchFamily="34" charset="-122"/>
             </a:endParaRPr>
           </a:p>
-        </ns0:txBody>
-      </ns0:sp>
-      <ns0:sp>
-        <ns0:nvSpPr>
-          <ns0:cNvPr id="103" name="椭圆 102">
-            <a:extLst>
-              <a:ext uri="{FF2B5EF4-FFF2-40B4-BE49-F238E27FC236}">
-                <ns2:creationId id="{79FDBBEC-75D2-62F6-F074-3F6E6DFF9428}"/>
-              </a:ext>
-            </a:extLst>
-          </ns0:cNvPr>
-          <ns0:cNvSpPr>
-            <a:spLocks noGrp="1"/>
-          </ns0:cNvSpPr>
-          <ns0:nvPr/>
-        </ns0:nvSpPr>
-        <ns0:spPr>
+        </p:txBody>
+      </p:sp>
+      <p:sp>
+        <p:nvSpPr>
+          <p:cNvPr id="103" name="椭圆 102">
+            <a:extLst>
+              <a:ext uri="{FF2B5EF4-FFF2-40B4-BE49-F238E27FC236}">
+                <a16:creationId xmlns:a16="http://schemas.microsoft.com/office/drawing/2014/main" id="{79FDBBEC-75D2-62F6-F074-3F6E6DFF9428}"/>
+              </a:ext>
+            </a:extLst>
+          </p:cNvPr>
+          <p:cNvSpPr>
+            <a:spLocks noGrp="1"/>
+          </p:cNvSpPr>
+          <p:nvPr/>
+        </p:nvSpPr>
+        <p:spPr>
           <a:xfrm>
             <a:off x="6377940" y="7673340"/>
             <a:ext cx="64770" cy="64770"/>
@@ -4781,8 +4802,8 @@
             <a:noFill/>
             <a:prstDash val="solid"/>
           </a:ln>
-        </ns0:spPr>
-        <ns0:txBody>
+        </p:spPr>
+        <p:txBody>
           <a:bodyPr/>
           <a:lstStyle/>
           <a:p>
@@ -4791,23 +4812,23 @@
               <a:ea typeface="思源黑体 CN Bold" panose="020B0800000000000000" pitchFamily="34" charset="-122"/>
             </a:endParaRPr>
           </a:p>
-        </ns0:txBody>
-      </ns0:sp>
-      <ns0:sp>
-        <ns0:nvSpPr>
-          <ns0:cNvPr id="104" name="矩形 103">
-            <a:extLst>
-              <a:ext uri="{FF2B5EF4-FFF2-40B4-BE49-F238E27FC236}">
-                <ns2:creationId id="{093BEF7D-F5B4-CAA4-E066-EB5B622073C3}"/>
-              </a:ext>
-            </a:extLst>
-          </ns0:cNvPr>
-          <ns0:cNvSpPr>
-            <a:spLocks noGrp="1"/>
-          </ns0:cNvSpPr>
-          <ns0:nvPr/>
-        </ns0:nvSpPr>
-        <ns0:spPr>
+        </p:txBody>
+      </p:sp>
+      <p:sp>
+        <p:nvSpPr>
+          <p:cNvPr id="104" name="矩形 103">
+            <a:extLst>
+              <a:ext uri="{FF2B5EF4-FFF2-40B4-BE49-F238E27FC236}">
+                <a16:creationId xmlns:a16="http://schemas.microsoft.com/office/drawing/2014/main" id="{093BEF7D-F5B4-CAA4-E066-EB5B622073C3}"/>
+              </a:ext>
+            </a:extLst>
+          </p:cNvPr>
+          <p:cNvSpPr>
+            <a:spLocks noGrp="1"/>
+          </p:cNvSpPr>
+          <p:nvPr/>
+        </p:nvSpPr>
+        <p:spPr>
           <a:xfrm>
             <a:off x="6610350" y="7591425"/>
             <a:ext cx="704850" cy="257175"/>
@@ -4820,8 +4841,8 @@
             <a:noFill/>
             <a:prstDash val="solid"/>
           </a:ln>
-        </ns0:spPr>
-        <ns0:txBody>
+        </p:spPr>
+        <p:txBody>
           <a:bodyPr wrap="square" lIns="19050" tIns="0" rIns="19050" bIns="0" anchor="ctr">
             <a:normAutofit/>
           </a:bodyPr>
@@ -4849,23 +4870,23 @@
               <a:t>Wan</a:t>
             </a:r>
           </a:p>
-        </ns0:txBody>
-      </ns0:sp>
-      <ns0:sp>
-        <ns0:nvSpPr>
-          <ns0:cNvPr id="105" name="矩形 104">
-            <a:extLst>
-              <a:ext uri="{FF2B5EF4-FFF2-40B4-BE49-F238E27FC236}">
-                <ns2:creationId id="{524B4B9F-33BB-9329-5816-D9A276A2E4AD}"/>
-              </a:ext>
-            </a:extLst>
-          </ns0:cNvPr>
-          <ns0:cNvSpPr>
-            <a:spLocks noGrp="1"/>
-          </ns0:cNvSpPr>
-          <ns0:nvPr/>
-        </ns0:nvSpPr>
-        <ns0:spPr>
+        </p:txBody>
+      </p:sp>
+      <p:sp>
+        <p:nvSpPr>
+          <p:cNvPr id="105" name="矩形 104">
+            <a:extLst>
+              <a:ext uri="{FF2B5EF4-FFF2-40B4-BE49-F238E27FC236}">
+                <a16:creationId xmlns:a16="http://schemas.microsoft.com/office/drawing/2014/main" id="{524B4B9F-33BB-9329-5816-D9A276A2E4AD}"/>
+              </a:ext>
+            </a:extLst>
+          </p:cNvPr>
+          <p:cNvSpPr>
+            <a:spLocks noGrp="1"/>
+          </p:cNvSpPr>
+          <p:nvPr/>
+        </p:nvSpPr>
+        <p:spPr>
           <a:xfrm>
             <a:off x="6191250" y="8096250"/>
             <a:ext cx="1066800" cy="457200"/>
@@ -4878,8 +4899,8 @@
             <a:noFill/>
             <a:prstDash val="solid"/>
           </a:ln>
-        </ns0:spPr>
-        <ns0:txBody>
+        </p:spPr>
+        <p:txBody>
           <a:bodyPr wrap="square" lIns="19050" tIns="0" rIns="19050" bIns="0" anchor="ctr">
             <a:normAutofit/>
           </a:bodyPr>
@@ -4938,23 +4959,23 @@
               <a:t>T2V / I2V</a:t>
             </a:r>
           </a:p>
-        </ns0:txBody>
-      </ns0:sp>
-      <ns0:sp>
-        <ns0:nvSpPr>
-          <ns0:cNvPr id="106" name="矩形: 圆角 105">
-            <a:extLst>
-              <a:ext uri="{FF2B5EF4-FFF2-40B4-BE49-F238E27FC236}">
-                <ns2:creationId id="{76473EB5-F0BE-49A3-C770-50577046B03A}"/>
-              </a:ext>
-            </a:extLst>
-          </ns0:cNvPr>
-          <ns0:cNvSpPr>
-            <a:spLocks noGrp="1"/>
-          </ns0:cNvSpPr>
-          <ns0:nvPr/>
-        </ns0:nvSpPr>
-        <ns0:spPr>
+        </p:txBody>
+      </p:sp>
+      <p:sp>
+        <p:nvSpPr>
+          <p:cNvPr id="106" name="矩形: 圆角 105">
+            <a:extLst>
+              <a:ext uri="{FF2B5EF4-FFF2-40B4-BE49-F238E27FC236}">
+                <a16:creationId xmlns:a16="http://schemas.microsoft.com/office/drawing/2014/main" id="{76473EB5-F0BE-49A3-C770-50577046B03A}"/>
+              </a:ext>
+            </a:extLst>
+          </p:cNvPr>
+          <p:cNvSpPr>
+            <a:spLocks noGrp="1"/>
+          </p:cNvSpPr>
+          <p:nvPr/>
+        </p:nvSpPr>
+        <p:spPr>
           <a:xfrm>
             <a:off x="7381875" y="7419975"/>
             <a:ext cx="1485900" cy="1295400"/>
@@ -4973,8 +4994,8 @@
             </a:solidFill>
             <a:prstDash val="solid"/>
           </a:ln>
-        </ns0:spPr>
-        <ns0:style>
+        </p:spPr>
+        <p:style>
           <a:lnRef idx="0">
             <a:scrgbClr r="0" g="0" b="0"/>
           </a:lnRef>
@@ -4985,8 +5006,8 @@
             <a:scrgbClr r="0" g="0" b="0"/>
           </a:effectRef>
           <a:fontRef idx="major"/>
-        </ns0:style>
-        <ns0:txBody>
+        </p:style>
+        <p:txBody>
           <a:bodyPr/>
           <a:lstStyle/>
           <a:p>
@@ -4995,23 +5016,23 @@
               <a:ea typeface="思源黑体 CN Bold" panose="020B0800000000000000" pitchFamily="34" charset="-122"/>
             </a:endParaRPr>
           </a:p>
-        </ns0:txBody>
-      </ns0:sp>
-      <ns0:sp>
-        <ns0:nvSpPr>
-          <ns0:cNvPr id="107" name="矩形 106">
-            <a:extLst>
-              <a:ext uri="{FF2B5EF4-FFF2-40B4-BE49-F238E27FC236}">
-                <ns2:creationId id="{8CCD450E-B21D-1084-8E9E-A2C6AB13829D}"/>
-              </a:ext>
-            </a:extLst>
-          </ns0:cNvPr>
-          <ns0:cNvSpPr>
-            <a:spLocks noGrp="1"/>
-          </ns0:cNvSpPr>
-          <ns0:nvPr/>
-        </ns0:nvSpPr>
-        <ns0:spPr>
+        </p:txBody>
+      </p:sp>
+      <p:sp>
+        <p:nvSpPr>
+          <p:cNvPr id="107" name="矩形 106">
+            <a:extLst>
+              <a:ext uri="{FF2B5EF4-FFF2-40B4-BE49-F238E27FC236}">
+                <a16:creationId xmlns:a16="http://schemas.microsoft.com/office/drawing/2014/main" id="{8CCD450E-B21D-1084-8E9E-A2C6AB13829D}"/>
+              </a:ext>
+            </a:extLst>
+          </p:cNvPr>
+          <p:cNvSpPr>
+            <a:spLocks noGrp="1"/>
+          </p:cNvSpPr>
+          <p:nvPr/>
+        </p:nvSpPr>
+        <p:spPr>
           <a:xfrm>
             <a:off x="7767638" y="7439501"/>
             <a:ext cx="1257300" cy="516255"/>
@@ -5024,8 +5045,8 @@
             <a:noFill/>
             <a:prstDash val="solid"/>
           </a:ln>
-        </ns0:spPr>
-        <ns0:txBody>
+        </p:spPr>
+        <p:txBody>
           <a:bodyPr wrap="square" lIns="19050" tIns="0" rIns="19050" bIns="0" anchor="ctr">
             <a:normAutofit/>
           </a:bodyPr>
@@ -5084,23 +5105,23 @@
               <a:t>Video</a:t>
             </a:r>
           </a:p>
-        </ns0:txBody>
-      </ns0:sp>
-      <ns0:sp>
-        <ns0:nvSpPr>
-          <ns0:cNvPr id="108" name="椭圆 107">
-            <a:extLst>
-              <a:ext uri="{FF2B5EF4-FFF2-40B4-BE49-F238E27FC236}">
-                <ns2:creationId id="{1BBB3A4C-6CEE-0A9A-143D-A477C7318911}"/>
-              </a:ext>
-            </a:extLst>
-          </ns0:cNvPr>
-          <ns0:cNvSpPr>
-            <a:spLocks noGrp="1"/>
-          </ns0:cNvSpPr>
-          <ns0:nvPr/>
-        </ns0:nvSpPr>
-        <ns0:spPr>
+        </p:txBody>
+      </p:sp>
+      <p:sp>
+        <p:nvSpPr>
+          <p:cNvPr id="108" name="椭圆 107">
+            <a:extLst>
+              <a:ext uri="{FF2B5EF4-FFF2-40B4-BE49-F238E27FC236}">
+                <a16:creationId xmlns:a16="http://schemas.microsoft.com/office/drawing/2014/main" id="{1BBB3A4C-6CEE-0A9A-143D-A477C7318911}"/>
+              </a:ext>
+            </a:extLst>
+          </p:cNvPr>
+          <p:cNvSpPr>
+            <a:spLocks noGrp="1"/>
+          </p:cNvSpPr>
+          <p:nvPr/>
+        </p:nvSpPr>
+        <p:spPr>
           <a:xfrm>
             <a:off x="7612189" y="7606189"/>
             <a:ext cx="128016" cy="182880"/>
@@ -5115,8 +5136,8 @@
             </a:solidFill>
             <a:prstDash val="solid"/>
           </a:ln>
-        </ns0:spPr>
-        <ns0:txBody>
+        </p:spPr>
+        <p:txBody>
           <a:bodyPr/>
           <a:lstStyle/>
           <a:p>
@@ -5125,23 +5146,23 @@
               <a:ea typeface="思源黑体 CN Bold" panose="020B0800000000000000" pitchFamily="34" charset="-122"/>
             </a:endParaRPr>
           </a:p>
-        </ns0:txBody>
-      </ns0:sp>
-      <ns0:sp>
-        <ns0:nvSpPr>
-          <ns0:cNvPr id="109" name="椭圆 108">
-            <a:extLst>
-              <a:ext uri="{FF2B5EF4-FFF2-40B4-BE49-F238E27FC236}">
-                <ns2:creationId id="{EBDD044E-8756-F1A9-2631-FE34CE5CBC93}"/>
-              </a:ext>
-            </a:extLst>
-          </ns0:cNvPr>
-          <ns0:cNvSpPr>
-            <a:spLocks noGrp="1"/>
-          </ns0:cNvSpPr>
-          <ns0:nvPr/>
-        </ns0:nvSpPr>
-        <ns0:spPr>
+        </p:txBody>
+      </p:sp>
+      <p:sp>
+        <p:nvSpPr>
+          <p:cNvPr id="109" name="椭圆 108">
+            <a:extLst>
+              <a:ext uri="{FF2B5EF4-FFF2-40B4-BE49-F238E27FC236}">
+                <a16:creationId xmlns:a16="http://schemas.microsoft.com/office/drawing/2014/main" id="{EBDD044E-8756-F1A9-2631-FE34CE5CBC93}"/>
+              </a:ext>
+            </a:extLst>
+          </p:cNvPr>
+          <p:cNvSpPr>
+            <a:spLocks noGrp="1"/>
+          </p:cNvSpPr>
+          <p:nvPr/>
+        </p:nvSpPr>
+        <p:spPr>
           <a:xfrm>
             <a:off x="7740205" y="7606189"/>
             <a:ext cx="128016" cy="182880"/>
@@ -5156,8 +5177,8 @@
             </a:solidFill>
             <a:prstDash val="solid"/>
           </a:ln>
-        </ns0:spPr>
-        <ns0:txBody>
+        </p:spPr>
+        <p:txBody>
           <a:bodyPr/>
           <a:lstStyle/>
           <a:p>
@@ -5166,23 +5187,23 @@
               <a:ea typeface="思源黑体 CN Bold" panose="020B0800000000000000" pitchFamily="34" charset="-122"/>
             </a:endParaRPr>
           </a:p>
-        </ns0:txBody>
-      </ns0:sp>
-      <ns0:sp>
-        <ns0:nvSpPr>
-          <ns0:cNvPr id="110" name="椭圆 109">
-            <a:extLst>
-              <a:ext uri="{FF2B5EF4-FFF2-40B4-BE49-F238E27FC236}">
-                <ns2:creationId id="{2A7CF3BE-6356-2F21-A183-DA43B71F086E}"/>
-              </a:ext>
-            </a:extLst>
-          </ns0:cNvPr>
-          <ns0:cNvSpPr>
-            <a:spLocks noGrp="1"/>
-          </ns0:cNvSpPr>
-          <ns0:nvPr/>
-        </ns0:nvSpPr>
-        <ns0:spPr>
+        </p:txBody>
+      </p:sp>
+      <p:sp>
+        <p:nvSpPr>
+          <p:cNvPr id="110" name="椭圆 109">
+            <a:extLst>
+              <a:ext uri="{FF2B5EF4-FFF2-40B4-BE49-F238E27FC236}">
+                <a16:creationId xmlns:a16="http://schemas.microsoft.com/office/drawing/2014/main" id="{2A7CF3BE-6356-2F21-A183-DA43B71F086E}"/>
+              </a:ext>
+            </a:extLst>
+          </p:cNvPr>
+          <p:cNvSpPr>
+            <a:spLocks noGrp="1"/>
+          </p:cNvSpPr>
+          <p:nvPr/>
+        </p:nvSpPr>
+        <p:spPr>
           <a:xfrm>
             <a:off x="7715821" y="7673245"/>
             <a:ext cx="48768" cy="48768"/>
@@ -5197,8 +5218,8 @@
             <a:noFill/>
             <a:prstDash val="solid"/>
           </a:ln>
-        </ns0:spPr>
-        <ns0:txBody>
+        </p:spPr>
+        <p:txBody>
           <a:bodyPr/>
           <a:lstStyle/>
           <a:p>
@@ -5207,23 +5228,23 @@
               <a:ea typeface="思源黑体 CN Bold" panose="020B0800000000000000" pitchFamily="34" charset="-122"/>
             </a:endParaRPr>
           </a:p>
-        </ns0:txBody>
-      </ns0:sp>
-      <ns0:sp>
-        <ns0:nvSpPr>
-          <ns0:cNvPr id="111" name="矩形 110">
-            <a:extLst>
-              <a:ext uri="{FF2B5EF4-FFF2-40B4-BE49-F238E27FC236}">
-                <ns2:creationId id="{82A79B9B-F72A-9D20-7FFE-E2C1119F27C1}"/>
-              </a:ext>
-            </a:extLst>
-          </ns0:cNvPr>
-          <ns0:cNvSpPr>
-            <a:spLocks noGrp="1"/>
-          </ns0:cNvSpPr>
-          <ns0:nvPr/>
-        </ns0:nvSpPr>
-        <ns0:spPr>
+        </p:txBody>
+      </p:sp>
+      <p:sp>
+        <p:nvSpPr>
+          <p:cNvPr id="111" name="矩形 110">
+            <a:extLst>
+              <a:ext uri="{FF2B5EF4-FFF2-40B4-BE49-F238E27FC236}">
+                <a16:creationId xmlns:a16="http://schemas.microsoft.com/office/drawing/2014/main" id="{82A79B9B-F72A-9D20-7FFE-E2C1119F27C1}"/>
+              </a:ext>
+            </a:extLst>
+          </p:cNvPr>
+          <p:cNvSpPr>
+            <a:spLocks noGrp="1"/>
+          </p:cNvSpPr>
+          <p:nvPr/>
+        </p:nvSpPr>
+        <p:spPr>
           <a:xfrm>
             <a:off x="7934325" y="8077200"/>
             <a:ext cx="819150" cy="457200"/>
@@ -5236,8 +5257,8 @@
             <a:noFill/>
             <a:prstDash val="solid"/>
           </a:ln>
-        </ns0:spPr>
-        <ns0:txBody>
+        </p:spPr>
+        <p:txBody>
           <a:bodyPr wrap="square" lIns="19050" tIns="0" rIns="19050" bIns="0" anchor="ctr">
             <a:normAutofit/>
           </a:bodyPr>
@@ -5307,23 +5328,23 @@
               <a:t>T2V / I2V</a:t>
             </a:r>
           </a:p>
-        </ns0:txBody>
-      </ns0:sp>
-      <ns0:sp>
-        <ns0:nvSpPr>
-          <ns0:cNvPr id="112" name="矩形: 圆角 111">
-            <a:extLst>
-              <a:ext uri="{FF2B5EF4-FFF2-40B4-BE49-F238E27FC236}">
-                <ns2:creationId id="{66E02717-EB34-0599-5270-A42CF545833D}"/>
-              </a:ext>
-            </a:extLst>
-          </ns0:cNvPr>
-          <ns0:cNvSpPr>
-            <a:spLocks noGrp="1"/>
-          </ns0:cNvSpPr>
-          <ns0:nvPr/>
-        </ns0:nvSpPr>
-        <ns0:spPr>
+        </p:txBody>
+      </p:sp>
+      <p:sp>
+        <p:nvSpPr>
+          <p:cNvPr id="112" name="矩形: 圆角 111">
+            <a:extLst>
+              <a:ext uri="{FF2B5EF4-FFF2-40B4-BE49-F238E27FC236}">
+                <a16:creationId xmlns:a16="http://schemas.microsoft.com/office/drawing/2014/main" id="{66E02717-EB34-0599-5270-A42CF545833D}"/>
+              </a:ext>
+            </a:extLst>
+          </p:cNvPr>
+          <p:cNvSpPr>
+            <a:spLocks noGrp="1"/>
+          </p:cNvSpPr>
+          <p:nvPr/>
+        </p:nvSpPr>
+        <p:spPr>
           <a:xfrm>
             <a:off x="8877300" y="7419975"/>
             <a:ext cx="1466850" cy="1295400"/>
@@ -5342,8 +5363,8 @@
             </a:solidFill>
             <a:prstDash val="solid"/>
           </a:ln>
-        </ns0:spPr>
-        <ns0:style>
+        </p:spPr>
+        <p:style>
           <a:lnRef idx="0">
             <a:scrgbClr r="0" g="0" b="0"/>
           </a:lnRef>
@@ -5354,8 +5375,8 @@
             <a:scrgbClr r="0" g="0" b="0"/>
           </a:effectRef>
           <a:fontRef idx="major"/>
-        </ns0:style>
-        <ns0:txBody>
+        </p:style>
+        <p:txBody>
           <a:bodyPr/>
           <a:lstStyle/>
           <a:p>
@@ -5364,23 +5385,23 @@
               <a:ea typeface="思源黑体 CN Bold" panose="020B0800000000000000" pitchFamily="34" charset="-122"/>
             </a:endParaRPr>
           </a:p>
-        </ns0:txBody>
-      </ns0:sp>
-      <ns0:sp>
-        <ns0:nvSpPr>
-          <ns0:cNvPr id="113" name="椭圆 112">
-            <a:extLst>
-              <a:ext uri="{FF2B5EF4-FFF2-40B4-BE49-F238E27FC236}">
-                <ns2:creationId id="{625152C4-F3CF-D7FF-41D2-BFCAF8EB3618}"/>
-              </a:ext>
-            </a:extLst>
-          </ns0:cNvPr>
-          <ns0:cNvSpPr>
-            <a:spLocks noGrp="1"/>
-          </ns0:cNvSpPr>
-          <ns0:nvPr/>
-        </ns0:nvSpPr>
-        <ns0:spPr>
+        </p:txBody>
+      </p:sp>
+      <p:sp>
+        <p:nvSpPr>
+          <p:cNvPr id="113" name="椭圆 112">
+            <a:extLst>
+              <a:ext uri="{FF2B5EF4-FFF2-40B4-BE49-F238E27FC236}">
+                <a16:creationId xmlns:a16="http://schemas.microsoft.com/office/drawing/2014/main" id="{625152C4-F3CF-D7FF-41D2-BFCAF8EB3618}"/>
+              </a:ext>
+            </a:extLst>
+          </p:cNvPr>
+          <p:cNvSpPr>
+            <a:spLocks noGrp="1"/>
+          </p:cNvSpPr>
+          <p:nvPr/>
+        </p:nvSpPr>
+        <p:spPr>
           <a:xfrm>
             <a:off x="9252776" y="7657148"/>
             <a:ext cx="71247" cy="97155"/>
@@ -5395,8 +5416,8 @@
             <a:noFill/>
             <a:prstDash val="solid"/>
           </a:ln>
-        </ns0:spPr>
-        <ns0:txBody>
+        </p:spPr>
+        <p:txBody>
           <a:bodyPr/>
           <a:lstStyle/>
           <a:p>
@@ -5405,23 +5426,23 @@
               <a:ea typeface="思源黑体 CN Bold" panose="020B0800000000000000" pitchFamily="34" charset="-122"/>
             </a:endParaRPr>
           </a:p>
-        </ns0:txBody>
-      </ns0:sp>
-      <ns0:sp>
-        <ns0:nvSpPr>
-          <ns0:cNvPr id="114" name="椭圆 113">
-            <a:extLst>
-              <a:ext uri="{FF2B5EF4-FFF2-40B4-BE49-F238E27FC236}">
-                <ns2:creationId id="{7C835C35-3E4E-9A1A-E479-8F1284A094C9}"/>
-              </a:ext>
-            </a:extLst>
-          </ns0:cNvPr>
-          <ns0:cNvSpPr>
-            <a:spLocks noGrp="1"/>
-          </ns0:cNvSpPr>
-          <ns0:nvPr/>
-        </ns0:nvSpPr>
-        <ns0:spPr>
+        </p:txBody>
+      </p:sp>
+      <p:sp>
+        <p:nvSpPr>
+          <p:cNvPr id="114" name="椭圆 113">
+            <a:extLst>
+              <a:ext uri="{FF2B5EF4-FFF2-40B4-BE49-F238E27FC236}">
+                <a16:creationId xmlns:a16="http://schemas.microsoft.com/office/drawing/2014/main" id="{7C835C35-3E4E-9A1A-E479-8F1284A094C9}"/>
+              </a:ext>
+            </a:extLst>
+          </p:cNvPr>
+          <p:cNvSpPr>
+            <a:spLocks noGrp="1"/>
+          </p:cNvSpPr>
+          <p:nvPr/>
+        </p:nvSpPr>
+        <p:spPr>
           <a:xfrm rot="3600000">
             <a:off x="9213914" y="7724458"/>
             <a:ext cx="71247" cy="97155"/>
@@ -5436,8 +5457,8 @@
             <a:noFill/>
             <a:prstDash val="solid"/>
           </a:ln>
-        </ns0:spPr>
-        <ns0:txBody>
+        </p:spPr>
+        <p:txBody>
           <a:bodyPr/>
           <a:lstStyle/>
           <a:p>
@@ -5446,23 +5467,23 @@
               <a:ea typeface="思源黑体 CN Bold" panose="020B0800000000000000" pitchFamily="34" charset="-122"/>
             </a:endParaRPr>
           </a:p>
-        </ns0:txBody>
-      </ns0:sp>
-      <ns0:sp>
-        <ns0:nvSpPr>
-          <ns0:cNvPr id="115" name="椭圆 114">
-            <a:extLst>
-              <a:ext uri="{FF2B5EF4-FFF2-40B4-BE49-F238E27FC236}">
-                <ns2:creationId id="{3331108E-55A2-1305-BD95-D85F575A8E48}"/>
-              </a:ext>
-            </a:extLst>
-          </ns0:cNvPr>
-          <ns0:cNvSpPr>
-            <a:spLocks noGrp="1"/>
-          </ns0:cNvSpPr>
-          <ns0:nvPr/>
-        </ns0:nvSpPr>
-        <ns0:spPr>
+        </p:txBody>
+      </p:sp>
+      <p:sp>
+        <p:nvSpPr>
+          <p:cNvPr id="115" name="椭圆 114">
+            <a:extLst>
+              <a:ext uri="{FF2B5EF4-FFF2-40B4-BE49-F238E27FC236}">
+                <a16:creationId xmlns:a16="http://schemas.microsoft.com/office/drawing/2014/main" id="{3331108E-55A2-1305-BD95-D85F575A8E48}"/>
+              </a:ext>
+            </a:extLst>
+          </p:cNvPr>
+          <p:cNvSpPr>
+            <a:spLocks noGrp="1"/>
+          </p:cNvSpPr>
+          <p:nvPr/>
+        </p:nvSpPr>
+        <p:spPr>
           <a:xfrm rot="7200000">
             <a:off x="9136190" y="7724458"/>
             <a:ext cx="71247" cy="97155"/>
@@ -5477,8 +5498,8 @@
             <a:noFill/>
             <a:prstDash val="solid"/>
           </a:ln>
-        </ns0:spPr>
-        <ns0:txBody>
+        </p:spPr>
+        <p:txBody>
           <a:bodyPr/>
           <a:lstStyle/>
           <a:p>
@@ -5487,23 +5508,23 @@
               <a:ea typeface="思源黑体 CN Bold" panose="020B0800000000000000" pitchFamily="34" charset="-122"/>
             </a:endParaRPr>
           </a:p>
-        </ns0:txBody>
-      </ns0:sp>
-      <ns0:sp>
-        <ns0:nvSpPr>
-          <ns0:cNvPr id="116" name="椭圆 115">
-            <a:extLst>
-              <a:ext uri="{FF2B5EF4-FFF2-40B4-BE49-F238E27FC236}">
-                <ns2:creationId id="{D7B5A62F-5DC9-C409-DECE-C1DD8A940817}"/>
-              </a:ext>
-            </a:extLst>
-          </ns0:cNvPr>
-          <ns0:cNvSpPr>
-            <a:spLocks noGrp="1"/>
-          </ns0:cNvSpPr>
-          <ns0:nvPr/>
-        </ns0:nvSpPr>
-        <ns0:spPr>
+        </p:txBody>
+      </p:sp>
+      <p:sp>
+        <p:nvSpPr>
+          <p:cNvPr id="116" name="椭圆 115">
+            <a:extLst>
+              <a:ext uri="{FF2B5EF4-FFF2-40B4-BE49-F238E27FC236}">
+                <a16:creationId xmlns:a16="http://schemas.microsoft.com/office/drawing/2014/main" id="{D7B5A62F-5DC9-C409-DECE-C1DD8A940817}"/>
+              </a:ext>
+            </a:extLst>
+          </p:cNvPr>
+          <p:cNvSpPr>
+            <a:spLocks noGrp="1"/>
+          </p:cNvSpPr>
+          <p:nvPr/>
+        </p:nvSpPr>
+        <p:spPr>
           <a:xfrm rot="10800000">
             <a:off x="9097328" y="7657148"/>
             <a:ext cx="71247" cy="97155"/>
@@ -5518,8 +5539,8 @@
             <a:noFill/>
             <a:prstDash val="solid"/>
           </a:ln>
-        </ns0:spPr>
-        <ns0:txBody>
+        </p:spPr>
+        <p:txBody>
           <a:bodyPr/>
           <a:lstStyle/>
           <a:p>
@@ -5528,23 +5549,23 @@
               <a:ea typeface="思源黑体 CN Bold" panose="020B0800000000000000" pitchFamily="34" charset="-122"/>
             </a:endParaRPr>
           </a:p>
-        </ns0:txBody>
-      </ns0:sp>
-      <ns0:sp>
-        <ns0:nvSpPr>
-          <ns0:cNvPr id="117" name="椭圆 116">
-            <a:extLst>
-              <a:ext uri="{FF2B5EF4-FFF2-40B4-BE49-F238E27FC236}">
-                <ns2:creationId id="{542F8B97-2C4A-15E4-9609-47BBC598585F}"/>
-              </a:ext>
-            </a:extLst>
-          </ns0:cNvPr>
-          <ns0:cNvSpPr>
-            <a:spLocks noGrp="1"/>
-          </ns0:cNvSpPr>
-          <ns0:nvPr/>
-        </ns0:nvSpPr>
-        <ns0:spPr>
+        </p:txBody>
+      </p:sp>
+      <p:sp>
+        <p:nvSpPr>
+          <p:cNvPr id="117" name="椭圆 116">
+            <a:extLst>
+              <a:ext uri="{FF2B5EF4-FFF2-40B4-BE49-F238E27FC236}">
+                <a16:creationId xmlns:a16="http://schemas.microsoft.com/office/drawing/2014/main" id="{542F8B97-2C4A-15E4-9609-47BBC598585F}"/>
+              </a:ext>
+            </a:extLst>
+          </p:cNvPr>
+          <p:cNvSpPr>
+            <a:spLocks noGrp="1"/>
+          </p:cNvSpPr>
+          <p:nvPr/>
+        </p:nvSpPr>
+        <p:spPr>
           <a:xfrm rot="14400000">
             <a:off x="9136190" y="7589837"/>
             <a:ext cx="71247" cy="97155"/>
@@ -5559,8 +5580,8 @@
             <a:noFill/>
             <a:prstDash val="solid"/>
           </a:ln>
-        </ns0:spPr>
-        <ns0:txBody>
+        </p:spPr>
+        <p:txBody>
           <a:bodyPr/>
           <a:lstStyle/>
           <a:p>
@@ -5569,23 +5590,23 @@
               <a:ea typeface="思源黑体 CN Bold" panose="020B0800000000000000" pitchFamily="34" charset="-122"/>
             </a:endParaRPr>
           </a:p>
-        </ns0:txBody>
-      </ns0:sp>
-      <ns0:sp>
-        <ns0:nvSpPr>
-          <ns0:cNvPr id="118" name="椭圆 117">
-            <a:extLst>
-              <a:ext uri="{FF2B5EF4-FFF2-40B4-BE49-F238E27FC236}">
-                <ns2:creationId id="{9CA49BEA-6262-E5D7-B6B1-E7D56D9CE5CF}"/>
-              </a:ext>
-            </a:extLst>
-          </ns0:cNvPr>
-          <ns0:cNvSpPr>
-            <a:spLocks noGrp="1"/>
-          </ns0:cNvSpPr>
-          <ns0:nvPr/>
-        </ns0:nvSpPr>
-        <ns0:spPr>
+        </p:txBody>
+      </p:sp>
+      <p:sp>
+        <p:nvSpPr>
+          <p:cNvPr id="118" name="椭圆 117">
+            <a:extLst>
+              <a:ext uri="{FF2B5EF4-FFF2-40B4-BE49-F238E27FC236}">
+                <a16:creationId xmlns:a16="http://schemas.microsoft.com/office/drawing/2014/main" id="{9CA49BEA-6262-E5D7-B6B1-E7D56D9CE5CF}"/>
+              </a:ext>
+            </a:extLst>
+          </p:cNvPr>
+          <p:cNvSpPr>
+            <a:spLocks noGrp="1"/>
+          </p:cNvSpPr>
+          <p:nvPr/>
+        </p:nvSpPr>
+        <p:spPr>
           <a:xfrm rot="18000000">
             <a:off x="9213914" y="7589837"/>
             <a:ext cx="71247" cy="97155"/>
@@ -5600,8 +5621,8 @@
             <a:noFill/>
             <a:prstDash val="solid"/>
           </a:ln>
-        </ns0:spPr>
-        <ns0:txBody>
+        </p:spPr>
+        <p:txBody>
           <a:bodyPr/>
           <a:lstStyle/>
           <a:p>
@@ -5610,23 +5631,23 @@
               <a:ea typeface="思源黑体 CN Bold" panose="020B0800000000000000" pitchFamily="34" charset="-122"/>
             </a:endParaRPr>
           </a:p>
-        </ns0:txBody>
-      </ns0:sp>
-      <ns0:sp>
-        <ns0:nvSpPr>
-          <ns0:cNvPr id="119" name="椭圆 118">
-            <a:extLst>
-              <a:ext uri="{FF2B5EF4-FFF2-40B4-BE49-F238E27FC236}">
-                <ns2:creationId id="{FDF3BE4F-6ABB-1F3A-9F55-B6B593F6DB07}"/>
-              </a:ext>
-            </a:extLst>
-          </ns0:cNvPr>
-          <ns0:cNvSpPr>
-            <a:spLocks noGrp="1"/>
-          </ns0:cNvSpPr>
-          <ns0:nvPr/>
-        </ns0:nvSpPr>
-        <ns0:spPr>
+        </p:txBody>
+      </p:sp>
+      <p:sp>
+        <p:nvSpPr>
+          <p:cNvPr id="119" name="椭圆 118">
+            <a:extLst>
+              <a:ext uri="{FF2B5EF4-FFF2-40B4-BE49-F238E27FC236}">
+                <a16:creationId xmlns:a16="http://schemas.microsoft.com/office/drawing/2014/main" id="{FDF3BE4F-6ABB-1F3A-9F55-B6B593F6DB07}"/>
+              </a:ext>
+            </a:extLst>
+          </p:cNvPr>
+          <p:cNvSpPr>
+            <a:spLocks noGrp="1"/>
+          </p:cNvSpPr>
+          <p:nvPr/>
+        </p:nvSpPr>
+        <p:spPr>
           <a:xfrm>
             <a:off x="9184767" y="7679817"/>
             <a:ext cx="51816" cy="51816"/>
@@ -5641,8 +5662,8 @@
             <a:noFill/>
             <a:prstDash val="solid"/>
           </a:ln>
-        </ns0:spPr>
-        <ns0:txBody>
+        </p:spPr>
+        <p:txBody>
           <a:bodyPr/>
           <a:lstStyle/>
           <a:p>
@@ -5651,23 +5672,23 @@
               <a:ea typeface="思源黑体 CN Bold" panose="020B0800000000000000" pitchFamily="34" charset="-122"/>
             </a:endParaRPr>
           </a:p>
-        </ns0:txBody>
-      </ns0:sp>
-      <ns0:sp>
-        <ns0:nvSpPr>
-          <ns0:cNvPr id="120" name="矩形 119">
-            <a:extLst>
-              <a:ext uri="{FF2B5EF4-FFF2-40B4-BE49-F238E27FC236}">
-                <ns2:creationId id="{FDBE36A0-5270-0A02-9570-33A9537A24F2}"/>
-              </a:ext>
-            </a:extLst>
-          </ns0:cNvPr>
-          <ns0:cNvSpPr>
-            <a:spLocks noGrp="1"/>
-          </ns0:cNvSpPr>
-          <ns0:nvPr/>
-        </ns0:nvSpPr>
-        <ns0:spPr>
+        </p:txBody>
+      </p:sp>
+      <p:sp>
+        <p:nvSpPr>
+          <p:cNvPr id="120" name="矩形 119">
+            <a:extLst>
+              <a:ext uri="{FF2B5EF4-FFF2-40B4-BE49-F238E27FC236}">
+                <a16:creationId xmlns:a16="http://schemas.microsoft.com/office/drawing/2014/main" id="{FDBE36A0-5270-0A02-9570-33A9537A24F2}"/>
+              </a:ext>
+            </a:extLst>
+          </p:cNvPr>
+          <p:cNvSpPr>
+            <a:spLocks noGrp="1"/>
+          </p:cNvSpPr>
+          <p:nvPr/>
+        </p:nvSpPr>
+        <p:spPr>
           <a:xfrm>
             <a:off x="9410700" y="7591425"/>
             <a:ext cx="876300" cy="257175"/>
@@ -5680,8 +5701,8 @@
             <a:noFill/>
             <a:prstDash val="solid"/>
           </a:ln>
-        </ns0:spPr>
-        <ns0:txBody>
+        </p:spPr>
+        <p:txBody>
           <a:bodyPr wrap="square" lIns="19050" tIns="0" rIns="19050" bIns="0" anchor="ctr">
             <a:normAutofit/>
           </a:bodyPr>
@@ -5709,23 +5730,23 @@
               <a:t>OpenSora</a:t>
             </a:r>
           </a:p>
-        </ns0:txBody>
-      </ns0:sp>
-      <ns0:sp>
-        <ns0:nvSpPr>
-          <ns0:cNvPr id="121" name="矩形 120">
-            <a:extLst>
-              <a:ext uri="{FF2B5EF4-FFF2-40B4-BE49-F238E27FC236}">
-                <ns2:creationId id="{947AD091-28A4-508E-F674-EF552DE05170}"/>
-              </a:ext>
-            </a:extLst>
-          </ns0:cNvPr>
-          <ns0:cNvSpPr>
-            <a:spLocks noGrp="1"/>
-          </ns0:cNvSpPr>
-          <ns0:nvPr/>
-        </ns0:nvSpPr>
-        <ns0:spPr>
+        </p:txBody>
+      </p:sp>
+      <p:sp>
+        <p:nvSpPr>
+          <p:cNvPr id="121" name="矩形 120">
+            <a:extLst>
+              <a:ext uri="{FF2B5EF4-FFF2-40B4-BE49-F238E27FC236}">
+                <a16:creationId xmlns:a16="http://schemas.microsoft.com/office/drawing/2014/main" id="{947AD091-28A4-508E-F674-EF552DE05170}"/>
+              </a:ext>
+            </a:extLst>
+          </p:cNvPr>
+          <p:cNvSpPr>
+            <a:spLocks noGrp="1"/>
+          </p:cNvSpPr>
+          <p:nvPr/>
+        </p:nvSpPr>
+        <p:spPr>
           <a:xfrm>
             <a:off x="8991600" y="8096250"/>
             <a:ext cx="1238250" cy="457200"/>
@@ -5738,8 +5759,8 @@
             <a:noFill/>
             <a:prstDash val="solid"/>
           </a:ln>
-        </ns0:spPr>
-        <ns0:txBody>
+        </p:spPr>
+        <p:txBody>
           <a:bodyPr wrap="square" lIns="19050" tIns="0" rIns="19050" bIns="0" anchor="ctr">
             <a:normAutofit/>
           </a:bodyPr>
@@ -5798,23 +5819,23 @@
               <a:t>T2V</a:t>
             </a:r>
           </a:p>
-        </ns0:txBody>
-      </ns0:sp>
-      <ns0:sp>
-        <ns0:nvSpPr>
-          <ns0:cNvPr id="122" name="矩形: 圆角 121">
-            <a:extLst>
-              <a:ext uri="{FF2B5EF4-FFF2-40B4-BE49-F238E27FC236}">
-                <ns2:creationId id="{F02C55CF-8A74-4889-21B5-956FB71693F3}"/>
-              </a:ext>
-            </a:extLst>
-          </ns0:cNvPr>
-          <ns0:cNvSpPr>
-            <a:spLocks noGrp="1"/>
-          </ns0:cNvSpPr>
-          <ns0:nvPr/>
-        </ns0:nvSpPr>
-        <ns0:spPr>
+        </p:txBody>
+      </p:sp>
+      <p:sp>
+        <p:nvSpPr>
+          <p:cNvPr id="122" name="矩形: 圆角 121">
+            <a:extLst>
+              <a:ext uri="{FF2B5EF4-FFF2-40B4-BE49-F238E27FC236}">
+                <a16:creationId xmlns:a16="http://schemas.microsoft.com/office/drawing/2014/main" id="{F02C55CF-8A74-4889-21B5-956FB71693F3}"/>
+              </a:ext>
+            </a:extLst>
+          </p:cNvPr>
+          <p:cNvSpPr>
+            <a:spLocks noGrp="1"/>
+          </p:cNvSpPr>
+          <p:nvPr/>
+        </p:nvSpPr>
+        <p:spPr>
           <a:xfrm>
             <a:off x="10363200" y="7419975"/>
             <a:ext cx="1447800" cy="1295400"/>
@@ -5833,8 +5854,8 @@
             </a:solidFill>
             <a:prstDash val="solid"/>
           </a:ln>
-        </ns0:spPr>
-        <ns0:style>
+        </p:spPr>
+        <p:style>
           <a:lnRef idx="0">
             <a:scrgbClr r="0" g="0" b="0"/>
           </a:lnRef>
@@ -5845,8 +5866,8 @@
             <a:scrgbClr r="0" g="0" b="0"/>
           </a:effectRef>
           <a:fontRef idx="major"/>
-        </ns0:style>
-        <ns0:txBody>
+        </p:style>
+        <p:txBody>
           <a:bodyPr/>
           <a:lstStyle/>
           <a:p>
@@ -5855,23 +5876,23 @@
               <a:ea typeface="思源黑体 CN Bold" panose="020B0800000000000000" pitchFamily="34" charset="-122"/>
             </a:endParaRPr>
           </a:p>
-        </ns0:txBody>
-      </ns0:sp>
-      <ns0:sp>
-        <ns0:nvSpPr>
-          <ns0:cNvPr id="123" name="椭圆 122">
-            <a:extLst>
-              <a:ext uri="{FF2B5EF4-FFF2-40B4-BE49-F238E27FC236}">
-                <ns2:creationId id="{DDE42347-D857-45EB-8EC2-C0E85C2A7DD3}"/>
-              </a:ext>
-            </a:extLst>
-          </ns0:cNvPr>
-          <ns0:cNvSpPr>
-            <a:spLocks noGrp="1"/>
-          </ns0:cNvSpPr>
-          <ns0:nvPr/>
-        </ns0:nvSpPr>
-        <ns0:spPr>
+        </p:txBody>
+      </p:sp>
+      <p:sp>
+        <p:nvSpPr>
+          <p:cNvPr id="123" name="椭圆 122">
+            <a:extLst>
+              <a:ext uri="{FF2B5EF4-FFF2-40B4-BE49-F238E27FC236}">
+                <a16:creationId xmlns:a16="http://schemas.microsoft.com/office/drawing/2014/main" id="{DDE42347-D857-45EB-8EC2-C0E85C2A7DD3}"/>
+              </a:ext>
+            </a:extLst>
+          </p:cNvPr>
+          <p:cNvSpPr>
+            <a:spLocks noGrp="1"/>
+          </p:cNvSpPr>
+          <p:nvPr/>
+        </p:nvSpPr>
+        <p:spPr>
           <a:xfrm>
             <a:off x="10660952" y="7569708"/>
             <a:ext cx="32385" cy="32385"/>
@@ -5886,8 +5907,8 @@
             <a:noFill/>
             <a:prstDash val="solid"/>
           </a:ln>
-        </ns0:spPr>
-        <ns0:txBody>
+        </p:spPr>
+        <p:txBody>
           <a:bodyPr/>
           <a:lstStyle/>
           <a:p>
@@ -5896,23 +5917,23 @@
               <a:ea typeface="思源黑体 CN Bold" panose="020B0800000000000000" pitchFamily="34" charset="-122"/>
             </a:endParaRPr>
           </a:p>
-        </ns0:txBody>
-      </ns0:sp>
-      <ns0:sp>
-        <ns0:nvSpPr>
-          <ns0:cNvPr id="124" name="椭圆 123">
-            <a:extLst>
-              <a:ext uri="{FF2B5EF4-FFF2-40B4-BE49-F238E27FC236}">
-                <ns2:creationId id="{7B1B748F-D93F-B17E-1580-E48B41D56957}"/>
-              </a:ext>
-            </a:extLst>
-          </ns0:cNvPr>
-          <ns0:cNvSpPr>
-            <a:spLocks noGrp="1"/>
-          </ns0:cNvSpPr>
-          <ns0:nvPr/>
-        </ns0:nvSpPr>
-        <ns0:spPr>
+        </p:txBody>
+      </p:sp>
+      <p:sp>
+        <p:nvSpPr>
+          <p:cNvPr id="124" name="椭圆 123">
+            <a:extLst>
+              <a:ext uri="{FF2B5EF4-FFF2-40B4-BE49-F238E27FC236}">
+                <a16:creationId xmlns:a16="http://schemas.microsoft.com/office/drawing/2014/main" id="{7B1B748F-D93F-B17E-1580-E48B41D56957}"/>
+              </a:ext>
+            </a:extLst>
+          </p:cNvPr>
+          <p:cNvSpPr>
+            <a:spLocks noGrp="1"/>
+          </p:cNvSpPr>
+          <p:nvPr/>
+        </p:nvSpPr>
+        <p:spPr>
           <a:xfrm>
             <a:off x="10637796" y="7611809"/>
             <a:ext cx="32385" cy="32385"/>
@@ -5927,8 +5948,8 @@
             <a:noFill/>
             <a:prstDash val="solid"/>
           </a:ln>
-        </ns0:spPr>
-        <ns0:txBody>
+        </p:spPr>
+        <p:txBody>
           <a:bodyPr/>
           <a:lstStyle/>
           <a:p>
@@ -5937,23 +5958,23 @@
               <a:ea typeface="思源黑体 CN Bold" panose="020B0800000000000000" pitchFamily="34" charset="-122"/>
             </a:endParaRPr>
           </a:p>
-        </ns0:txBody>
-      </ns0:sp>
-      <ns0:sp>
-        <ns0:nvSpPr>
-          <ns0:cNvPr id="125" name="椭圆 124">
-            <a:extLst>
-              <a:ext uri="{FF2B5EF4-FFF2-40B4-BE49-F238E27FC236}">
-                <ns2:creationId id="{FE9D0D9F-2625-768B-A250-06C41655C1C1}"/>
-              </a:ext>
-            </a:extLst>
-          </ns0:cNvPr>
-          <ns0:cNvSpPr>
-            <a:spLocks noGrp="1"/>
-          </ns0:cNvSpPr>
-          <ns0:nvPr/>
-        </ns0:nvSpPr>
-        <ns0:spPr>
+        </p:txBody>
+      </p:sp>
+      <p:sp>
+        <p:nvSpPr>
+          <p:cNvPr id="125" name="椭圆 124">
+            <a:extLst>
+              <a:ext uri="{FF2B5EF4-FFF2-40B4-BE49-F238E27FC236}">
+                <a16:creationId xmlns:a16="http://schemas.microsoft.com/office/drawing/2014/main" id="{FE9D0D9F-2625-768B-A250-06C41655C1C1}"/>
+              </a:ext>
+            </a:extLst>
+          </p:cNvPr>
+          <p:cNvSpPr>
+            <a:spLocks noGrp="1"/>
+          </p:cNvSpPr>
+          <p:nvPr/>
+        </p:nvSpPr>
+        <p:spPr>
           <a:xfrm>
             <a:off x="10679897" y="7611809"/>
             <a:ext cx="32385" cy="32385"/>
@@ -5968,8 +5989,8 @@
             <a:noFill/>
             <a:prstDash val="solid"/>
           </a:ln>
-        </ns0:spPr>
-        <ns0:txBody>
+        </p:spPr>
+        <p:txBody>
           <a:bodyPr/>
           <a:lstStyle/>
           <a:p>
@@ -5978,23 +5999,23 @@
               <a:ea typeface="思源黑体 CN Bold" panose="020B0800000000000000" pitchFamily="34" charset="-122"/>
             </a:endParaRPr>
           </a:p>
-        </ns0:txBody>
-      </ns0:sp>
-      <ns0:sp>
-        <ns0:nvSpPr>
-          <ns0:cNvPr id="126" name="椭圆 125">
-            <a:extLst>
-              <a:ext uri="{FF2B5EF4-FFF2-40B4-BE49-F238E27FC236}">
-                <ns2:creationId id="{59C9E200-361C-4BD4-E7E7-C8DADE552312}"/>
-              </a:ext>
-            </a:extLst>
-          </ns0:cNvPr>
-          <ns0:cNvSpPr>
-            <a:spLocks noGrp="1"/>
-          </ns0:cNvSpPr>
-          <ns0:nvPr/>
-        </ns0:nvSpPr>
-        <ns0:spPr>
+        </p:txBody>
+      </p:sp>
+      <p:sp>
+        <p:nvSpPr>
+          <p:cNvPr id="126" name="椭圆 125">
+            <a:extLst>
+              <a:ext uri="{FF2B5EF4-FFF2-40B4-BE49-F238E27FC236}">
+                <a16:creationId xmlns:a16="http://schemas.microsoft.com/office/drawing/2014/main" id="{59C9E200-361C-4BD4-E7E7-C8DADE552312}"/>
+              </a:ext>
+            </a:extLst>
+          </p:cNvPr>
+          <p:cNvSpPr>
+            <a:spLocks noGrp="1"/>
+          </p:cNvSpPr>
+          <p:nvPr/>
+        </p:nvSpPr>
+        <p:spPr>
           <a:xfrm>
             <a:off x="10614641" y="7653909"/>
             <a:ext cx="32385" cy="32385"/>
@@ -6009,8 +6030,8 @@
             <a:noFill/>
             <a:prstDash val="solid"/>
           </a:ln>
-        </ns0:spPr>
-        <ns0:txBody>
+        </p:spPr>
+        <p:txBody>
           <a:bodyPr/>
           <a:lstStyle/>
           <a:p>
@@ -6019,23 +6040,23 @@
               <a:ea typeface="思源黑体 CN Bold" panose="020B0800000000000000" pitchFamily="34" charset="-122"/>
             </a:endParaRPr>
           </a:p>
-        </ns0:txBody>
-      </ns0:sp>
-      <ns0:sp>
-        <ns0:nvSpPr>
-          <ns0:cNvPr id="127" name="椭圆 126">
-            <a:extLst>
-              <a:ext uri="{FF2B5EF4-FFF2-40B4-BE49-F238E27FC236}">
-                <ns2:creationId id="{038ECADF-A0B9-9618-E347-CD936224EF60}"/>
-              </a:ext>
-            </a:extLst>
-          </ns0:cNvPr>
-          <ns0:cNvSpPr>
-            <a:spLocks noGrp="1"/>
-          </ns0:cNvSpPr>
-          <ns0:nvPr/>
-        </ns0:nvSpPr>
-        <ns0:spPr>
+        </p:txBody>
+      </p:sp>
+      <p:sp>
+        <p:nvSpPr>
+          <p:cNvPr id="127" name="椭圆 126">
+            <a:extLst>
+              <a:ext uri="{FF2B5EF4-FFF2-40B4-BE49-F238E27FC236}">
+                <a16:creationId xmlns:a16="http://schemas.microsoft.com/office/drawing/2014/main" id="{038ECADF-A0B9-9618-E347-CD936224EF60}"/>
+              </a:ext>
+            </a:extLst>
+          </p:cNvPr>
+          <p:cNvSpPr>
+            <a:spLocks noGrp="1"/>
+          </p:cNvSpPr>
+          <p:nvPr/>
+        </p:nvSpPr>
+        <p:spPr>
           <a:xfrm>
             <a:off x="10656741" y="7653909"/>
             <a:ext cx="32385" cy="32385"/>
@@ -6050,8 +6071,8 @@
             <a:noFill/>
             <a:prstDash val="solid"/>
           </a:ln>
-        </ns0:spPr>
-        <ns0:txBody>
+        </p:spPr>
+        <p:txBody>
           <a:bodyPr/>
           <a:lstStyle/>
           <a:p>
@@ -6060,23 +6081,23 @@
               <a:ea typeface="思源黑体 CN Bold" panose="020B0800000000000000" pitchFamily="34" charset="-122"/>
             </a:endParaRPr>
           </a:p>
-        </ns0:txBody>
-      </ns0:sp>
-      <ns0:sp>
-        <ns0:nvSpPr>
-          <ns0:cNvPr id="128" name="椭圆 127">
-            <a:extLst>
-              <a:ext uri="{FF2B5EF4-FFF2-40B4-BE49-F238E27FC236}">
-                <ns2:creationId id="{AF06BCA5-5035-637E-727E-79401CE066D0}"/>
-              </a:ext>
-            </a:extLst>
-          </ns0:cNvPr>
-          <ns0:cNvSpPr>
-            <a:spLocks noGrp="1"/>
-          </ns0:cNvSpPr>
-          <ns0:nvPr/>
-        </ns0:nvSpPr>
-        <ns0:spPr>
+        </p:txBody>
+      </p:sp>
+      <p:sp>
+        <p:nvSpPr>
+          <p:cNvPr id="128" name="椭圆 127">
+            <a:extLst>
+              <a:ext uri="{FF2B5EF4-FFF2-40B4-BE49-F238E27FC236}">
+                <a16:creationId xmlns:a16="http://schemas.microsoft.com/office/drawing/2014/main" id="{AF06BCA5-5035-637E-727E-79401CE066D0}"/>
+              </a:ext>
+            </a:extLst>
+          </p:cNvPr>
+          <p:cNvSpPr>
+            <a:spLocks noGrp="1"/>
+          </p:cNvSpPr>
+          <p:nvPr/>
+        </p:nvSpPr>
+        <p:spPr>
           <a:xfrm>
             <a:off x="10698842" y="7653909"/>
             <a:ext cx="32385" cy="32385"/>
@@ -6091,8 +6112,8 @@
             <a:noFill/>
             <a:prstDash val="solid"/>
           </a:ln>
-        </ns0:spPr>
-        <ns0:txBody>
+        </p:spPr>
+        <p:txBody>
           <a:bodyPr/>
           <a:lstStyle/>
           <a:p>
@@ -6101,23 +6122,23 @@
               <a:ea typeface="思源黑体 CN Bold" panose="020B0800000000000000" pitchFamily="34" charset="-122"/>
             </a:endParaRPr>
           </a:p>
-        </ns0:txBody>
-      </ns0:sp>
-      <ns0:sp>
-        <ns0:nvSpPr>
-          <ns0:cNvPr id="129" name="椭圆 128">
-            <a:extLst>
-              <a:ext uri="{FF2B5EF4-FFF2-40B4-BE49-F238E27FC236}">
-                <ns2:creationId id="{EDA78523-633C-C23B-1BA1-67015634BA0D}"/>
-              </a:ext>
-            </a:extLst>
-          </ns0:cNvPr>
-          <ns0:cNvSpPr>
-            <a:spLocks noGrp="1"/>
-          </ns0:cNvSpPr>
-          <ns0:nvPr/>
-        </ns0:nvSpPr>
-        <ns0:spPr>
+        </p:txBody>
+      </p:sp>
+      <p:sp>
+        <p:nvSpPr>
+          <p:cNvPr id="129" name="椭圆 128">
+            <a:extLst>
+              <a:ext uri="{FF2B5EF4-FFF2-40B4-BE49-F238E27FC236}">
+                <a16:creationId xmlns:a16="http://schemas.microsoft.com/office/drawing/2014/main" id="{EDA78523-633C-C23B-1BA1-67015634BA0D}"/>
+              </a:ext>
+            </a:extLst>
+          </p:cNvPr>
+          <p:cNvSpPr>
+            <a:spLocks noGrp="1"/>
+          </p:cNvSpPr>
+          <p:nvPr/>
+        </p:nvSpPr>
+        <p:spPr>
           <a:xfrm>
             <a:off x="10591486" y="7696010"/>
             <a:ext cx="32385" cy="32385"/>
@@ -6132,8 +6153,8 @@
             <a:noFill/>
             <a:prstDash val="solid"/>
           </a:ln>
-        </ns0:spPr>
-        <ns0:txBody>
+        </p:spPr>
+        <p:txBody>
           <a:bodyPr/>
           <a:lstStyle/>
           <a:p>
@@ -6142,23 +6163,23 @@
               <a:ea typeface="思源黑体 CN Bold" panose="020B0800000000000000" pitchFamily="34" charset="-122"/>
             </a:endParaRPr>
           </a:p>
-        </ns0:txBody>
-      </ns0:sp>
-      <ns0:sp>
-        <ns0:nvSpPr>
-          <ns0:cNvPr id="130" name="椭圆 129">
-            <a:extLst>
-              <a:ext uri="{FF2B5EF4-FFF2-40B4-BE49-F238E27FC236}">
-                <ns2:creationId id="{E0DC13B5-506D-3B7C-EA25-C1EA5F860D1F}"/>
-              </a:ext>
-            </a:extLst>
-          </ns0:cNvPr>
-          <ns0:cNvSpPr>
-            <a:spLocks noGrp="1"/>
-          </ns0:cNvSpPr>
-          <ns0:nvPr/>
-        </ns0:nvSpPr>
-        <ns0:spPr>
+        </p:txBody>
+      </p:sp>
+      <p:sp>
+        <p:nvSpPr>
+          <p:cNvPr id="130" name="椭圆 129">
+            <a:extLst>
+              <a:ext uri="{FF2B5EF4-FFF2-40B4-BE49-F238E27FC236}">
+                <a16:creationId xmlns:a16="http://schemas.microsoft.com/office/drawing/2014/main" id="{E0DC13B5-506D-3B7C-EA25-C1EA5F860D1F}"/>
+              </a:ext>
+            </a:extLst>
+          </p:cNvPr>
+          <p:cNvSpPr>
+            <a:spLocks noGrp="1"/>
+          </p:cNvSpPr>
+          <p:nvPr/>
+        </p:nvSpPr>
+        <p:spPr>
           <a:xfrm>
             <a:off x="10633586" y="7696010"/>
             <a:ext cx="32385" cy="32385"/>
@@ -6173,8 +6194,8 @@
             <a:noFill/>
             <a:prstDash val="solid"/>
           </a:ln>
-        </ns0:spPr>
-        <ns0:txBody>
+        </p:spPr>
+        <p:txBody>
           <a:bodyPr/>
           <a:lstStyle/>
           <a:p>
@@ -6183,23 +6204,23 @@
               <a:ea typeface="思源黑体 CN Bold" panose="020B0800000000000000" pitchFamily="34" charset="-122"/>
             </a:endParaRPr>
           </a:p>
-        </ns0:txBody>
-      </ns0:sp>
-      <ns0:sp>
-        <ns0:nvSpPr>
-          <ns0:cNvPr id="131" name="椭圆 130">
-            <a:extLst>
-              <a:ext uri="{FF2B5EF4-FFF2-40B4-BE49-F238E27FC236}">
-                <ns2:creationId id="{826F3AA5-0503-7A31-C99C-F71427649204}"/>
-              </a:ext>
-            </a:extLst>
-          </ns0:cNvPr>
-          <ns0:cNvSpPr>
-            <a:spLocks noGrp="1"/>
-          </ns0:cNvSpPr>
-          <ns0:nvPr/>
-        </ns0:nvSpPr>
-        <ns0:spPr>
+        </p:txBody>
+      </p:sp>
+      <p:sp>
+        <p:nvSpPr>
+          <p:cNvPr id="131" name="椭圆 130">
+            <a:extLst>
+              <a:ext uri="{FF2B5EF4-FFF2-40B4-BE49-F238E27FC236}">
+                <a16:creationId xmlns:a16="http://schemas.microsoft.com/office/drawing/2014/main" id="{826F3AA5-0503-7A31-C99C-F71427649204}"/>
+              </a:ext>
+            </a:extLst>
+          </p:cNvPr>
+          <p:cNvSpPr>
+            <a:spLocks noGrp="1"/>
+          </p:cNvSpPr>
+          <p:nvPr/>
+        </p:nvSpPr>
+        <p:spPr>
           <a:xfrm>
             <a:off x="10675687" y="7696010"/>
             <a:ext cx="32385" cy="32385"/>
@@ -6214,8 +6235,8 @@
             <a:noFill/>
             <a:prstDash val="solid"/>
           </a:ln>
-        </ns0:spPr>
-        <ns0:txBody>
+        </p:spPr>
+        <p:txBody>
           <a:bodyPr/>
           <a:lstStyle/>
           <a:p>
@@ -6224,23 +6245,23 @@
               <a:ea typeface="思源黑体 CN Bold" panose="020B0800000000000000" pitchFamily="34" charset="-122"/>
             </a:endParaRPr>
           </a:p>
-        </ns0:txBody>
-      </ns0:sp>
-      <ns0:sp>
-        <ns0:nvSpPr>
-          <ns0:cNvPr id="132" name="椭圆 131">
-            <a:extLst>
-              <a:ext uri="{FF2B5EF4-FFF2-40B4-BE49-F238E27FC236}">
-                <ns2:creationId id="{50154261-AFBE-6FE2-C9F0-D0FF885A77DC}"/>
-              </a:ext>
-            </a:extLst>
-          </ns0:cNvPr>
-          <ns0:cNvSpPr>
-            <a:spLocks noGrp="1"/>
-          </ns0:cNvSpPr>
-          <ns0:nvPr/>
-        </ns0:nvSpPr>
-        <ns0:spPr>
+        </p:txBody>
+      </p:sp>
+      <p:sp>
+        <p:nvSpPr>
+          <p:cNvPr id="132" name="椭圆 131">
+            <a:extLst>
+              <a:ext uri="{FF2B5EF4-FFF2-40B4-BE49-F238E27FC236}">
+                <a16:creationId xmlns:a16="http://schemas.microsoft.com/office/drawing/2014/main" id="{50154261-AFBE-6FE2-C9F0-D0FF885A77DC}"/>
+              </a:ext>
+            </a:extLst>
+          </p:cNvPr>
+          <p:cNvSpPr>
+            <a:spLocks noGrp="1"/>
+          </p:cNvSpPr>
+          <p:nvPr/>
+        </p:nvSpPr>
+        <p:spPr>
           <a:xfrm>
             <a:off x="10717787" y="7696010"/>
             <a:ext cx="32385" cy="32385"/>
@@ -6255,8 +6276,8 @@
             <a:noFill/>
             <a:prstDash val="solid"/>
           </a:ln>
-        </ns0:spPr>
-        <ns0:txBody>
+        </p:spPr>
+        <p:txBody>
           <a:bodyPr/>
           <a:lstStyle/>
           <a:p>
@@ -6265,23 +6286,23 @@
               <a:ea typeface="思源黑体 CN Bold" panose="020B0800000000000000" pitchFamily="34" charset="-122"/>
             </a:endParaRPr>
           </a:p>
-        </ns0:txBody>
-      </ns0:sp>
-      <ns0:sp>
-        <ns0:nvSpPr>
-          <ns0:cNvPr id="133" name="矩形 132">
-            <a:extLst>
-              <a:ext uri="{FF2B5EF4-FFF2-40B4-BE49-F238E27FC236}">
-                <ns2:creationId id="{065E1E00-5E4C-E7C8-2DF9-2D5CBF289D2B}"/>
-              </a:ext>
-            </a:extLst>
-          </ns0:cNvPr>
-          <ns0:cNvSpPr>
-            <a:spLocks noGrp="1"/>
-          </ns0:cNvSpPr>
-          <ns0:nvPr/>
-        </ns0:nvSpPr>
-        <ns0:spPr>
+        </p:txBody>
+      </p:sp>
+      <p:sp>
+        <p:nvSpPr>
+          <p:cNvPr id="133" name="矩形 132">
+            <a:extLst>
+              <a:ext uri="{FF2B5EF4-FFF2-40B4-BE49-F238E27FC236}">
+                <a16:creationId xmlns:a16="http://schemas.microsoft.com/office/drawing/2014/main" id="{065E1E00-5E4C-E7C8-2DF9-2D5CBF289D2B}"/>
+              </a:ext>
+            </a:extLst>
+          </p:cNvPr>
+          <p:cNvSpPr>
+            <a:spLocks noGrp="1"/>
+          </p:cNvSpPr>
+          <p:nvPr/>
+        </p:nvSpPr>
+        <p:spPr>
           <a:xfrm>
             <a:off x="10896600" y="7591425"/>
             <a:ext cx="857250" cy="257175"/>
@@ -6294,8 +6315,8 @@
             <a:noFill/>
             <a:prstDash val="solid"/>
           </a:ln>
-        </ns0:spPr>
-        <ns0:txBody>
+        </p:spPr>
+        <p:txBody>
           <a:bodyPr wrap="square" lIns="19050" tIns="0" rIns="19050" bIns="0" anchor="ctr">
             <a:normAutofit/>
           </a:bodyPr>
@@ -6323,23 +6344,23 @@
               <a:t>Flux</a:t>
             </a:r>
           </a:p>
-        </ns0:txBody>
-      </ns0:sp>
-      <ns0:sp>
-        <ns0:nvSpPr>
-          <ns0:cNvPr id="134" name="矩形 133">
-            <a:extLst>
-              <a:ext uri="{FF2B5EF4-FFF2-40B4-BE49-F238E27FC236}">
-                <ns2:creationId id="{E8E807BE-3D05-AD6E-CBF7-4E8636A43B4E}"/>
-              </a:ext>
-            </a:extLst>
-          </ns0:cNvPr>
-          <ns0:cNvSpPr>
-            <a:spLocks noGrp="1"/>
-          </ns0:cNvSpPr>
-          <ns0:nvPr/>
-        </ns0:nvSpPr>
-        <ns0:spPr>
+        </p:txBody>
+      </p:sp>
+      <p:sp>
+        <p:nvSpPr>
+          <p:cNvPr id="134" name="矩形 133">
+            <a:extLst>
+              <a:ext uri="{FF2B5EF4-FFF2-40B4-BE49-F238E27FC236}">
+                <a16:creationId xmlns:a16="http://schemas.microsoft.com/office/drawing/2014/main" id="{E8E807BE-3D05-AD6E-CBF7-4E8636A43B4E}"/>
+              </a:ext>
+            </a:extLst>
+          </p:cNvPr>
+          <p:cNvSpPr>
+            <a:spLocks noGrp="1"/>
+          </p:cNvSpPr>
+          <p:nvPr/>
+        </p:nvSpPr>
+        <p:spPr>
           <a:xfrm>
             <a:off x="10477500" y="8096250"/>
             <a:ext cx="1219200" cy="457200"/>
@@ -6352,8 +6373,8 @@
             <a:noFill/>
             <a:prstDash val="solid"/>
           </a:ln>
-        </ns0:spPr>
-        <ns0:txBody>
+        </p:spPr>
+        <p:txBody>
           <a:bodyPr wrap="square" lIns="19050" tIns="0" rIns="19050" bIns="0" anchor="ctr">
             <a:normAutofit/>
           </a:bodyPr>
@@ -6412,21 +6433,21 @@
               <a:t>Image / Video</a:t>
             </a:r>
           </a:p>
-        </ns0:txBody>
-      </ns0:sp>
-      <ns0:sp>
-        <ns0:nvSpPr>
-          <ns0:cNvPr id="135" name="文本框 134">
-            <a:extLst>
-              <a:ext uri="{FF2B5EF4-FFF2-40B4-BE49-F238E27FC236}">
-                <ns2:creationId id="{606191EA-90E3-EC77-EA7C-C1C9AE880E53}"/>
-              </a:ext>
-            </a:extLst>
-          </ns0:cNvPr>
-          <ns0:cNvSpPr txBox="1"/>
-          <ns0:nvPr/>
-        </ns0:nvSpPr>
-        <ns0:spPr>
+        </p:txBody>
+      </p:sp>
+      <p:sp>
+        <p:nvSpPr>
+          <p:cNvPr id="135" name="文本框 134">
+            <a:extLst>
+              <a:ext uri="{FF2B5EF4-FFF2-40B4-BE49-F238E27FC236}">
+                <a16:creationId xmlns:a16="http://schemas.microsoft.com/office/drawing/2014/main" id="{606191EA-90E3-EC77-EA7C-C1C9AE880E53}"/>
+              </a:ext>
+            </a:extLst>
+          </p:cNvPr>
+          <p:cNvSpPr txBox="1"/>
+          <p:nvPr/>
+        </p:nvSpPr>
+        <p:spPr>
           <a:xfrm>
             <a:off x="11630025" y="7652176"/>
             <a:ext cx="3026682" cy="830997"/>
@@ -6435,8 +6456,8 @@
             <a:avLst/>
           </a:prstGeom>
           <a:noFill/>
-        </ns0:spPr>
-        <ns0:txBody>
+        </p:spPr>
+        <p:txBody>
           <a:bodyPr wrap="square" rtlCol="0">
             <a:spAutoFit/>
           </a:bodyPr>
@@ -6468,31 +6489,31 @@
               <a:cs typeface="阿里巴巴普惠体 2.0 65 Medium" panose="00020600040101010101" pitchFamily="18" charset="-122"/>
             </a:endParaRPr>
           </a:p>
-        </ns0:txBody>
-      </ns0:sp>
-      <ns0:sp>
-        <ns0:nvSpPr>
-          <ns0:cNvPr id="138" name="文本框 137">
-            <a:extLst>
-              <a:ext uri="{FF2B5EF4-FFF2-40B4-BE49-F238E27FC236}">
-                <ns2:creationId id="{98F8BB29-C765-72C3-367E-BD9558573DC8}"/>
-              </a:ext>
-            </a:extLst>
-          </ns0:cNvPr>
-          <ns0:cNvSpPr txBox="1"/>
-          <ns0:nvPr/>
-        </ns0:nvSpPr>
-        <ns0:spPr>
-          <a:xfrm>
-            <a:off x="117459" y="9143955"/>
+        </p:txBody>
+      </p:sp>
+      <p:sp>
+        <p:nvSpPr>
+          <p:cNvPr id="138" name="文本框 137">
+            <a:extLst>
+              <a:ext uri="{FF2B5EF4-FFF2-40B4-BE49-F238E27FC236}">
+                <a16:creationId xmlns:a16="http://schemas.microsoft.com/office/drawing/2014/main" id="{98F8BB29-C765-72C3-367E-BD9558573DC8}"/>
+              </a:ext>
+            </a:extLst>
+          </p:cNvPr>
+          <p:cNvSpPr txBox="1"/>
+          <p:nvPr/>
+        </p:nvSpPr>
+        <p:spPr>
+          <a:xfrm>
+            <a:off x="117459" y="9165461"/>
             <a:ext cx="5187966" cy="369332"/>
           </a:xfrm>
           <a:prstGeom prst="rect">
             <a:avLst/>
           </a:prstGeom>
           <a:noFill/>
-        </ns0:spPr>
-        <ns0:txBody>
+        </p:spPr>
+        <p:txBody>
           <a:bodyPr wrap="square">
             <a:spAutoFit/>
           </a:bodyPr>
@@ -6528,23 +6549,23 @@
               <a:cs typeface="Microsoft YaHei UI"/>
             </a:endParaRPr>
           </a:p>
-        </ns0:txBody>
-      </ns0:sp>
-      <ns0:sp>
-        <ns0:nvSpPr>
-          <ns0:cNvPr id="139" name="直接连接符 138">
-            <a:extLst>
-              <a:ext uri="{FF2B5EF4-FFF2-40B4-BE49-F238E27FC236}">
-                <ns2:creationId id="{C30F8401-7393-E4EB-A85A-6C107554E7D8}"/>
-              </a:ext>
-            </a:extLst>
-          </ns0:cNvPr>
-          <ns0:cNvSpPr>
-            <a:spLocks noGrp="1"/>
-          </ns0:cNvSpPr>
-          <ns0:nvPr/>
-        </ns0:nvSpPr>
-        <ns0:spPr>
+        </p:txBody>
+      </p:sp>
+      <p:sp>
+        <p:nvSpPr>
+          <p:cNvPr id="139" name="直接连接符 138">
+            <a:extLst>
+              <a:ext uri="{FF2B5EF4-FFF2-40B4-BE49-F238E27FC236}">
+                <a16:creationId xmlns:a16="http://schemas.microsoft.com/office/drawing/2014/main" id="{C30F8401-7393-E4EB-A85A-6C107554E7D8}"/>
+              </a:ext>
+            </a:extLst>
+          </p:cNvPr>
+          <p:cNvSpPr>
+            <a:spLocks noGrp="1"/>
+          </p:cNvSpPr>
+          <p:nvPr/>
+        </p:nvSpPr>
+        <p:spPr>
           <a:xfrm>
             <a:off x="5448929" y="9188110"/>
             <a:ext cx="0" cy="381000"/>
@@ -6559,32 +6580,32 @@
             </a:solidFill>
             <a:prstDash val="solid"/>
           </a:ln>
-        </ns0:spPr>
-        <ns0:txBody>
+        </p:spPr>
+        <p:txBody>
           <a:bodyPr/>
           <a:lstStyle/>
           <a:p>
             <a:endParaRPr lang="zh-CN" altLang="en-US"/>
           </a:p>
-        </ns0:txBody>
-      </ns0:sp>
-      <ns0:sp>
-        <ns0:nvSpPr>
-          <ns0:cNvPr id="140" name="矩形 139">
-            <a:extLst>
-              <a:ext uri="{FF2B5EF4-FFF2-40B4-BE49-F238E27FC236}">
-                <ns2:creationId id="{13F257D1-1EA9-B9DC-3A2A-B2FE11EFC7FD}"/>
-              </a:ext>
-            </a:extLst>
-          </ns0:cNvPr>
-          <ns0:cNvSpPr>
-            <a:spLocks noGrp="1"/>
-          </ns0:cNvSpPr>
-          <ns0:nvPr/>
-        </ns0:nvSpPr>
-        <ns0:spPr>
-          <a:xfrm>
-            <a:off x="6191250" y="9143394"/>
+        </p:txBody>
+      </p:sp>
+      <p:sp>
+        <p:nvSpPr>
+          <p:cNvPr id="140" name="矩形 139">
+            <a:extLst>
+              <a:ext uri="{FF2B5EF4-FFF2-40B4-BE49-F238E27FC236}">
+                <a16:creationId xmlns:a16="http://schemas.microsoft.com/office/drawing/2014/main" id="{13F257D1-1EA9-B9DC-3A2A-B2FE11EFC7FD}"/>
+              </a:ext>
+            </a:extLst>
+          </p:cNvPr>
+          <p:cNvSpPr>
+            <a:spLocks noGrp="1"/>
+          </p:cNvSpPr>
+          <p:nvPr/>
+        </p:nvSpPr>
+        <p:spPr>
+          <a:xfrm>
+            <a:off x="6191250" y="9159627"/>
             <a:ext cx="3429000" cy="381000"/>
           </a:xfrm>
           <a:prstGeom prst="rect">
@@ -6595,8 +6616,8 @@
             <a:noFill/>
             <a:prstDash val="solid"/>
           </a:ln>
-        </ns0:spPr>
-        <ns0:txBody>
+        </p:spPr>
+        <p:txBody>
           <a:bodyPr wrap="square" lIns="19050" tIns="0" rIns="19050" bIns="0" anchor="ctr">
             <a:normAutofit/>
           </a:bodyPr>
@@ -6621,31 +6642,31 @@
               <a:cs typeface="Microsoft YaHei UI"/>
             </a:endParaRPr>
           </a:p>
-        </ns0:txBody>
-      </ns0:sp>
-      <ns0:sp>
-        <ns0:nvSpPr>
-          <ns0:cNvPr id="142" name="文本框 141">
-            <a:extLst>
-              <a:ext uri="{FF2B5EF4-FFF2-40B4-BE49-F238E27FC236}">
-                <ns2:creationId id="{351C10AF-0178-2718-8A0F-6960ECA1B688}"/>
-              </a:ext>
-            </a:extLst>
-          </ns0:cNvPr>
-          <ns0:cNvSpPr txBox="1"/>
-          <ns0:nvPr/>
-        </ns0:nvSpPr>
-        <ns0:spPr>
-          <a:xfrm>
-            <a:off x="5599221" y="9143955"/>
+        </p:txBody>
+      </p:sp>
+      <p:sp>
+        <p:nvSpPr>
+          <p:cNvPr id="142" name="文本框 141">
+            <a:extLst>
+              <a:ext uri="{FF2B5EF4-FFF2-40B4-BE49-F238E27FC236}">
+                <a16:creationId xmlns:a16="http://schemas.microsoft.com/office/drawing/2014/main" id="{351C10AF-0178-2718-8A0F-6960ECA1B688}"/>
+              </a:ext>
+            </a:extLst>
+          </p:cNvPr>
+          <p:cNvSpPr txBox="1"/>
+          <p:nvPr/>
+        </p:nvSpPr>
+        <p:spPr>
+          <a:xfrm>
+            <a:off x="5599221" y="9165461"/>
             <a:ext cx="3498106" cy="369332"/>
           </a:xfrm>
           <a:prstGeom prst="rect">
             <a:avLst/>
           </a:prstGeom>
           <a:noFill/>
-        </ns0:spPr>
-        <ns0:txBody>
+        </p:spPr>
+        <p:txBody>
           <a:bodyPr wrap="square">
             <a:spAutoFit/>
           </a:bodyPr>
@@ -6670,34 +6691,34 @@
                 <a:ea typeface="思源黑体 CN Bold" panose="020B0800000000000000" pitchFamily="34" charset="-122"/>
                 <a:cs typeface="Microsoft YaHei UI"/>
               </a:rPr>
-              <a:t>Stack sampler-level and model-level methods</a:t>
+              <a:t>Sampler + model stack</a:t>
             </a:r>
           </a:p>
-        </ns0:txBody>
-      </ns0:sp>
-      <ns0:sp>
-        <ns0:nvSpPr>
-          <ns0:cNvPr id="145" name="文本框 144">
-            <a:extLst>
-              <a:ext uri="{FF2B5EF4-FFF2-40B4-BE49-F238E27FC236}">
-                <ns2:creationId id="{CF60415F-95B8-66D3-700C-5BD7C0C8452A}"/>
-              </a:ext>
-            </a:extLst>
-          </ns0:cNvPr>
-          <ns0:cNvSpPr txBox="1"/>
-          <ns0:nvPr/>
-        </ns0:nvSpPr>
-        <ns0:spPr>
-          <a:xfrm>
-            <a:off x="12153417" y="9143955"/>
+        </p:txBody>
+      </p:sp>
+      <p:sp>
+        <p:nvSpPr>
+          <p:cNvPr id="145" name="文本框 144">
+            <a:extLst>
+              <a:ext uri="{FF2B5EF4-FFF2-40B4-BE49-F238E27FC236}">
+                <a16:creationId xmlns:a16="http://schemas.microsoft.com/office/drawing/2014/main" id="{CF60415F-95B8-66D3-700C-5BD7C0C8452A}"/>
+              </a:ext>
+            </a:extLst>
+          </p:cNvPr>
+          <p:cNvSpPr txBox="1"/>
+          <p:nvPr/>
+        </p:nvSpPr>
+        <p:spPr>
+          <a:xfrm>
+            <a:off x="12153417" y="9165461"/>
             <a:ext cx="2334211" cy="369332"/>
           </a:xfrm>
           <a:prstGeom prst="rect">
             <a:avLst/>
           </a:prstGeom>
           <a:noFill/>
-        </ns0:spPr>
-        <ns0:txBody>
+        </p:spPr>
+        <p:txBody>
           <a:bodyPr wrap="square">
             <a:spAutoFit/>
           </a:bodyPr>
@@ -6715,26 +6736,26 @@
               <a:t>ComfyUI-AccelDiff</a:t>
             </a:r>
           </a:p>
-        </ns0:txBody>
-      </ns0:sp>
-      <ns0:sp>
-        <ns0:nvSpPr>
-          <ns0:cNvPr id="147" name="矩形: 圆角 146">
-            <a:extLst>
-              <a:ext uri="{FF2B5EF4-FFF2-40B4-BE49-F238E27FC236}">
-                <ns2:creationId id="{CB209F67-C876-086A-CD99-E40722FA5E43}"/>
-              </a:ext>
-            </a:extLst>
-          </ns0:cNvPr>
-          <ns0:cNvSpPr>
-            <a:spLocks noGrp="1"/>
-          </ns0:cNvSpPr>
-          <ns0:nvPr/>
-        </ns0:nvSpPr>
-        <ns0:spPr>
-          <a:xfrm>
-            <a:off x="11506200" y="409575"/>
-            <a:ext cx="2905125" cy="581025"/>
+        </p:txBody>
+      </p:sp>
+      <p:sp>
+        <p:nvSpPr>
+          <p:cNvPr id="147" name="矩形: 圆角 146">
+            <a:extLst>
+              <a:ext uri="{FF2B5EF4-FFF2-40B4-BE49-F238E27FC236}">
+                <a16:creationId xmlns:a16="http://schemas.microsoft.com/office/drawing/2014/main" id="{CB209F67-C876-086A-CD99-E40722FA5E43}"/>
+              </a:ext>
+            </a:extLst>
+          </p:cNvPr>
+          <p:cNvSpPr>
+            <a:spLocks noGrp="1"/>
+          </p:cNvSpPr>
+          <p:nvPr/>
+        </p:nvSpPr>
+        <p:spPr>
+          <a:xfrm>
+            <a:off x="10751820" y="409575"/>
+            <a:ext cx="3659505" cy="581025"/>
           </a:xfrm>
           <a:prstGeom prst="roundRect">
             <a:avLst>
@@ -6752,8 +6773,8 @@
             </a:solidFill>
             <a:prstDash val="solid"/>
           </a:ln>
-        </ns0:spPr>
-        <ns0:txBody>
+        </p:spPr>
+        <p:txBody>
           <a:bodyPr/>
           <a:lstStyle/>
           <a:p>
@@ -6762,25 +6783,25 @@
               <a:ea typeface="思源黑体 CN Bold" panose="020B0800000000000000" pitchFamily="34" charset="-122"/>
             </a:endParaRPr>
           </a:p>
-        </ns0:txBody>
-      </ns0:sp>
-      <ns0:sp>
-        <ns0:nvSpPr>
-          <ns0:cNvPr id="148" name="任意多边形: 形状 147">
-            <a:extLst>
-              <a:ext uri="{FF2B5EF4-FFF2-40B4-BE49-F238E27FC236}">
-                <ns2:creationId id="{677648FC-5800-CBF4-2185-D35CF7D9E3C1}"/>
-              </a:ext>
-            </a:extLst>
-          </ns0:cNvPr>
-          <ns0:cNvSpPr>
-            <a:spLocks noGrp="1"/>
-          </ns0:cNvSpPr>
-          <ns0:nvPr/>
-        </ns0:nvSpPr>
-        <ns0:spPr>
-          <a:xfrm>
-            <a:off x="11763375" y="514350"/>
+        </p:txBody>
+      </p:sp>
+      <p:sp>
+        <p:nvSpPr>
+          <p:cNvPr id="148" name="任意多边形: 形状 147">
+            <a:extLst>
+              <a:ext uri="{FF2B5EF4-FFF2-40B4-BE49-F238E27FC236}">
+                <a16:creationId xmlns:a16="http://schemas.microsoft.com/office/drawing/2014/main" id="{677648FC-5800-CBF4-2185-D35CF7D9E3C1}"/>
+              </a:ext>
+            </a:extLst>
+          </p:cNvPr>
+          <p:cNvSpPr>
+            <a:spLocks noGrp="1"/>
+          </p:cNvSpPr>
+          <p:nvPr/>
+        </p:nvSpPr>
+        <p:spPr>
+          <a:xfrm>
+            <a:off x="10844645" y="503754"/>
             <a:ext cx="304800" cy="342900"/>
           </a:xfrm>
           <a:custGeom>
@@ -6822,33 +6843,33 @@
             </a:solidFill>
             <a:prstDash val="solid"/>
           </a:ln>
-        </ns0:spPr>
-        <ns0:txBody>
+        </p:spPr>
+        <p:txBody>
           <a:bodyPr/>
           <a:lstStyle/>
           <a:p>
             <a:endParaRPr lang="zh-CN" altLang="en-US"/>
           </a:p>
-        </ns0:txBody>
-      </ns0:sp>
-      <ns0:sp>
-        <ns0:nvSpPr>
-          <ns0:cNvPr id="149" name="矩形 148">
-            <a:extLst>
-              <a:ext uri="{FF2B5EF4-FFF2-40B4-BE49-F238E27FC236}">
-                <ns2:creationId id="{5DBDF579-5FA5-2EB7-57FB-5AF3B6354908}"/>
-              </a:ext>
-            </a:extLst>
-          </ns0:cNvPr>
-          <ns0:cNvSpPr>
-            <a:spLocks noGrp="1"/>
-          </ns0:cNvSpPr>
-          <ns0:nvPr/>
-        </ns0:nvSpPr>
-        <ns0:spPr>
-          <a:xfrm>
-            <a:off x="12192000" y="571500"/>
-            <a:ext cx="1905000" cy="276225"/>
+        </p:txBody>
+      </p:sp>
+      <p:sp>
+        <p:nvSpPr>
+          <p:cNvPr id="149" name="矩形 148">
+            <a:extLst>
+              <a:ext uri="{FF2B5EF4-FFF2-40B4-BE49-F238E27FC236}">
+                <a16:creationId xmlns:a16="http://schemas.microsoft.com/office/drawing/2014/main" id="{5DBDF579-5FA5-2EB7-57FB-5AF3B6354908}"/>
+              </a:ext>
+            </a:extLst>
+          </p:cNvPr>
+          <p:cNvSpPr>
+            <a:spLocks noGrp="1"/>
+          </p:cNvSpPr>
+          <p:nvPr/>
+        </p:nvSpPr>
+        <p:spPr>
+          <a:xfrm>
+            <a:off x="11310505" y="506364"/>
+            <a:ext cx="3225050" cy="322311"/>
           </a:xfrm>
           <a:prstGeom prst="rect">
             <a:avLst/>
@@ -6858,10 +6879,59 @@
             <a:noFill/>
             <a:prstDash val="solid"/>
           </a:ln>
-        </ns0:spPr>
-        <ns0:txBody>
+        </p:spPr>
+        <p:txBody>
           <a:bodyPr wrap="square" lIns="19050" tIns="0" rIns="19050" bIns="0" anchor="ctr">
-            <a:normAutofit fontScale="90522"/>
+            <a:normAutofit fontScale="98022"/>
+          </a:bodyPr>
+          <a:lstStyle/>
+          <a:p>
+            <a:pPr algn="l">
+              <a:defRPr sz="1500" b="1">
+                <a:solidFill>
+                  <a:srgbClr val="FFFFFF"/>
+                </a:solidFill>
+                <a:latin typeface="Microsoft YaHei UI"/>
+                <a:ea typeface="Microsoft YaHei UI"/>
+                <a:cs typeface="Microsoft YaHei UI"/>
+              </a:defRPr>
+            </a:pPr>
+            <a:endParaRPr sz="1600" b="1" dirty="0">
+              <a:solidFill>
+                <a:srgbClr val="FFFFFF"/>
+              </a:solidFill>
+              <a:latin typeface="思源黑体 CN Bold" panose="020B0800000000000000" pitchFamily="34" charset="-122"/>
+              <a:ea typeface="思源黑体 CN Bold" panose="020B0800000000000000" pitchFamily="34" charset="-122"/>
+              <a:cs typeface="Microsoft YaHei UI"/>
+            </a:endParaRPr>
+          </a:p>
+        </p:txBody>
+      </p:sp>
+      <p:sp>
+        <p:nvSpPr>
+          <p:cNvPr id="7" name="文本框 6">
+            <a:extLst>
+              <a:ext uri="{FF2B5EF4-FFF2-40B4-BE49-F238E27FC236}">
+                <a16:creationId xmlns:a16="http://schemas.microsoft.com/office/drawing/2014/main" id="{E93CD9EA-C93D-06AF-130A-469400BB5E4F}"/>
+              </a:ext>
+            </a:extLst>
+          </p:cNvPr>
+          <p:cNvSpPr txBox="1"/>
+          <p:nvPr/>
+        </p:nvSpPr>
+        <p:spPr>
+          <a:xfrm>
+            <a:off x="11102859" y="513883"/>
+            <a:ext cx="3308466" cy="369332"/>
+          </a:xfrm>
+          <a:prstGeom prst="rect">
+            <a:avLst/>
+          </a:prstGeom>
+          <a:noFill/>
+        </p:spPr>
+        <p:txBody>
+          <a:bodyPr wrap="square">
+            <a:spAutoFit/>
           </a:bodyPr>
           <a:lstStyle/>
           <a:p>
@@ -6876,38 +6946,30 @@
               </a:defRPr>
             </a:pPr>
             <a:r>
-              <a:rPr sz="1600" b="1" dirty="0" err="1">
+              <a:rPr lang="en-US" altLang="zh-CN" sz="1800" b="1" dirty="0">
                 <a:solidFill>
                   <a:srgbClr val="FFFFFF"/>
                 </a:solidFill>
-                <a:latin typeface="Microsoft YaHei UI"/>
-                <a:ea typeface="Microsoft YaHei UI"/>
+                <a:latin typeface="思源黑体 CN Bold" panose="020B0800000000000000" pitchFamily="34" charset="-122"/>
+                <a:ea typeface="思源黑体 CN Bold" panose="020B0800000000000000" pitchFamily="34" charset="-122"/>
                 <a:cs typeface="Microsoft YaHei UI"/>
               </a:rPr>
               <a:t>Sampler + model speedups</a:t>
             </a:r>
-            <a:endParaRPr sz="1600" b="1" dirty="0">
-              <a:solidFill>
-                <a:srgbClr val="FFFFFF"/>
-              </a:solidFill>
-              <a:latin typeface="Microsoft YaHei UI"/>
-              <a:ea typeface="Microsoft YaHei UI"/>
-              <a:cs typeface="Microsoft YaHei UI"/>
-            </a:endParaRPr>
-          </a:p>
-        </ns0:txBody>
-      </ns0:sp>
-    </ns0:spTree>
-    <ns0:extLst>
-      <ns0:ext uri="{BB962C8B-B14F-4D97-AF65-F5344CB8AC3E}">
-        <ns5:creationId val="938083888"/>
-      </ns0:ext>
-    </ns0:extLst>
-  </ns0:cSld>
-  <ns0:clrMapOvr>
+          </a:p>
+        </p:txBody>
+      </p:sp>
+    </p:spTree>
+    <p:extLst>
+      <p:ext uri="{BB962C8B-B14F-4D97-AF65-F5344CB8AC3E}">
+        <p14:creationId xmlns:p14="http://schemas.microsoft.com/office/powerpoint/2010/main" val="938083888"/>
+      </p:ext>
+    </p:extLst>
+  </p:cSld>
+  <p:clrMapOvr>
     <a:masterClrMapping/>
-  </ns0:clrMapOvr>
-</ns0:sld>
+  </p:clrMapOvr>
+</p:sld>
 </file>
 
 <file path=ppt/theme/theme1.xml><?xml version="1.0" encoding="utf-8"?>
